--- a/slides/deck.pptx
+++ b/slides/deck.pptx
@@ -3666,6 +3666,29 @@
             </a:r>
           </a:p>
           <a:p>
+            <a:pPr lvl="0"/>
+            <a:r>
+              <a:rPr/>
+              <a:t>The tools: today’s free chat, </a:t>
+            </a:r>
+            <a:r>
+              <a:rPr b="1"/>
+              <a:t>Gemini Notebook</a:t>
+            </a:r>
+            <a:r>
+              <a:rPr/>
+              <a:t> for your documents, </a:t>
+            </a:r>
+            <a:r>
+              <a:rPr b="1"/>
+              <a:t>Msty</a:t>
+            </a:r>
+            <a:r>
+              <a:rPr/>
+              <a:t> for private local AI — all linked on the site.</a:t>
+            </a:r>
+          </a:p>
+          <a:p>
             <a:pPr lvl="0" indent="0" marL="0">
               <a:spcBef>
                 <a:spcPts val="3000"/>
@@ -4184,7 +4207,7 @@
             </a:pPr>
             <a:r>
               <a:rPr i="1"/>
-              <a:t>Run each on YOUR idea, in parallel with the volunteer’s. Sensitive idea? Work the tradie example today — run yours tonight on a local model.</a:t>
+              <a:t>Run each on YOUR idea, in parallel with the volunteer’s. Sensitive idea? Work the tradie example today — run yours tonight in Msty (one install, nothing leaves your laptop).</a:t>
             </a:r>
           </a:p>
         </p:txBody>

--- a/slides/deck.pptx
+++ b/slides/deck.pptx
@@ -17,6 +17,7 @@
     <p:sldId id="265" r:id="rId11"/>
     <p:sldId id="266" r:id="rId12"/>
     <p:sldId id="267" r:id="rId13"/>
+    <p:sldId id="268" r:id="rId14"/>
   </p:sldIdLst>
   <p:sldSz cx="9144000" cy="5143500" type="screen16x9"/>
   <p:notesSz cx="6858000" cy="9144000"/>
@@ -3398,7 +3399,7 @@
             </a:pPr>
             <a:r>
               <a:rPr/>
-              <a:t>The trust tool</a:t>
+              <a:t>Push back: three ways</a:t>
             </a:r>
           </a:p>
         </p:txBody>
@@ -3418,43 +3419,55 @@
           <a:bodyPr/>
           <a:lstStyle/>
           <a:p>
+            <a:pPr lvl="0" indent="-342900" marL="342900">
+              <a:buAutoNum type="arabicPeriod"/>
+            </a:pPr>
+            <a:r>
+              <a:rPr b="1"/>
+              <a:t>Devil’s advocate</a:t>
+            </a:r>
+            <a:r>
+              <a:rPr/>
+              <a:t> — make it attack your idea; you decide what survives. </a:t>
+            </a:r>
+            <a:r>
+              <a:rPr i="1"/>
+              <a:t>(You just did this in move 2.)</a:t>
+            </a:r>
+          </a:p>
+          <a:p>
+            <a:pPr lvl="0" indent="-342900" marL="342900">
+              <a:buAutoNum type="arabicPeriod"/>
+            </a:pPr>
+            <a:r>
+              <a:rPr b="1"/>
+              <a:t>Board of directors</a:t>
+            </a:r>
+            <a:r>
+              <a:rPr/>
+              <a:t> — a room of voices (CFO, sceptical customer, growth marketer), not one answer. You weigh them.</a:t>
+            </a:r>
+          </a:p>
+          <a:p>
+            <a:pPr lvl="0" indent="-342900" marL="342900">
+              <a:buAutoNum type="arabicPeriod"/>
+            </a:pPr>
+            <a:r>
+              <a:rPr b="1"/>
+              <a:t>VET</a:t>
+            </a:r>
+            <a:r>
+              <a:rPr/>
+              <a:t> — Verify the source · Explain it back · Test the edges. For any claim you can’t check.</a:t>
+            </a:r>
+          </a:p>
+          <a:p>
             <a:pPr lvl="0" indent="0" marL="0">
               <a:buNone/>
             </a:pPr>
             <a:r>
-              <a:rPr b="1"/>
-              <a:t>Average / Precise × Small / Large.</a:t>
-            </a:r>
-          </a:p>
-          <a:p>
-            <a:pPr lvl="0"/>
-            <a:r>
-              <a:rPr b="1"/>
-              <a:t>Lean in:</a:t>
-            </a:r>
-            <a:r>
-              <a:rPr/>
-              <a:t> competitor scans, brainstorming, first drafts.</a:t>
-            </a:r>
-          </a:p>
-          <a:p>
-            <a:pPr lvl="0"/>
-            <a:r>
-              <a:rPr b="1"/>
-              <a:t>Human owns it:</a:t>
-            </a:r>
-            <a:r>
-              <a:rPr/>
-              <a:t> the go/no-go, the customer, the positioning call, any number in a pitch.</a:t>
-            </a:r>
-          </a:p>
-          <a:p>
-            <a:pPr lvl="0" indent="0" marL="0">
-              <a:buNone/>
-            </a:pPr>
-            <a:r>
               <a:rPr i="1"/>
-              <a:t>Where it hurts to be wrong, you stay in charge — and when the grid says verify, VET it.</a:t>
+              <a:t>Prompts for all three are on the companion site.</a:t>
             </a:r>
           </a:p>
         </p:txBody>
@@ -3501,7 +3514,7 @@
             </a:pPr>
             <a:r>
               <a:rPr/>
-              <a:t>The method, in three sentences</a:t>
+              <a:t>The trust tool</a:t>
             </a:r>
           </a:p>
         </p:txBody>
@@ -3521,47 +3534,43 @@
           <a:bodyPr/>
           <a:lstStyle/>
           <a:p>
-            <a:pPr lvl="0" indent="-342900" marL="342900">
-              <a:buAutoNum type="arabicPeriod"/>
+            <a:pPr lvl="0" indent="0" marL="0">
+              <a:buNone/>
             </a:pPr>
             <a:r>
               <a:rPr b="1"/>
-              <a:t>Add context</a:t>
-            </a:r>
-            <a:r>
-              <a:rPr/>
-              <a:t> — the specifics only you hold.</a:t>
-            </a:r>
-          </a:p>
-          <a:p>
-            <a:pPr lvl="0" indent="-342900" marL="342900">
-              <a:buAutoNum type="arabicPeriod"/>
-            </a:pPr>
+              <a:t>Average / Precise × Small / Large.</a:t>
+            </a:r>
+          </a:p>
+          <a:p>
+            <a:pPr lvl="0"/>
             <a:r>
               <a:rPr b="1"/>
-              <a:t>Prompt past the flattery</a:t>
-            </a:r>
-            <a:r>
-              <a:rPr/>
-              <a:t> — ask “why does this fail?”, not “what do you think?”</a:t>
-            </a:r>
-          </a:p>
-          <a:p>
-            <a:pPr lvl="0" indent="-342900" marL="342900">
-              <a:buAutoNum type="arabicPeriod"/>
-            </a:pPr>
+              <a:t>Lean in:</a:t>
+            </a:r>
+            <a:r>
+              <a:rPr/>
+              <a:t> competitor scans, brainstorming, first drafts.</a:t>
+            </a:r>
+          </a:p>
+          <a:p>
+            <a:pPr lvl="0"/>
             <a:r>
               <a:rPr b="1"/>
-              <a:t>Stay sceptical where you know least.</a:t>
-            </a:r>
-          </a:p>
-          <a:p>
-            <a:pPr lvl="0" indent="0" marL="1270000">
-              <a:buNone/>
-            </a:pPr>
-            <a:r>
-              <a:rPr sz="2000"/>
-              <a:t>AI as a thinking partner, not a stand-in.</a:t>
+              <a:t>Human owns it:</a:t>
+            </a:r>
+            <a:r>
+              <a:rPr/>
+              <a:t> the go/no-go, the customer, the positioning call, any number in a pitch.</a:t>
+            </a:r>
+          </a:p>
+          <a:p>
+            <a:pPr lvl="0" indent="0" marL="0">
+              <a:buNone/>
+            </a:pPr>
+            <a:r>
+              <a:rPr i="1"/>
+              <a:t>Where it hurts to be wrong, you stay in charge — and when the grid says verify, VET it.</a:t>
             </a:r>
           </a:p>
         </p:txBody>
@@ -3572,6 +3581,113 @@
 </file>
 
 <file path=ppt/slides/slide12.xml><?xml version="1.0" encoding="utf-8"?>
+<p:sld xmlns:a="http://schemas.openxmlformats.org/drawingml/2006/main" xmlns:r="http://schemas.openxmlformats.org/officeDocument/2006/relationships" xmlns:p="http://schemas.openxmlformats.org/presentationml/2006/main">
+  <p:cSld>
+    <p:spTree>
+      <p:nvGrpSpPr>
+        <p:cNvPr id="1" name=""/>
+        <p:cNvGrpSpPr/>
+        <p:nvPr/>
+      </p:nvGrpSpPr>
+      <p:grpSpPr>
+        <a:xfrm>
+          <a:off x="0" y="0"/>
+          <a:ext cx="0" cy="0"/>
+          <a:chOff x="0" y="0"/>
+          <a:chExt cx="0" cy="0"/>
+        </a:xfrm>
+      </p:grpSpPr>
+      <p:sp>
+        <p:nvSpPr>
+          <p:cNvPr id="2" name="Title 1"/>
+          <p:cNvSpPr>
+            <a:spLocks noGrp="1"/>
+          </p:cNvSpPr>
+          <p:nvPr>
+            <p:ph type="title"/>
+          </p:nvPr>
+        </p:nvSpPr>
+        <p:spPr/>
+        <p:txBody>
+          <a:bodyPr/>
+          <a:lstStyle/>
+          <a:p>
+            <a:pPr lvl="0" indent="0" marL="0">
+              <a:buNone/>
+            </a:pPr>
+            <a:r>
+              <a:rPr/>
+              <a:t>The method, in three sentences</a:t>
+            </a:r>
+          </a:p>
+        </p:txBody>
+      </p:sp>
+      <p:sp>
+        <p:nvSpPr>
+          <p:cNvPr id="3" name="Content Placeholder 2"/>
+          <p:cNvSpPr>
+            <a:spLocks noGrp="1"/>
+          </p:cNvSpPr>
+          <p:nvPr>
+            <p:ph idx="1"/>
+          </p:nvPr>
+        </p:nvSpPr>
+        <p:spPr/>
+        <p:txBody>
+          <a:bodyPr/>
+          <a:lstStyle/>
+          <a:p>
+            <a:pPr lvl="0" indent="-342900" marL="342900">
+              <a:buAutoNum type="arabicPeriod"/>
+            </a:pPr>
+            <a:r>
+              <a:rPr b="1"/>
+              <a:t>Add context</a:t>
+            </a:r>
+            <a:r>
+              <a:rPr/>
+              <a:t> — the specifics only you hold.</a:t>
+            </a:r>
+          </a:p>
+          <a:p>
+            <a:pPr lvl="0" indent="-342900" marL="342900">
+              <a:buAutoNum type="arabicPeriod"/>
+            </a:pPr>
+            <a:r>
+              <a:rPr b="1"/>
+              <a:t>Prompt past the flattery</a:t>
+            </a:r>
+            <a:r>
+              <a:rPr/>
+              <a:t> — ask “why does this fail?”, not “what do you think?”</a:t>
+            </a:r>
+          </a:p>
+          <a:p>
+            <a:pPr lvl="0" indent="-342900" marL="342900">
+              <a:buAutoNum type="arabicPeriod"/>
+            </a:pPr>
+            <a:r>
+              <a:rPr b="1"/>
+              <a:t>Stay sceptical where you know least.</a:t>
+            </a:r>
+          </a:p>
+          <a:p>
+            <a:pPr lvl="0" indent="0" marL="1270000">
+              <a:buNone/>
+            </a:pPr>
+            <a:r>
+              <a:rPr sz="2000"/>
+              <a:t>AI as a thinking partner, not a stand-in.</a:t>
+            </a:r>
+          </a:p>
+        </p:txBody>
+      </p:sp>
+    </p:spTree>
+  </p:cSld>
+</p:sld>
+</file>
+
+<file path=ppt/slides/slide13.xml><?xml version="1.0" encoding="utf-8"?>
 <p:sld xmlns:a="http://schemas.openxmlformats.org/drawingml/2006/main" xmlns:r="http://schemas.openxmlformats.org/officeDocument/2006/relationships" xmlns:p="http://schemas.openxmlformats.org/presentationml/2006/main">
   <p:cSld>
     <p:spTree>
@@ -3912,7 +4028,7 @@
             </a:pPr>
             <a:r>
               <a:rPr/>
-              <a:t>Trap 1: Sycophancy</a:t>
+              <a:t>Walk the talk</a:t>
             </a:r>
           </a:p>
         </p:txBody>
@@ -3932,55 +4048,57 @@
           <a:bodyPr/>
           <a:lstStyle/>
           <a:p>
+            <a:pPr lvl="0"/>
+            <a:r>
+              <a:rPr/>
+              <a:t>One academic, in conversation with AI: </a:t>
+            </a:r>
+            <a:r>
+              <a:rPr b="1"/>
+              <a:t>~30 tools</a:t>
+            </a:r>
+            <a:r>
+              <a:rPr/>
+              <a:t> designed, built, and shipped solo — bigpicture.borck.dev</a:t>
+            </a:r>
+          </a:p>
+          <a:p>
+            <a:pPr lvl="0"/>
+            <a:r>
+              <a:rPr/>
+              <a:t>AI taught at </a:t>
+            </a:r>
+            <a:r>
+              <a:rPr b="1"/>
+              <a:t>undergraduate, postgraduate, and executive</a:t>
+            </a:r>
+            <a:r>
+              <a:rPr/>
+              <a:t> levels (Curtin) — the books are free at books.borck.education</a:t>
+            </a:r>
+          </a:p>
+          <a:p>
+            <a:pPr lvl="0"/>
+            <a:r>
+              <a:rPr/>
+              <a:t>This deck, the companion site, and the poll you just answered were </a:t>
+            </a:r>
+            <a:r>
+              <a:rPr b="1"/>
+              <a:t>built in conversation with AI</a:t>
+            </a:r>
+            <a:r>
+              <a:rPr/>
+              <a:t>. That is the point.</a:t>
+            </a:r>
+          </a:p>
+          <a:p>
             <a:pPr lvl="0" indent="0" marL="0">
               <a:buNone/>
             </a:pPr>
             <a:r>
-              <a:rPr/>
-              <a:t>The model tells you what you want to hear.</a:t>
-            </a:r>
-          </a:p>
-          <a:p>
-            <a:pPr lvl="0" indent="0" marL="0">
-              <a:buNone/>
-            </a:pPr>
-            <a:r>
-              <a:rPr/>
-              <a:t>Ask </a:t>
-            </a:r>
-            <a:r>
               <a:rPr i="1"/>
-              <a:t>“what do you think?”</a:t>
-            </a:r>
-            <a:r>
-              <a:rPr/>
-              <a:t> → praise first, gentle critique second.</a:t>
-            </a:r>
-          </a:p>
-          <a:p>
-            <a:pPr lvl="0" indent="0" marL="0">
-              <a:buNone/>
-            </a:pPr>
-            <a:r>
-              <a:rPr/>
-              <a:t>It’s managing your feelings, not assessing your work.</a:t>
-            </a:r>
-          </a:p>
-          <a:p>
-            <a:pPr lvl="0" indent="0" marL="0">
-              <a:buNone/>
-            </a:pPr>
-            <a:r>
-              <a:rPr b="1"/>
-              <a:t>Defence:</a:t>
-            </a:r>
-            <a:r>
-              <a:rPr/>
-              <a:t> prompt past it. </a:t>
-            </a:r>
-            <a:r>
-              <a:rPr i="1"/>
-              <a:t>(We do this in move 2.)</a:t>
+              <a:t>Thirty seconds, dry understatement, move on.</a:t>
             </a:r>
           </a:p>
         </p:txBody>
@@ -4027,7 +4145,7 @@
             </a:pPr>
             <a:r>
               <a:rPr/>
-              <a:t>Trap 2: Gell-Mann Amnesia</a:t>
+              <a:t>Trap 1: Sycophancy</a:t>
             </a:r>
           </a:p>
         </p:txBody>
@@ -4052,7 +4170,7 @@
             </a:pPr>
             <a:r>
               <a:rPr/>
-              <a:t>You catch its errors in your own domain.</a:t>
+              <a:t>The model tells you what you want to hear.</a:t>
             </a:r>
           </a:p>
           <a:p>
@@ -4061,7 +4179,15 @@
             </a:pPr>
             <a:r>
               <a:rPr/>
-              <a:t>You trust it on the market, the regs, the numbers — the bits you can’t check.</a:t>
+              <a:t>Ask </a:t>
+            </a:r>
+            <a:r>
+              <a:rPr i="1"/>
+              <a:t>“what do you think?”</a:t>
+            </a:r>
+            <a:r>
+              <a:rPr/>
+              <a:t> → praise first, gentle critique second.</a:t>
             </a:r>
           </a:p>
           <a:p>
@@ -4070,11 +4196,24 @@
             </a:pPr>
             <a:r>
               <a:rPr/>
-              <a:t>Smooth prose feels authoritative. </a:t>
-            </a:r>
+              <a:t>It’s managing your feelings, not assessing your work.</a:t>
+            </a:r>
+          </a:p>
+          <a:p>
+            <a:pPr lvl="0" indent="0" marL="0">
+              <a:buNone/>
+            </a:pPr>
             <a:r>
               <a:rPr b="1"/>
-              <a:t>Smoothness ≠ accuracy.</a:t>
+              <a:t>Defence:</a:t>
+            </a:r>
+            <a:r>
+              <a:rPr/>
+              <a:t> prompt past it. </a:t>
+            </a:r>
+            <a:r>
+              <a:rPr i="1"/>
+              <a:t>(We do this in move 2.)</a:t>
             </a:r>
           </a:p>
         </p:txBody>
@@ -4111,6 +4250,100 @@
             <p:ph type="title"/>
           </p:nvPr>
         </p:nvSpPr>
+        <p:spPr/>
+        <p:txBody>
+          <a:bodyPr/>
+          <a:lstStyle/>
+          <a:p>
+            <a:pPr lvl="0" indent="0" marL="0">
+              <a:buNone/>
+            </a:pPr>
+            <a:r>
+              <a:rPr/>
+              <a:t>Trap 2: Gell-Mann Amnesia</a:t>
+            </a:r>
+          </a:p>
+        </p:txBody>
+      </p:sp>
+      <p:sp>
+        <p:nvSpPr>
+          <p:cNvPr id="3" name="Content Placeholder 2"/>
+          <p:cNvSpPr>
+            <a:spLocks noGrp="1"/>
+          </p:cNvSpPr>
+          <p:nvPr>
+            <p:ph idx="1"/>
+          </p:nvPr>
+        </p:nvSpPr>
+        <p:spPr/>
+        <p:txBody>
+          <a:bodyPr/>
+          <a:lstStyle/>
+          <a:p>
+            <a:pPr lvl="0" indent="0" marL="0">
+              <a:buNone/>
+            </a:pPr>
+            <a:r>
+              <a:rPr/>
+              <a:t>You catch its errors in your own domain.</a:t>
+            </a:r>
+          </a:p>
+          <a:p>
+            <a:pPr lvl="0" indent="0" marL="0">
+              <a:buNone/>
+            </a:pPr>
+            <a:r>
+              <a:rPr/>
+              <a:t>You trust it on the market, the regs, the numbers — the bits you can’t check.</a:t>
+            </a:r>
+          </a:p>
+          <a:p>
+            <a:pPr lvl="0" indent="0" marL="0">
+              <a:buNone/>
+            </a:pPr>
+            <a:r>
+              <a:rPr/>
+              <a:t>Smooth prose feels authoritative. </a:t>
+            </a:r>
+            <a:r>
+              <a:rPr b="1"/>
+              <a:t>Smoothness ≠ accuracy.</a:t>
+            </a:r>
+          </a:p>
+        </p:txBody>
+      </p:sp>
+    </p:spTree>
+  </p:cSld>
+</p:sld>
+</file>
+
+<file path=ppt/slides/slide6.xml><?xml version="1.0" encoding="utf-8"?>
+<p:sld xmlns:a="http://schemas.openxmlformats.org/drawingml/2006/main" xmlns:r="http://schemas.openxmlformats.org/officeDocument/2006/relationships" xmlns:p="http://schemas.openxmlformats.org/presentationml/2006/main">
+  <p:cSld>
+    <p:spTree>
+      <p:nvGrpSpPr>
+        <p:cNvPr id="1" name=""/>
+        <p:cNvGrpSpPr/>
+        <p:nvPr/>
+      </p:nvGrpSpPr>
+      <p:grpSpPr>
+        <a:xfrm>
+          <a:off x="0" y="0"/>
+          <a:ext cx="0" cy="0"/>
+          <a:chOff x="0" y="0"/>
+          <a:chExt cx="0" cy="0"/>
+        </a:xfrm>
+      </p:grpSpPr>
+      <p:sp>
+        <p:nvSpPr>
+          <p:cNvPr id="2" name="Title 1"/>
+          <p:cNvSpPr>
+            <a:spLocks noGrp="1"/>
+          </p:cNvSpPr>
+          <p:nvPr>
+            <p:ph type="title"/>
+          </p:nvPr>
+        </p:nvSpPr>
         <p:spPr>
           <a:xfrm>
             <a:off x="457201" y="204787"/>
@@ -4207,7 +4440,25 @@
             </a:pPr>
             <a:r>
               <a:rPr i="1"/>
-              <a:t>Run each on YOUR idea, in parallel with the volunteer’s. Sensitive idea? Work the tradie example today — run yours tonight in Msty (one install, nothing leaves your laptop).</a:t>
+              <a:t>Run each on YOUR idea, in parallel with the volunteer’s — or just watch. Both work.</a:t>
+            </a:r>
+          </a:p>
+          <a:p>
+            <a:pPr lvl="0" indent="0" marL="0">
+              <a:buNone/>
+            </a:pPr>
+            <a:r>
+              <a:rPr i="1"/>
+              <a:t>Open one: gemini.google.com · chatgpt.com · claude.ai</a:t>
+            </a:r>
+          </a:p>
+          <a:p>
+            <a:pPr lvl="0" indent="0" marL="0">
+              <a:buNone/>
+            </a:pPr>
+            <a:r>
+              <a:rPr i="1"/>
+              <a:t>Sensitive idea? Work the tradie example today — run yours tonight in Msty (one install, nothing leaves your laptop).</a:t>
             </a:r>
           </a:p>
         </p:txBody>
@@ -4279,116 +4530,6 @@
 </p:sld>
 </file>
 
-<file path=ppt/slides/slide6.xml><?xml version="1.0" encoding="utf-8"?>
-<p:sld xmlns:a="http://schemas.openxmlformats.org/drawingml/2006/main" xmlns:r="http://schemas.openxmlformats.org/officeDocument/2006/relationships" xmlns:p="http://schemas.openxmlformats.org/presentationml/2006/main">
-  <p:cSld>
-    <p:spTree>
-      <p:nvGrpSpPr>
-        <p:cNvPr id="1" name=""/>
-        <p:cNvGrpSpPr/>
-        <p:nvPr/>
-      </p:nvGrpSpPr>
-      <p:grpSpPr>
-        <a:xfrm>
-          <a:off x="0" y="0"/>
-          <a:ext cx="0" cy="0"/>
-          <a:chOff x="0" y="0"/>
-          <a:chExt cx="0" cy="0"/>
-        </a:xfrm>
-      </p:grpSpPr>
-      <p:sp>
-        <p:nvSpPr>
-          <p:cNvPr id="2" name="Title 1"/>
-          <p:cNvSpPr>
-            <a:spLocks noGrp="1"/>
-          </p:cNvSpPr>
-          <p:nvPr>
-            <p:ph type="title"/>
-          </p:nvPr>
-        </p:nvSpPr>
-        <p:spPr/>
-        <p:txBody>
-          <a:bodyPr/>
-          <a:lstStyle/>
-          <a:p>
-            <a:pPr lvl="0" indent="0" marL="0">
-              <a:buNone/>
-            </a:pPr>
-            <a:r>
-              <a:rPr/>
-              <a:t>Move 1: Validate (two-pass)</a:t>
-            </a:r>
-          </a:p>
-        </p:txBody>
-      </p:sp>
-      <p:sp>
-        <p:nvSpPr>
-          <p:cNvPr id="3" name="Content Placeholder 2"/>
-          <p:cNvSpPr>
-            <a:spLocks noGrp="1"/>
-          </p:cNvSpPr>
-          <p:nvPr>
-            <p:ph idx="1"/>
-          </p:nvPr>
-        </p:nvSpPr>
-        <p:spPr/>
-        <p:txBody>
-          <a:bodyPr/>
-          <a:lstStyle/>
-          <a:p>
-            <a:pPr lvl="0" indent="0" marL="0">
-              <a:buNone/>
-            </a:pPr>
-            <a:r>
-              <a:rPr b="1"/>
-              <a:t>Pass 1 (naive):</a:t>
-            </a:r>
-            <a:r>
-              <a:rPr/>
-              <a:t> an enthusiastic, over-long love-fest. </a:t>
-            </a:r>
-            <a:r>
-              <a:rPr i="1"/>
-              <a:t>Sycophancy, live.</a:t>
-            </a:r>
-          </a:p>
-          <a:p>
-            <a:pPr lvl="0" indent="0" marL="0">
-              <a:buNone/>
-            </a:pPr>
-            <a:r>
-              <a:rPr b="1"/>
-              <a:t>Pass 2 (with edge):</a:t>
-            </a:r>
-            <a:r>
-              <a:rPr/>
-              <a:t> Role · Task · </a:t>
-            </a:r>
-            <a:r>
-              <a:rPr b="1"/>
-              <a:t>Context</a:t>
-            </a:r>
-            <a:r>
-              <a:rPr/>
-              <a:t> · Format.</a:t>
-            </a:r>
-          </a:p>
-          <a:p>
-            <a:pPr lvl="0" indent="0" marL="1270000">
-              <a:buNone/>
-            </a:pPr>
-            <a:r>
-              <a:rPr sz="2000"/>
-              <a:t>Context is where your edge enters. No model supplies it.</a:t>
-            </a:r>
-          </a:p>
-        </p:txBody>
-      </p:sp>
-    </p:spTree>
-  </p:cSld>
-</p:sld>
-</file>
-
 <file path=ppt/slides/slide7.xml><?xml version="1.0" encoding="utf-8"?>
 <p:sld xmlns:a="http://schemas.openxmlformats.org/drawingml/2006/main" xmlns:r="http://schemas.openxmlformats.org/officeDocument/2006/relationships" xmlns:p="http://schemas.openxmlformats.org/presentationml/2006/main">
   <p:cSld>
@@ -4426,7 +4567,7 @@
             </a:pPr>
             <a:r>
               <a:rPr/>
-              <a:t>Move 2: Pressure-test</a:t>
+              <a:t>Move 1: Validate (two-pass)</a:t>
             </a:r>
           </a:p>
         </p:txBody>
@@ -4446,38 +4587,50 @@
           <a:bodyPr/>
           <a:lstStyle/>
           <a:p>
+            <a:pPr lvl="0" indent="0" marL="0">
+              <a:buNone/>
+            </a:pPr>
+            <a:r>
+              <a:rPr b="1"/>
+              <a:t>Pass 1 (naive):</a:t>
+            </a:r>
+            <a:r>
+              <a:rPr/>
+              <a:t> an enthusiastic, over-long love-fest. </a:t>
+            </a:r>
+            <a:r>
+              <a:rPr i="1"/>
+              <a:t>Sycophancy, live.</a:t>
+            </a:r>
+          </a:p>
+          <a:p>
+            <a:pPr lvl="0" indent="0" marL="0">
+              <a:buNone/>
+            </a:pPr>
+            <a:r>
+              <a:rPr b="1"/>
+              <a:t>Pass 2 (with edge):</a:t>
+            </a:r>
+            <a:r>
+              <a:rPr/>
+              <a:t> Role · Task · </a:t>
+            </a:r>
+            <a:r>
+              <a:rPr b="1"/>
+              <a:t>Context</a:t>
+            </a:r>
+            <a:r>
+              <a:rPr/>
+              <a:t> · Format.</a:t>
+            </a:r>
+          </a:p>
+          <a:p>
             <a:pPr lvl="0" indent="0" marL="1270000">
               <a:buNone/>
             </a:pPr>
             <a:r>
               <a:rPr sz="2000"/>
-              <a:t>Do not flatter me. Three reasons this fails. Name the load-bearing assumption.</a:t>
-            </a:r>
-          </a:p>
-          <a:p>
-            <a:pPr lvl="0" indent="0" marL="0">
-              <a:buNone/>
-            </a:pPr>
-            <a:r>
-              <a:rPr/>
-              <a:t>Then: </a:t>
-            </a:r>
-            <a:r>
-              <a:rPr b="1"/>
-              <a:t>Scale / Pivot / Kill</a:t>
-            </a:r>
-            <a:r>
-              <a:rPr/>
-              <a:t> — and the cheapest experiment that moves it up a notch.</a:t>
-            </a:r>
-          </a:p>
-          <a:p>
-            <a:pPr lvl="0" indent="0" marL="0">
-              <a:buNone/>
-            </a:pPr>
-            <a:r>
-              <a:rPr i="1"/>
-              <a:t>Killing is a good outcome.</a:t>
+              <a:t>Context is where your edge enters. No model supplies it.</a:t>
             </a:r>
           </a:p>
         </p:txBody>
@@ -4524,7 +4677,7 @@
             </a:pPr>
             <a:r>
               <a:rPr/>
-              <a:t>Move 3: Sharpen the pitch</a:t>
+              <a:t>Move 2: Pressure-test</a:t>
             </a:r>
           </a:p>
         </p:txBody>
@@ -4544,16 +4697,29 @@
           <a:bodyPr/>
           <a:lstStyle/>
           <a:p>
+            <a:pPr lvl="0" indent="0" marL="1270000">
+              <a:buNone/>
+            </a:pPr>
+            <a:r>
+              <a:rPr sz="2000"/>
+              <a:t>Do not flatter me. Three reasons this fails. Name the load-bearing assumption.</a:t>
+            </a:r>
+          </a:p>
+          <a:p>
             <a:pPr lvl="0" indent="0" marL="0">
               <a:buNone/>
             </a:pPr>
             <a:r>
+              <a:rPr/>
+              <a:t>Then: </a:t>
+            </a:r>
+            <a:r>
               <a:rPr b="1"/>
-              <a:t>Pass 1:</a:t>
-            </a:r>
-            <a:r>
-              <a:rPr/>
-              <a:t> generic 60-word pitch. Forgettable.</a:t>
+              <a:t>Scale / Pivot / Kill</a:t>
+            </a:r>
+            <a:r>
+              <a:rPr/>
+              <a:t> — and the cheapest experiment that moves it up a notch.</a:t>
             </a:r>
           </a:p>
           <a:p>
@@ -4561,20 +4727,8 @@
               <a:buNone/>
             </a:pPr>
             <a:r>
-              <a:rPr b="1"/>
-              <a:t>Pass 2:</a:t>
-            </a:r>
-            <a:r>
-              <a:rPr/>
-              <a:t> in </a:t>
-            </a:r>
-            <a:r>
               <a:rPr i="1"/>
-              <a:t>your</a:t>
-            </a:r>
-            <a:r>
-              <a:rPr/>
-              <a:t> voice, leading with the one thing only you would say.</a:t>
+              <a:t>Killing is a good outcome.</a:t>
             </a:r>
           </a:p>
         </p:txBody>
@@ -4621,7 +4775,7 @@
             </a:pPr>
             <a:r>
               <a:rPr/>
-              <a:t>Push back: three ways</a:t>
+              <a:t>Move 3: Sharpen the pitch</a:t>
             </a:r>
           </a:p>
         </p:txBody>
@@ -4641,55 +4795,37 @@
           <a:bodyPr/>
           <a:lstStyle/>
           <a:p>
-            <a:pPr lvl="0" indent="-342900" marL="342900">
-              <a:buAutoNum type="arabicPeriod"/>
+            <a:pPr lvl="0" indent="0" marL="0">
+              <a:buNone/>
             </a:pPr>
             <a:r>
               <a:rPr b="1"/>
-              <a:t>Devil’s advocate</a:t>
-            </a:r>
-            <a:r>
-              <a:rPr/>
-              <a:t> — make it attack your idea; you decide what survives. </a:t>
+              <a:t>Pass 1:</a:t>
+            </a:r>
+            <a:r>
+              <a:rPr/>
+              <a:t> generic 60-word pitch. Forgettable.</a:t>
+            </a:r>
+          </a:p>
+          <a:p>
+            <a:pPr lvl="0" indent="0" marL="0">
+              <a:buNone/>
+            </a:pPr>
+            <a:r>
+              <a:rPr b="1"/>
+              <a:t>Pass 2:</a:t>
+            </a:r>
+            <a:r>
+              <a:rPr/>
+              <a:t> in </a:t>
             </a:r>
             <a:r>
               <a:rPr i="1"/>
-              <a:t>(You just did this in move 2.)</a:t>
-            </a:r>
-          </a:p>
-          <a:p>
-            <a:pPr lvl="0" indent="-342900" marL="342900">
-              <a:buAutoNum type="arabicPeriod"/>
-            </a:pPr>
-            <a:r>
-              <a:rPr b="1"/>
-              <a:t>Board of directors</a:t>
-            </a:r>
-            <a:r>
-              <a:rPr/>
-              <a:t> — a room of voices (CFO, sceptical customer, growth marketer), not one answer. You weigh them.</a:t>
-            </a:r>
-          </a:p>
-          <a:p>
-            <a:pPr lvl="0" indent="-342900" marL="342900">
-              <a:buAutoNum type="arabicPeriod"/>
-            </a:pPr>
-            <a:r>
-              <a:rPr b="1"/>
-              <a:t>VET</a:t>
-            </a:r>
-            <a:r>
-              <a:rPr/>
-              <a:t> — Verify the source · Explain it back · Test the edges. For any claim you can’t check.</a:t>
-            </a:r>
-          </a:p>
-          <a:p>
-            <a:pPr lvl="0" indent="0" marL="0">
-              <a:buNone/>
-            </a:pPr>
-            <a:r>
-              <a:rPr i="1"/>
-              <a:t>Prompts for all three are on the companion site.</a:t>
+              <a:t>your</a:t>
+            </a:r>
+            <a:r>
+              <a:rPr/>
+              <a:t> voice, leading with the one thing only you would say.</a:t>
             </a:r>
           </a:p>
         </p:txBody>

--- a/slides/deck.pptx
+++ b/slides/deck.pptx
@@ -4086,19 +4086,6 @@
             <a:r>
               <a:rPr b="1"/>
               <a:t>built in conversation with AI</a:t>
-            </a:r>
-            <a:r>
-              <a:rPr/>
-              <a:t>. That is the point.</a:t>
-            </a:r>
-          </a:p>
-          <a:p>
-            <a:pPr lvl="0" indent="0" marL="0">
-              <a:buNone/>
-            </a:pPr>
-            <a:r>
-              <a:rPr i="1"/>
-              <a:t>Thirty seconds, dry understatement, move on.</a:t>
             </a:r>
           </a:p>
         </p:txBody>

--- a/slides/deck.pptx
+++ b/slides/deck.pptx
@@ -1,32 +1,32 @@
 
 <file path=ppt/presentation.xml><?xml version="1.0" encoding="utf-8"?>
-<p:presentation xmlns:a="http://schemas.openxmlformats.org/drawingml/2006/main" xmlns:p="http://schemas.openxmlformats.org/presentationml/2006/main" xmlns:r="http://schemas.openxmlformats.org/officeDocument/2006/relationships" autoCompressPictures="0" saveSubsetFonts="1">
+<p:presentation xmlns:a="http://schemas.openxmlformats.org/drawingml/2006/main" xmlns:r="http://schemas.openxmlformats.org/officeDocument/2006/relationships" xmlns:p="http://schemas.openxmlformats.org/presentationml/2006/main" saveSubsetFonts="1" autoCompressPictures="0">
   <p:sldMasterIdLst>
     <p:sldMasterId id="2147483648" r:id="rId1"/>
   </p:sldMasterIdLst>
   <p:sldIdLst>
-    <p:sldId id="256" r:id="rId2"/>
-    <p:sldId id="257" r:id="rId3"/>
-    <p:sldId id="258" r:id="rId4"/>
-    <p:sldId id="259" r:id="rId5"/>
-    <p:sldId id="260" r:id="rId6"/>
-    <p:sldId id="261" r:id="rId7"/>
-    <p:sldId id="262" r:id="rId8"/>
-    <p:sldId id="263" r:id="rId9"/>
-    <p:sldId id="264" r:id="rId10"/>
-    <p:sldId id="265" r:id="rId11"/>
-    <p:sldId id="266" r:id="rId12"/>
-    <p:sldId id="267" r:id="rId13"/>
-    <p:sldId id="268" r:id="rId14"/>
+    <p:sldId id="256" r:id="rId7"/>
+    <p:sldId id="257" r:id="rId8"/>
+    <p:sldId id="258" r:id="rId9"/>
+    <p:sldId id="259" r:id="rId10"/>
+    <p:sldId id="260" r:id="rId11"/>
+    <p:sldId id="261" r:id="rId12"/>
+    <p:sldId id="262" r:id="rId13"/>
+    <p:sldId id="263" r:id="rId14"/>
+    <p:sldId id="264" r:id="rId15"/>
+    <p:sldId id="265" r:id="rId16"/>
+    <p:sldId id="266" r:id="rId17"/>
+    <p:sldId id="267" r:id="rId18"/>
+    <p:sldId id="268" r:id="rId19"/>
   </p:sldIdLst>
-  <p:sldSz cx="9144000" cy="5143500" type="screen16x9"/>
+  <p:sldSz cx="12192000" cy="6858000" type="screen4x3"/>
   <p:notesSz cx="6858000" cy="9144000"/>
   <p:defaultTextStyle>
     <a:defPPr>
       <a:defRPr lang="en-US"/>
     </a:defPPr>
-    <a:lvl1pPr algn="l" defTabSz="457200" eaLnBrk="1" hangingPunct="1" latinLnBrk="0" marL="0" rtl="0">
-      <a:defRPr kern="1200" sz="1800">
+    <a:lvl1pPr marL="0" algn="l" defTabSz="457200" rtl="0" eaLnBrk="1" latinLnBrk="0" hangingPunct="1">
+      <a:defRPr sz="1800" kern="1200">
         <a:solidFill>
           <a:schemeClr val="tx1"/>
         </a:solidFill>
@@ -35,8 +35,8 @@
         <a:cs typeface="+mn-cs"/>
       </a:defRPr>
     </a:lvl1pPr>
-    <a:lvl2pPr algn="l" defTabSz="457200" eaLnBrk="1" hangingPunct="1" latinLnBrk="0" marL="457200" rtl="0">
-      <a:defRPr kern="1200" sz="1800">
+    <a:lvl2pPr marL="457200" algn="l" defTabSz="457200" rtl="0" eaLnBrk="1" latinLnBrk="0" hangingPunct="1">
+      <a:defRPr sz="1800" kern="1200">
         <a:solidFill>
           <a:schemeClr val="tx1"/>
         </a:solidFill>
@@ -45,8 +45,8 @@
         <a:cs typeface="+mn-cs"/>
       </a:defRPr>
     </a:lvl2pPr>
-    <a:lvl3pPr algn="l" defTabSz="457200" eaLnBrk="1" hangingPunct="1" latinLnBrk="0" marL="914400" rtl="0">
-      <a:defRPr kern="1200" sz="1800">
+    <a:lvl3pPr marL="914400" algn="l" defTabSz="457200" rtl="0" eaLnBrk="1" latinLnBrk="0" hangingPunct="1">
+      <a:defRPr sz="1800" kern="1200">
         <a:solidFill>
           <a:schemeClr val="tx1"/>
         </a:solidFill>
@@ -55,8 +55,8 @@
         <a:cs typeface="+mn-cs"/>
       </a:defRPr>
     </a:lvl3pPr>
-    <a:lvl4pPr algn="l" defTabSz="457200" eaLnBrk="1" hangingPunct="1" latinLnBrk="0" marL="1371600" rtl="0">
-      <a:defRPr kern="1200" sz="1800">
+    <a:lvl4pPr marL="1371600" algn="l" defTabSz="457200" rtl="0" eaLnBrk="1" latinLnBrk="0" hangingPunct="1">
+      <a:defRPr sz="1800" kern="1200">
         <a:solidFill>
           <a:schemeClr val="tx1"/>
         </a:solidFill>
@@ -65,8 +65,8 @@
         <a:cs typeface="+mn-cs"/>
       </a:defRPr>
     </a:lvl4pPr>
-    <a:lvl5pPr algn="l" defTabSz="457200" eaLnBrk="1" hangingPunct="1" latinLnBrk="0" marL="1828800" rtl="0">
-      <a:defRPr kern="1200" sz="1800">
+    <a:lvl5pPr marL="1828800" algn="l" defTabSz="457200" rtl="0" eaLnBrk="1" latinLnBrk="0" hangingPunct="1">
+      <a:defRPr sz="1800" kern="1200">
         <a:solidFill>
           <a:schemeClr val="tx1"/>
         </a:solidFill>
@@ -75,8 +75,8 @@
         <a:cs typeface="+mn-cs"/>
       </a:defRPr>
     </a:lvl5pPr>
-    <a:lvl6pPr algn="l" defTabSz="457200" eaLnBrk="1" hangingPunct="1" latinLnBrk="0" marL="2286000" rtl="0">
-      <a:defRPr kern="1200" sz="1800">
+    <a:lvl6pPr marL="2286000" algn="l" defTabSz="457200" rtl="0" eaLnBrk="1" latinLnBrk="0" hangingPunct="1">
+      <a:defRPr sz="1800" kern="1200">
         <a:solidFill>
           <a:schemeClr val="tx1"/>
         </a:solidFill>
@@ -85,8 +85,8 @@
         <a:cs typeface="+mn-cs"/>
       </a:defRPr>
     </a:lvl6pPr>
-    <a:lvl7pPr algn="l" defTabSz="457200" eaLnBrk="1" hangingPunct="1" latinLnBrk="0" marL="2743200" rtl="0">
-      <a:defRPr kern="1200" sz="1800">
+    <a:lvl7pPr marL="2743200" algn="l" defTabSz="457200" rtl="0" eaLnBrk="1" latinLnBrk="0" hangingPunct="1">
+      <a:defRPr sz="1800" kern="1200">
         <a:solidFill>
           <a:schemeClr val="tx1"/>
         </a:solidFill>
@@ -95,8 +95,8 @@
         <a:cs typeface="+mn-cs"/>
       </a:defRPr>
     </a:lvl7pPr>
-    <a:lvl8pPr algn="l" defTabSz="457200" eaLnBrk="1" hangingPunct="1" latinLnBrk="0" marL="3200400" rtl="0">
-      <a:defRPr kern="1200" sz="1800">
+    <a:lvl8pPr marL="3200400" algn="l" defTabSz="457200" rtl="0" eaLnBrk="1" latinLnBrk="0" hangingPunct="1">
+      <a:defRPr sz="1800" kern="1200">
         <a:solidFill>
           <a:schemeClr val="tx1"/>
         </a:solidFill>
@@ -105,8 +105,8 @@
         <a:cs typeface="+mn-cs"/>
       </a:defRPr>
     </a:lvl8pPr>
-    <a:lvl9pPr algn="l" defTabSz="457200" eaLnBrk="1" hangingPunct="1" latinLnBrk="0" marL="3657600" rtl="0">
-      <a:defRPr kern="1200" sz="1800">
+    <a:lvl9pPr marL="3657600" algn="l" defTabSz="457200" rtl="0" eaLnBrk="1" latinLnBrk="0" hangingPunct="1">
+      <a:defRPr sz="1800" kern="1200">
         <a:solidFill>
           <a:schemeClr val="tx1"/>
         </a:solidFill>
@@ -116,22 +116,6 @@
       </a:defRPr>
     </a:lvl9pPr>
   </p:defaultTextStyle>
-  <p:extLst>
-    <p:ext uri="{EFAFB233-063F-42B5-8137-9DF3F51BA10A}">
-      <p15:sldGuideLst xmlns:p15="http://schemas.microsoft.com/office/powerpoint/2012/main">
-        <p15:guide id="1" orient="horz" pos="1620" userDrawn="1">
-          <p15:clr>
-            <a:srgbClr val="A4A3A4"/>
-          </p15:clr>
-        </p15:guide>
-        <p15:guide id="2" pos="2880" userDrawn="1">
-          <p15:clr>
-            <a:srgbClr val="A4A3A4"/>
-          </p15:clr>
-        </p15:guide>
-      </p15:sldGuideLst>
-    </p:ext>
-  </p:extLst>
 </p:presentation>
 </file>
 
@@ -164,8 +148,8 @@
         </p:nvSpPr>
         <p:spPr>
           <a:xfrm>
-            <a:off x="685800" y="1597819"/>
-            <a:ext cx="7772400" cy="1102519"/>
+            <a:off x="685800" y="2130425"/>
+            <a:ext cx="7772400" cy="1470025"/>
           </a:xfrm>
         </p:spPr>
         <p:txBody>
@@ -173,9 +157,10 @@
           <a:lstStyle/>
           <a:p>
             <a:r>
-              <a:rPr lang="en-US"/>
+              <a:rPr lang="en-US" smtClean="0"/>
               <a:t>Click to edit Master title style</a:t>
             </a:r>
+            <a:endParaRPr lang="en-US"/>
           </a:p>
         </p:txBody>
       </p:sp>
@@ -191,8 +176,8 @@
         </p:nvSpPr>
         <p:spPr>
           <a:xfrm>
-            <a:off x="1371600" y="2914650"/>
-            <a:ext cx="6400800" cy="1314450"/>
+            <a:off x="1371600" y="3886200"/>
+            <a:ext cx="6400800" cy="1752600"/>
           </a:xfrm>
         </p:spPr>
         <p:txBody>
@@ -208,7 +193,7 @@
                 </a:solidFill>
               </a:defRPr>
             </a:lvl1pPr>
-            <a:lvl2pPr marL="342900" indent="0" algn="ctr">
+            <a:lvl2pPr marL="457200" indent="0" algn="ctr">
               <a:buNone/>
               <a:defRPr>
                 <a:solidFill>
@@ -218,7 +203,7 @@
                 </a:solidFill>
               </a:defRPr>
             </a:lvl2pPr>
-            <a:lvl3pPr marL="685800" indent="0" algn="ctr">
+            <a:lvl3pPr marL="914400" indent="0" algn="ctr">
               <a:buNone/>
               <a:defRPr>
                 <a:solidFill>
@@ -228,7 +213,7 @@
                 </a:solidFill>
               </a:defRPr>
             </a:lvl3pPr>
-            <a:lvl4pPr marL="1028700" indent="0" algn="ctr">
+            <a:lvl4pPr marL="1371600" indent="0" algn="ctr">
               <a:buNone/>
               <a:defRPr>
                 <a:solidFill>
@@ -238,7 +223,7 @@
                 </a:solidFill>
               </a:defRPr>
             </a:lvl4pPr>
-            <a:lvl5pPr marL="1371600" indent="0" algn="ctr">
+            <a:lvl5pPr marL="1828800" indent="0" algn="ctr">
               <a:buNone/>
               <a:defRPr>
                 <a:solidFill>
@@ -248,7 +233,7 @@
                 </a:solidFill>
               </a:defRPr>
             </a:lvl5pPr>
-            <a:lvl6pPr marL="1714500" indent="0" algn="ctr">
+            <a:lvl6pPr marL="2286000" indent="0" algn="ctr">
               <a:buNone/>
               <a:defRPr>
                 <a:solidFill>
@@ -258,7 +243,7 @@
                 </a:solidFill>
               </a:defRPr>
             </a:lvl6pPr>
-            <a:lvl7pPr marL="2057400" indent="0" algn="ctr">
+            <a:lvl7pPr marL="2743200" indent="0" algn="ctr">
               <a:buNone/>
               <a:defRPr>
                 <a:solidFill>
@@ -268,7 +253,7 @@
                 </a:solidFill>
               </a:defRPr>
             </a:lvl7pPr>
-            <a:lvl8pPr marL="2400300" indent="0" algn="ctr">
+            <a:lvl8pPr marL="3200400" indent="0" algn="ctr">
               <a:buNone/>
               <a:defRPr>
                 <a:solidFill>
@@ -278,7 +263,7 @@
                 </a:solidFill>
               </a:defRPr>
             </a:lvl8pPr>
-            <a:lvl9pPr marL="2743200" indent="0" algn="ctr">
+            <a:lvl9pPr marL="3657600" indent="0" algn="ctr">
               <a:buNone/>
               <a:defRPr>
                 <a:solidFill>
@@ -291,9 +276,10 @@
           </a:lstStyle>
           <a:p>
             <a:r>
-              <a:rPr lang="en-US"/>
+              <a:rPr lang="en-US" smtClean="0"/>
               <a:t>Click to edit Master subtitle style</a:t>
             </a:r>
+            <a:endParaRPr lang="en-US"/>
           </a:p>
         </p:txBody>
       </p:sp>
@@ -312,9 +298,9 @@
           <a:bodyPr/>
           <a:lstStyle/>
           <a:p>
-            <a:fld id="{241EB5C9-1307-BA42-ABA2-0BC069CD8E7F}" type="datetimeFigureOut">
-              <a:rPr lang="en-US" smtClean="0"/>
-              <a:t>1/2/22</a:t>
+            <a:fld id="{5BCAD085-E8A6-8845-BD4E-CB4CCA059FC4}" type="datetimeFigureOut">
+              <a:rPr lang="en-US" smtClean="0"/>
+              <a:t>1/27/13</a:t>
             </a:fld>
             <a:endParaRPr lang="en-US"/>
           </a:p>
@@ -354,7 +340,7 @@
           <a:bodyPr/>
           <a:lstStyle/>
           <a:p>
-            <a:fld id="{C5EF2332-01BF-834F-8236-50238282D533}" type="slidenum">
+            <a:fld id="{C1FF6DA9-008F-8B48-92A6-B652298478BF}" type="slidenum">
               <a:rPr lang="en-US" smtClean="0"/>
               <a:t>‹#›</a:t>
             </a:fld>
@@ -365,7 +351,7 @@
     </p:spTree>
     <p:extLst>
       <p:ext uri="{BB962C8B-B14F-4D97-AF65-F5344CB8AC3E}">
-        <p14:creationId xmlns:p14="http://schemas.microsoft.com/office/powerpoint/2010/main" val="1444357513"/>
+        <p14:creationId xmlns:p14="http://schemas.microsoft.com/office/powerpoint/2010/main" val="3168075583"/>
       </p:ext>
     </p:extLst>
   </p:cSld>
@@ -408,9 +394,10 @@
           <a:lstStyle/>
           <a:p>
             <a:r>
-              <a:rPr lang="en-US"/>
+              <a:rPr lang="en-US" smtClean="0"/>
               <a:t>Click to edit Master title style</a:t>
             </a:r>
+            <a:endParaRPr lang="en-US"/>
           </a:p>
         </p:txBody>
       </p:sp>
@@ -431,37 +418,38 @@
           <a:p>
             <a:pPr lvl="0"/>
             <a:r>
-              <a:rPr lang="en-US"/>
+              <a:rPr lang="en-US" smtClean="0"/>
               <a:t>Click to edit Master text styles</a:t>
             </a:r>
           </a:p>
           <a:p>
             <a:pPr lvl="1"/>
             <a:r>
-              <a:rPr lang="en-US"/>
+              <a:rPr lang="en-US" smtClean="0"/>
               <a:t>Second level</a:t>
             </a:r>
           </a:p>
           <a:p>
             <a:pPr lvl="2"/>
             <a:r>
-              <a:rPr lang="en-US"/>
+              <a:rPr lang="en-US" smtClean="0"/>
               <a:t>Third level</a:t>
             </a:r>
           </a:p>
           <a:p>
             <a:pPr lvl="3"/>
             <a:r>
-              <a:rPr lang="en-US"/>
+              <a:rPr lang="en-US" smtClean="0"/>
               <a:t>Fourth level</a:t>
             </a:r>
           </a:p>
           <a:p>
             <a:pPr lvl="4"/>
             <a:r>
-              <a:rPr lang="en-US"/>
+              <a:rPr lang="en-US" smtClean="0"/>
               <a:t>Fifth level</a:t>
             </a:r>
+            <a:endParaRPr lang="en-US"/>
           </a:p>
         </p:txBody>
       </p:sp>
@@ -480,9 +468,9 @@
           <a:bodyPr/>
           <a:lstStyle/>
           <a:p>
-            <a:fld id="{241EB5C9-1307-BA42-ABA2-0BC069CD8E7F}" type="datetimeFigureOut">
-              <a:rPr lang="en-US" smtClean="0"/>
-              <a:t>1/2/22</a:t>
+            <a:fld id="{5BCAD085-E8A6-8845-BD4E-CB4CCA059FC4}" type="datetimeFigureOut">
+              <a:rPr lang="en-US" smtClean="0"/>
+              <a:t>1/27/13</a:t>
             </a:fld>
             <a:endParaRPr lang="en-US"/>
           </a:p>
@@ -522,7 +510,7 @@
           <a:bodyPr/>
           <a:lstStyle/>
           <a:p>
-            <a:fld id="{C5EF2332-01BF-834F-8236-50238282D533}" type="slidenum">
+            <a:fld id="{C1FF6DA9-008F-8B48-92A6-B652298478BF}" type="slidenum">
               <a:rPr lang="en-US" smtClean="0"/>
               <a:t>‹#›</a:t>
             </a:fld>
@@ -533,7 +521,7 @@
     </p:spTree>
     <p:extLst>
       <p:ext uri="{BB962C8B-B14F-4D97-AF65-F5344CB8AC3E}">
-        <p14:creationId xmlns:p14="http://schemas.microsoft.com/office/powerpoint/2010/main" val="313914798"/>
+        <p14:creationId xmlns:p14="http://schemas.microsoft.com/office/powerpoint/2010/main" val="2910927964"/>
       </p:ext>
     </p:extLst>
   </p:cSld>
@@ -572,8 +560,8 @@
         </p:nvSpPr>
         <p:spPr>
           <a:xfrm>
-            <a:off x="6629400" y="205979"/>
-            <a:ext cx="2057400" cy="4388644"/>
+            <a:off x="6629400" y="274638"/>
+            <a:ext cx="2057400" cy="5851525"/>
           </a:xfrm>
         </p:spPr>
         <p:txBody>
@@ -581,9 +569,10 @@
           <a:lstStyle/>
           <a:p>
             <a:r>
-              <a:rPr lang="en-US"/>
+              <a:rPr lang="en-US" smtClean="0"/>
               <a:t>Click to edit Master title style</a:t>
             </a:r>
+            <a:endParaRPr lang="en-US"/>
           </a:p>
         </p:txBody>
       </p:sp>
@@ -599,8 +588,8 @@
         </p:nvSpPr>
         <p:spPr>
           <a:xfrm>
-            <a:off x="457200" y="205979"/>
-            <a:ext cx="6019800" cy="4388644"/>
+            <a:off x="457200" y="274638"/>
+            <a:ext cx="6019800" cy="5851525"/>
           </a:xfrm>
         </p:spPr>
         <p:txBody>
@@ -609,37 +598,38 @@
           <a:p>
             <a:pPr lvl="0"/>
             <a:r>
-              <a:rPr lang="en-US"/>
+              <a:rPr lang="en-US" smtClean="0"/>
               <a:t>Click to edit Master text styles</a:t>
             </a:r>
           </a:p>
           <a:p>
             <a:pPr lvl="1"/>
             <a:r>
-              <a:rPr lang="en-US"/>
+              <a:rPr lang="en-US" smtClean="0"/>
               <a:t>Second level</a:t>
             </a:r>
           </a:p>
           <a:p>
             <a:pPr lvl="2"/>
             <a:r>
-              <a:rPr lang="en-US"/>
+              <a:rPr lang="en-US" smtClean="0"/>
               <a:t>Third level</a:t>
             </a:r>
           </a:p>
           <a:p>
             <a:pPr lvl="3"/>
             <a:r>
-              <a:rPr lang="en-US"/>
+              <a:rPr lang="en-US" smtClean="0"/>
               <a:t>Fourth level</a:t>
             </a:r>
           </a:p>
           <a:p>
             <a:pPr lvl="4"/>
             <a:r>
-              <a:rPr lang="en-US"/>
+              <a:rPr lang="en-US" smtClean="0"/>
               <a:t>Fifth level</a:t>
             </a:r>
+            <a:endParaRPr lang="en-US"/>
           </a:p>
         </p:txBody>
       </p:sp>
@@ -658,9 +648,9 @@
           <a:bodyPr/>
           <a:lstStyle/>
           <a:p>
-            <a:fld id="{241EB5C9-1307-BA42-ABA2-0BC069CD8E7F}" type="datetimeFigureOut">
-              <a:rPr lang="en-US" smtClean="0"/>
-              <a:t>1/2/22</a:t>
+            <a:fld id="{5BCAD085-E8A6-8845-BD4E-CB4CCA059FC4}" type="datetimeFigureOut">
+              <a:rPr lang="en-US" smtClean="0"/>
+              <a:t>1/27/13</a:t>
             </a:fld>
             <a:endParaRPr lang="en-US"/>
           </a:p>
@@ -700,7 +690,7 @@
           <a:bodyPr/>
           <a:lstStyle/>
           <a:p>
-            <a:fld id="{C5EF2332-01BF-834F-8236-50238282D533}" type="slidenum">
+            <a:fld id="{C1FF6DA9-008F-8B48-92A6-B652298478BF}" type="slidenum">
               <a:rPr lang="en-US" smtClean="0"/>
               <a:t>‹#›</a:t>
             </a:fld>
@@ -711,7 +701,7 @@
     </p:spTree>
     <p:extLst>
       <p:ext uri="{BB962C8B-B14F-4D97-AF65-F5344CB8AC3E}">
-        <p14:creationId xmlns:p14="http://schemas.microsoft.com/office/powerpoint/2010/main" val="2581529045"/>
+        <p14:creationId xmlns:p14="http://schemas.microsoft.com/office/powerpoint/2010/main" val="3612223792"/>
       </p:ext>
     </p:extLst>
   </p:cSld>
@@ -754,9 +744,10 @@
           <a:lstStyle/>
           <a:p>
             <a:r>
-              <a:rPr lang="en-US"/>
+              <a:rPr lang="en-US" smtClean="0"/>
               <a:t>Click to edit Master title style</a:t>
             </a:r>
+            <a:endParaRPr lang="en-US"/>
           </a:p>
         </p:txBody>
       </p:sp>
@@ -777,37 +768,38 @@
           <a:p>
             <a:pPr lvl="0"/>
             <a:r>
-              <a:rPr lang="en-US"/>
+              <a:rPr lang="en-US" smtClean="0"/>
               <a:t>Click to edit Master text styles</a:t>
             </a:r>
           </a:p>
           <a:p>
             <a:pPr lvl="1"/>
             <a:r>
-              <a:rPr lang="en-US"/>
+              <a:rPr lang="en-US" smtClean="0"/>
               <a:t>Second level</a:t>
             </a:r>
           </a:p>
           <a:p>
             <a:pPr lvl="2"/>
             <a:r>
-              <a:rPr lang="en-US"/>
+              <a:rPr lang="en-US" smtClean="0"/>
               <a:t>Third level</a:t>
             </a:r>
           </a:p>
           <a:p>
             <a:pPr lvl="3"/>
             <a:r>
-              <a:rPr lang="en-US"/>
+              <a:rPr lang="en-US" smtClean="0"/>
               <a:t>Fourth level</a:t>
             </a:r>
           </a:p>
           <a:p>
             <a:pPr lvl="4"/>
             <a:r>
-              <a:rPr lang="en-US"/>
+              <a:rPr lang="en-US" smtClean="0"/>
               <a:t>Fifth level</a:t>
             </a:r>
+            <a:endParaRPr lang="en-US"/>
           </a:p>
         </p:txBody>
       </p:sp>
@@ -826,9 +818,9 @@
           <a:bodyPr/>
           <a:lstStyle/>
           <a:p>
-            <a:fld id="{241EB5C9-1307-BA42-ABA2-0BC069CD8E7F}" type="datetimeFigureOut">
-              <a:rPr lang="en-US" smtClean="0"/>
-              <a:t>1/2/22</a:t>
+            <a:fld id="{5BCAD085-E8A6-8845-BD4E-CB4CCA059FC4}" type="datetimeFigureOut">
+              <a:rPr lang="en-US" smtClean="0"/>
+              <a:t>1/27/13</a:t>
             </a:fld>
             <a:endParaRPr lang="en-US"/>
           </a:p>
@@ -868,7 +860,7 @@
           <a:bodyPr/>
           <a:lstStyle/>
           <a:p>
-            <a:fld id="{C5EF2332-01BF-834F-8236-50238282D533}" type="slidenum">
+            <a:fld id="{C1FF6DA9-008F-8B48-92A6-B652298478BF}" type="slidenum">
               <a:rPr lang="en-US" smtClean="0"/>
               <a:t>‹#›</a:t>
             </a:fld>
@@ -879,7 +871,7 @@
     </p:spTree>
     <p:extLst>
       <p:ext uri="{BB962C8B-B14F-4D97-AF65-F5344CB8AC3E}">
-        <p14:creationId xmlns:p14="http://schemas.microsoft.com/office/powerpoint/2010/main" val="338346009"/>
+        <p14:creationId xmlns:p14="http://schemas.microsoft.com/office/powerpoint/2010/main" val="2614314258"/>
       </p:ext>
     </p:extLst>
   </p:cSld>
@@ -918,22 +910,23 @@
         </p:nvSpPr>
         <p:spPr>
           <a:xfrm>
-            <a:off x="722313" y="3305176"/>
-            <a:ext cx="7772400" cy="1021556"/>
+            <a:off x="722313" y="4406900"/>
+            <a:ext cx="7772400" cy="1362075"/>
           </a:xfrm>
         </p:spPr>
         <p:txBody>
           <a:bodyPr anchor="t"/>
           <a:lstStyle>
             <a:lvl1pPr algn="l">
-              <a:defRPr sz="3000" b="1" cap="all"/>
+              <a:defRPr sz="4000" b="1" cap="all"/>
             </a:lvl1pPr>
           </a:lstStyle>
           <a:p>
             <a:r>
-              <a:rPr lang="en-US"/>
+              <a:rPr lang="en-US" smtClean="0"/>
               <a:t>Click to edit Master title style</a:t>
             </a:r>
+            <a:endParaRPr lang="en-US"/>
           </a:p>
         </p:txBody>
       </p:sp>
@@ -949,8 +942,8 @@
         </p:nvSpPr>
         <p:spPr>
           <a:xfrm>
-            <a:off x="722313" y="2180035"/>
-            <a:ext cx="7772400" cy="1125140"/>
+            <a:off x="722313" y="2906713"/>
+            <a:ext cx="7772400" cy="1500187"/>
           </a:xfrm>
         </p:spPr>
         <p:txBody>
@@ -958,7 +951,7 @@
           <a:lstStyle>
             <a:lvl1pPr marL="0" indent="0">
               <a:buNone/>
-              <a:defRPr sz="1500">
+              <a:defRPr sz="2000">
                 <a:solidFill>
                   <a:schemeClr val="tx1">
                     <a:tint val="75000"/>
@@ -966,9 +959,9 @@
                 </a:solidFill>
               </a:defRPr>
             </a:lvl1pPr>
-            <a:lvl2pPr marL="342900" indent="0">
-              <a:buNone/>
-              <a:defRPr sz="1350">
+            <a:lvl2pPr marL="457200" indent="0">
+              <a:buNone/>
+              <a:defRPr sz="1800">
                 <a:solidFill>
                   <a:schemeClr val="tx1">
                     <a:tint val="75000"/>
@@ -976,9 +969,9 @@
                 </a:solidFill>
               </a:defRPr>
             </a:lvl2pPr>
-            <a:lvl3pPr marL="685800" indent="0">
-              <a:buNone/>
-              <a:defRPr sz="1200">
+            <a:lvl3pPr marL="914400" indent="0">
+              <a:buNone/>
+              <a:defRPr sz="1600">
                 <a:solidFill>
                   <a:schemeClr val="tx1">
                     <a:tint val="75000"/>
@@ -986,9 +979,9 @@
                 </a:solidFill>
               </a:defRPr>
             </a:lvl3pPr>
-            <a:lvl4pPr marL="1028700" indent="0">
-              <a:buNone/>
-              <a:defRPr sz="1050">
+            <a:lvl4pPr marL="1371600" indent="0">
+              <a:buNone/>
+              <a:defRPr sz="1400">
                 <a:solidFill>
                   <a:schemeClr val="tx1">
                     <a:tint val="75000"/>
@@ -996,9 +989,9 @@
                 </a:solidFill>
               </a:defRPr>
             </a:lvl4pPr>
-            <a:lvl5pPr marL="1371600" indent="0">
-              <a:buNone/>
-              <a:defRPr sz="1050">
+            <a:lvl5pPr marL="1828800" indent="0">
+              <a:buNone/>
+              <a:defRPr sz="1400">
                 <a:solidFill>
                   <a:schemeClr val="tx1">
                     <a:tint val="75000"/>
@@ -1006,9 +999,9 @@
                 </a:solidFill>
               </a:defRPr>
             </a:lvl5pPr>
-            <a:lvl6pPr marL="1714500" indent="0">
-              <a:buNone/>
-              <a:defRPr sz="1050">
+            <a:lvl6pPr marL="2286000" indent="0">
+              <a:buNone/>
+              <a:defRPr sz="1400">
                 <a:solidFill>
                   <a:schemeClr val="tx1">
                     <a:tint val="75000"/>
@@ -1016,9 +1009,9 @@
                 </a:solidFill>
               </a:defRPr>
             </a:lvl6pPr>
-            <a:lvl7pPr marL="2057400" indent="0">
-              <a:buNone/>
-              <a:defRPr sz="1050">
+            <a:lvl7pPr marL="2743200" indent="0">
+              <a:buNone/>
+              <a:defRPr sz="1400">
                 <a:solidFill>
                   <a:schemeClr val="tx1">
                     <a:tint val="75000"/>
@@ -1026,9 +1019,9 @@
                 </a:solidFill>
               </a:defRPr>
             </a:lvl7pPr>
-            <a:lvl8pPr marL="2400300" indent="0">
-              <a:buNone/>
-              <a:defRPr sz="1050">
+            <a:lvl8pPr marL="3200400" indent="0">
+              <a:buNone/>
+              <a:defRPr sz="1400">
                 <a:solidFill>
                   <a:schemeClr val="tx1">
                     <a:tint val="75000"/>
@@ -1036,9 +1029,9 @@
                 </a:solidFill>
               </a:defRPr>
             </a:lvl8pPr>
-            <a:lvl9pPr marL="2743200" indent="0">
-              <a:buNone/>
-              <a:defRPr sz="1050">
+            <a:lvl9pPr marL="3657600" indent="0">
+              <a:buNone/>
+              <a:defRPr sz="1400">
                 <a:solidFill>
                   <a:schemeClr val="tx1">
                     <a:tint val="75000"/>
@@ -1050,7 +1043,7 @@
           <a:p>
             <a:pPr lvl="0"/>
             <a:r>
-              <a:rPr lang="en-US"/>
+              <a:rPr lang="en-US" smtClean="0"/>
               <a:t>Click to edit Master text styles</a:t>
             </a:r>
           </a:p>
@@ -1071,9 +1064,9 @@
           <a:bodyPr/>
           <a:lstStyle/>
           <a:p>
-            <a:fld id="{241EB5C9-1307-BA42-ABA2-0BC069CD8E7F}" type="datetimeFigureOut">
-              <a:rPr lang="en-US" smtClean="0"/>
-              <a:t>1/2/22</a:t>
+            <a:fld id="{5BCAD085-E8A6-8845-BD4E-CB4CCA059FC4}" type="datetimeFigureOut">
+              <a:rPr lang="en-US" smtClean="0"/>
+              <a:t>1/27/13</a:t>
             </a:fld>
             <a:endParaRPr lang="en-US"/>
           </a:p>
@@ -1113,7 +1106,7 @@
           <a:bodyPr/>
           <a:lstStyle/>
           <a:p>
-            <a:fld id="{C5EF2332-01BF-834F-8236-50238282D533}" type="slidenum">
+            <a:fld id="{C1FF6DA9-008F-8B48-92A6-B652298478BF}" type="slidenum">
               <a:rPr lang="en-US" smtClean="0"/>
               <a:t>‹#›</a:t>
             </a:fld>
@@ -1124,7 +1117,7 @@
     </p:spTree>
     <p:extLst>
       <p:ext uri="{BB962C8B-B14F-4D97-AF65-F5344CB8AC3E}">
-        <p14:creationId xmlns:p14="http://schemas.microsoft.com/office/powerpoint/2010/main" val="1073069076"/>
+        <p14:creationId xmlns:p14="http://schemas.microsoft.com/office/powerpoint/2010/main" val="960648375"/>
       </p:ext>
     </p:extLst>
   </p:cSld>
@@ -1167,9 +1160,10 @@
           <a:lstStyle/>
           <a:p>
             <a:r>
-              <a:rPr lang="en-US"/>
+              <a:rPr lang="en-US" smtClean="0"/>
               <a:t>Click to edit Master title style</a:t>
             </a:r>
+            <a:endParaRPr lang="en-US"/>
           </a:p>
         </p:txBody>
       </p:sp>
@@ -1185,75 +1179,76 @@
         </p:nvSpPr>
         <p:spPr>
           <a:xfrm>
-            <a:off x="457200" y="1200151"/>
-            <a:ext cx="4038600" cy="3394472"/>
+            <a:off x="457200" y="1600200"/>
+            <a:ext cx="4038600" cy="4525963"/>
           </a:xfrm>
         </p:spPr>
         <p:txBody>
           <a:bodyPr/>
           <a:lstStyle>
             <a:lvl1pPr>
-              <a:defRPr sz="2100"/>
+              <a:defRPr sz="2800"/>
             </a:lvl1pPr>
             <a:lvl2pPr>
-              <a:defRPr sz="1800"/>
+              <a:defRPr sz="2400"/>
             </a:lvl2pPr>
             <a:lvl3pPr>
-              <a:defRPr sz="1500"/>
+              <a:defRPr sz="2000"/>
             </a:lvl3pPr>
             <a:lvl4pPr>
-              <a:defRPr sz="1350"/>
+              <a:defRPr sz="1800"/>
             </a:lvl4pPr>
             <a:lvl5pPr>
-              <a:defRPr sz="1350"/>
+              <a:defRPr sz="1800"/>
             </a:lvl5pPr>
             <a:lvl6pPr>
-              <a:defRPr sz="1350"/>
+              <a:defRPr sz="1800"/>
             </a:lvl6pPr>
             <a:lvl7pPr>
-              <a:defRPr sz="1350"/>
+              <a:defRPr sz="1800"/>
             </a:lvl7pPr>
             <a:lvl8pPr>
-              <a:defRPr sz="1350"/>
+              <a:defRPr sz="1800"/>
             </a:lvl8pPr>
             <a:lvl9pPr>
-              <a:defRPr sz="1350"/>
+              <a:defRPr sz="1800"/>
             </a:lvl9pPr>
           </a:lstStyle>
           <a:p>
             <a:pPr lvl="0"/>
             <a:r>
-              <a:rPr lang="en-US"/>
+              <a:rPr lang="en-US" smtClean="0"/>
               <a:t>Click to edit Master text styles</a:t>
             </a:r>
           </a:p>
           <a:p>
             <a:pPr lvl="1"/>
             <a:r>
-              <a:rPr lang="en-US"/>
+              <a:rPr lang="en-US" smtClean="0"/>
               <a:t>Second level</a:t>
             </a:r>
           </a:p>
           <a:p>
             <a:pPr lvl="2"/>
             <a:r>
-              <a:rPr lang="en-US"/>
+              <a:rPr lang="en-US" smtClean="0"/>
               <a:t>Third level</a:t>
             </a:r>
           </a:p>
           <a:p>
             <a:pPr lvl="3"/>
             <a:r>
-              <a:rPr lang="en-US"/>
+              <a:rPr lang="en-US" smtClean="0"/>
               <a:t>Fourth level</a:t>
             </a:r>
           </a:p>
           <a:p>
             <a:pPr lvl="4"/>
             <a:r>
-              <a:rPr lang="en-US"/>
+              <a:rPr lang="en-US" smtClean="0"/>
               <a:t>Fifth level</a:t>
             </a:r>
+            <a:endParaRPr lang="en-US"/>
           </a:p>
         </p:txBody>
       </p:sp>
@@ -1269,75 +1264,76 @@
         </p:nvSpPr>
         <p:spPr>
           <a:xfrm>
-            <a:off x="4648200" y="1200151"/>
-            <a:ext cx="4038600" cy="3394472"/>
+            <a:off x="4648200" y="1600200"/>
+            <a:ext cx="4038600" cy="4525963"/>
           </a:xfrm>
         </p:spPr>
         <p:txBody>
           <a:bodyPr/>
           <a:lstStyle>
             <a:lvl1pPr>
-              <a:defRPr sz="2100"/>
+              <a:defRPr sz="2800"/>
             </a:lvl1pPr>
             <a:lvl2pPr>
-              <a:defRPr sz="1800"/>
+              <a:defRPr sz="2400"/>
             </a:lvl2pPr>
             <a:lvl3pPr>
-              <a:defRPr sz="1500"/>
+              <a:defRPr sz="2000"/>
             </a:lvl3pPr>
             <a:lvl4pPr>
-              <a:defRPr sz="1350"/>
+              <a:defRPr sz="1800"/>
             </a:lvl4pPr>
             <a:lvl5pPr>
-              <a:defRPr sz="1350"/>
+              <a:defRPr sz="1800"/>
             </a:lvl5pPr>
             <a:lvl6pPr>
-              <a:defRPr sz="1350"/>
+              <a:defRPr sz="1800"/>
             </a:lvl6pPr>
             <a:lvl7pPr>
-              <a:defRPr sz="1350"/>
+              <a:defRPr sz="1800"/>
             </a:lvl7pPr>
             <a:lvl8pPr>
-              <a:defRPr sz="1350"/>
+              <a:defRPr sz="1800"/>
             </a:lvl8pPr>
             <a:lvl9pPr>
-              <a:defRPr sz="1350"/>
+              <a:defRPr sz="1800"/>
             </a:lvl9pPr>
           </a:lstStyle>
           <a:p>
             <a:pPr lvl="0"/>
             <a:r>
-              <a:rPr lang="en-US"/>
+              <a:rPr lang="en-US" smtClean="0"/>
               <a:t>Click to edit Master text styles</a:t>
             </a:r>
           </a:p>
           <a:p>
             <a:pPr lvl="1"/>
             <a:r>
-              <a:rPr lang="en-US"/>
+              <a:rPr lang="en-US" smtClean="0"/>
               <a:t>Second level</a:t>
             </a:r>
           </a:p>
           <a:p>
             <a:pPr lvl="2"/>
             <a:r>
-              <a:rPr lang="en-US"/>
+              <a:rPr lang="en-US" smtClean="0"/>
               <a:t>Third level</a:t>
             </a:r>
           </a:p>
           <a:p>
             <a:pPr lvl="3"/>
             <a:r>
-              <a:rPr lang="en-US"/>
+              <a:rPr lang="en-US" smtClean="0"/>
               <a:t>Fourth level</a:t>
             </a:r>
           </a:p>
           <a:p>
             <a:pPr lvl="4"/>
             <a:r>
-              <a:rPr lang="en-US"/>
+              <a:rPr lang="en-US" smtClean="0"/>
               <a:t>Fifth level</a:t>
             </a:r>
+            <a:endParaRPr lang="en-US"/>
           </a:p>
         </p:txBody>
       </p:sp>
@@ -1356,9 +1352,9 @@
           <a:bodyPr/>
           <a:lstStyle/>
           <a:p>
-            <a:fld id="{241EB5C9-1307-BA42-ABA2-0BC069CD8E7F}" type="datetimeFigureOut">
-              <a:rPr lang="en-US" smtClean="0"/>
-              <a:t>1/2/22</a:t>
+            <a:fld id="{5BCAD085-E8A6-8845-BD4E-CB4CCA059FC4}" type="datetimeFigureOut">
+              <a:rPr lang="en-US" smtClean="0"/>
+              <a:t>1/27/13</a:t>
             </a:fld>
             <a:endParaRPr lang="en-US"/>
           </a:p>
@@ -1398,7 +1394,7 @@
           <a:bodyPr/>
           <a:lstStyle/>
           <a:p>
-            <a:fld id="{C5EF2332-01BF-834F-8236-50238282D533}" type="slidenum">
+            <a:fld id="{C1FF6DA9-008F-8B48-92A6-B652298478BF}" type="slidenum">
               <a:rPr lang="en-US" smtClean="0"/>
               <a:t>‹#›</a:t>
             </a:fld>
@@ -1409,7 +1405,7 @@
     </p:spTree>
     <p:extLst>
       <p:ext uri="{BB962C8B-B14F-4D97-AF65-F5344CB8AC3E}">
-        <p14:creationId xmlns:p14="http://schemas.microsoft.com/office/powerpoint/2010/main" val="2619886245"/>
+        <p14:creationId xmlns:p14="http://schemas.microsoft.com/office/powerpoint/2010/main" val="2782244947"/>
       </p:ext>
     </p:extLst>
   </p:cSld>
@@ -1456,9 +1452,10 @@
           </a:lstStyle>
           <a:p>
             <a:r>
-              <a:rPr lang="en-US"/>
+              <a:rPr lang="en-US" smtClean="0"/>
               <a:t>Click to edit Master title style</a:t>
             </a:r>
+            <a:endParaRPr lang="en-US"/>
           </a:p>
         </p:txBody>
       </p:sp>
@@ -1474,8 +1471,8 @@
         </p:nvSpPr>
         <p:spPr>
           <a:xfrm>
-            <a:off x="457200" y="1151335"/>
-            <a:ext cx="4040188" cy="479822"/>
+            <a:off x="457200" y="1535113"/>
+            <a:ext cx="4040188" cy="639762"/>
           </a:xfrm>
         </p:spPr>
         <p:txBody>
@@ -1483,45 +1480,45 @@
           <a:lstStyle>
             <a:lvl1pPr marL="0" indent="0">
               <a:buNone/>
+              <a:defRPr sz="2400" b="1"/>
+            </a:lvl1pPr>
+            <a:lvl2pPr marL="457200" indent="0">
+              <a:buNone/>
+              <a:defRPr sz="2000" b="1"/>
+            </a:lvl2pPr>
+            <a:lvl3pPr marL="914400" indent="0">
+              <a:buNone/>
               <a:defRPr sz="1800" b="1"/>
-            </a:lvl1pPr>
-            <a:lvl2pPr marL="342900" indent="0">
-              <a:buNone/>
-              <a:defRPr sz="1500" b="1"/>
-            </a:lvl2pPr>
-            <a:lvl3pPr marL="685800" indent="0">
-              <a:buNone/>
-              <a:defRPr sz="1350" b="1"/>
             </a:lvl3pPr>
-            <a:lvl4pPr marL="1028700" indent="0">
-              <a:buNone/>
-              <a:defRPr sz="1200" b="1"/>
+            <a:lvl4pPr marL="1371600" indent="0">
+              <a:buNone/>
+              <a:defRPr sz="1600" b="1"/>
             </a:lvl4pPr>
-            <a:lvl5pPr marL="1371600" indent="0">
-              <a:buNone/>
-              <a:defRPr sz="1200" b="1"/>
+            <a:lvl5pPr marL="1828800" indent="0">
+              <a:buNone/>
+              <a:defRPr sz="1600" b="1"/>
             </a:lvl5pPr>
-            <a:lvl6pPr marL="1714500" indent="0">
-              <a:buNone/>
-              <a:defRPr sz="1200" b="1"/>
+            <a:lvl6pPr marL="2286000" indent="0">
+              <a:buNone/>
+              <a:defRPr sz="1600" b="1"/>
             </a:lvl6pPr>
-            <a:lvl7pPr marL="2057400" indent="0">
-              <a:buNone/>
-              <a:defRPr sz="1200" b="1"/>
+            <a:lvl7pPr marL="2743200" indent="0">
+              <a:buNone/>
+              <a:defRPr sz="1600" b="1"/>
             </a:lvl7pPr>
-            <a:lvl8pPr marL="2400300" indent="0">
-              <a:buNone/>
-              <a:defRPr sz="1200" b="1"/>
+            <a:lvl8pPr marL="3200400" indent="0">
+              <a:buNone/>
+              <a:defRPr sz="1600" b="1"/>
             </a:lvl8pPr>
-            <a:lvl9pPr marL="2743200" indent="0">
-              <a:buNone/>
-              <a:defRPr sz="1200" b="1"/>
+            <a:lvl9pPr marL="3657600" indent="0">
+              <a:buNone/>
+              <a:defRPr sz="1600" b="1"/>
             </a:lvl9pPr>
           </a:lstStyle>
           <a:p>
             <a:pPr lvl="0"/>
             <a:r>
-              <a:rPr lang="en-US"/>
+              <a:rPr lang="en-US" smtClean="0"/>
               <a:t>Click to edit Master text styles</a:t>
             </a:r>
           </a:p>
@@ -1539,75 +1536,76 @@
         </p:nvSpPr>
         <p:spPr>
           <a:xfrm>
-            <a:off x="457200" y="1631156"/>
-            <a:ext cx="4040188" cy="2963466"/>
+            <a:off x="457200" y="2174875"/>
+            <a:ext cx="4040188" cy="3951288"/>
           </a:xfrm>
         </p:spPr>
         <p:txBody>
           <a:bodyPr/>
           <a:lstStyle>
             <a:lvl1pPr>
-              <a:defRPr sz="1800"/>
+              <a:defRPr sz="2400"/>
             </a:lvl1pPr>
             <a:lvl2pPr>
-              <a:defRPr sz="1500"/>
+              <a:defRPr sz="2000"/>
             </a:lvl2pPr>
             <a:lvl3pPr>
-              <a:defRPr sz="1350"/>
+              <a:defRPr sz="1800"/>
             </a:lvl3pPr>
             <a:lvl4pPr>
-              <a:defRPr sz="1200"/>
+              <a:defRPr sz="1600"/>
             </a:lvl4pPr>
             <a:lvl5pPr>
-              <a:defRPr sz="1200"/>
+              <a:defRPr sz="1600"/>
             </a:lvl5pPr>
             <a:lvl6pPr>
-              <a:defRPr sz="1200"/>
+              <a:defRPr sz="1600"/>
             </a:lvl6pPr>
             <a:lvl7pPr>
-              <a:defRPr sz="1200"/>
+              <a:defRPr sz="1600"/>
             </a:lvl7pPr>
             <a:lvl8pPr>
-              <a:defRPr sz="1200"/>
+              <a:defRPr sz="1600"/>
             </a:lvl8pPr>
             <a:lvl9pPr>
-              <a:defRPr sz="1200"/>
+              <a:defRPr sz="1600"/>
             </a:lvl9pPr>
           </a:lstStyle>
           <a:p>
             <a:pPr lvl="0"/>
             <a:r>
-              <a:rPr lang="en-US"/>
+              <a:rPr lang="en-US" smtClean="0"/>
               <a:t>Click to edit Master text styles</a:t>
             </a:r>
           </a:p>
           <a:p>
             <a:pPr lvl="1"/>
             <a:r>
-              <a:rPr lang="en-US"/>
+              <a:rPr lang="en-US" smtClean="0"/>
               <a:t>Second level</a:t>
             </a:r>
           </a:p>
           <a:p>
             <a:pPr lvl="2"/>
             <a:r>
-              <a:rPr lang="en-US"/>
+              <a:rPr lang="en-US" smtClean="0"/>
               <a:t>Third level</a:t>
             </a:r>
           </a:p>
           <a:p>
             <a:pPr lvl="3"/>
             <a:r>
-              <a:rPr lang="en-US"/>
+              <a:rPr lang="en-US" smtClean="0"/>
               <a:t>Fourth level</a:t>
             </a:r>
           </a:p>
           <a:p>
             <a:pPr lvl="4"/>
             <a:r>
-              <a:rPr lang="en-US"/>
+              <a:rPr lang="en-US" smtClean="0"/>
               <a:t>Fifth level</a:t>
             </a:r>
+            <a:endParaRPr lang="en-US"/>
           </a:p>
         </p:txBody>
       </p:sp>
@@ -1623,8 +1621,8 @@
         </p:nvSpPr>
         <p:spPr>
           <a:xfrm>
-            <a:off x="4645026" y="1151335"/>
-            <a:ext cx="4041775" cy="479822"/>
+            <a:off x="4645025" y="1535113"/>
+            <a:ext cx="4041775" cy="639762"/>
           </a:xfrm>
         </p:spPr>
         <p:txBody>
@@ -1632,45 +1630,45 @@
           <a:lstStyle>
             <a:lvl1pPr marL="0" indent="0">
               <a:buNone/>
+              <a:defRPr sz="2400" b="1"/>
+            </a:lvl1pPr>
+            <a:lvl2pPr marL="457200" indent="0">
+              <a:buNone/>
+              <a:defRPr sz="2000" b="1"/>
+            </a:lvl2pPr>
+            <a:lvl3pPr marL="914400" indent="0">
+              <a:buNone/>
               <a:defRPr sz="1800" b="1"/>
-            </a:lvl1pPr>
-            <a:lvl2pPr marL="342900" indent="0">
-              <a:buNone/>
-              <a:defRPr sz="1500" b="1"/>
-            </a:lvl2pPr>
-            <a:lvl3pPr marL="685800" indent="0">
-              <a:buNone/>
-              <a:defRPr sz="1350" b="1"/>
             </a:lvl3pPr>
-            <a:lvl4pPr marL="1028700" indent="0">
-              <a:buNone/>
-              <a:defRPr sz="1200" b="1"/>
+            <a:lvl4pPr marL="1371600" indent="0">
+              <a:buNone/>
+              <a:defRPr sz="1600" b="1"/>
             </a:lvl4pPr>
-            <a:lvl5pPr marL="1371600" indent="0">
-              <a:buNone/>
-              <a:defRPr sz="1200" b="1"/>
+            <a:lvl5pPr marL="1828800" indent="0">
+              <a:buNone/>
+              <a:defRPr sz="1600" b="1"/>
             </a:lvl5pPr>
-            <a:lvl6pPr marL="1714500" indent="0">
-              <a:buNone/>
-              <a:defRPr sz="1200" b="1"/>
+            <a:lvl6pPr marL="2286000" indent="0">
+              <a:buNone/>
+              <a:defRPr sz="1600" b="1"/>
             </a:lvl6pPr>
-            <a:lvl7pPr marL="2057400" indent="0">
-              <a:buNone/>
-              <a:defRPr sz="1200" b="1"/>
+            <a:lvl7pPr marL="2743200" indent="0">
+              <a:buNone/>
+              <a:defRPr sz="1600" b="1"/>
             </a:lvl7pPr>
-            <a:lvl8pPr marL="2400300" indent="0">
-              <a:buNone/>
-              <a:defRPr sz="1200" b="1"/>
+            <a:lvl8pPr marL="3200400" indent="0">
+              <a:buNone/>
+              <a:defRPr sz="1600" b="1"/>
             </a:lvl8pPr>
-            <a:lvl9pPr marL="2743200" indent="0">
-              <a:buNone/>
-              <a:defRPr sz="1200" b="1"/>
+            <a:lvl9pPr marL="3657600" indent="0">
+              <a:buNone/>
+              <a:defRPr sz="1600" b="1"/>
             </a:lvl9pPr>
           </a:lstStyle>
           <a:p>
             <a:pPr lvl="0"/>
             <a:r>
-              <a:rPr lang="en-US"/>
+              <a:rPr lang="en-US" smtClean="0"/>
               <a:t>Click to edit Master text styles</a:t>
             </a:r>
           </a:p>
@@ -1688,75 +1686,76 @@
         </p:nvSpPr>
         <p:spPr>
           <a:xfrm>
-            <a:off x="4645026" y="1631156"/>
-            <a:ext cx="4041775" cy="2963466"/>
+            <a:off x="4645025" y="2174875"/>
+            <a:ext cx="4041775" cy="3951288"/>
           </a:xfrm>
         </p:spPr>
         <p:txBody>
           <a:bodyPr/>
           <a:lstStyle>
             <a:lvl1pPr>
-              <a:defRPr sz="1800"/>
+              <a:defRPr sz="2400"/>
             </a:lvl1pPr>
             <a:lvl2pPr>
-              <a:defRPr sz="1500"/>
+              <a:defRPr sz="2000"/>
             </a:lvl2pPr>
             <a:lvl3pPr>
-              <a:defRPr sz="1350"/>
+              <a:defRPr sz="1800"/>
             </a:lvl3pPr>
             <a:lvl4pPr>
-              <a:defRPr sz="1200"/>
+              <a:defRPr sz="1600"/>
             </a:lvl4pPr>
             <a:lvl5pPr>
-              <a:defRPr sz="1200"/>
+              <a:defRPr sz="1600"/>
             </a:lvl5pPr>
             <a:lvl6pPr>
-              <a:defRPr sz="1200"/>
+              <a:defRPr sz="1600"/>
             </a:lvl6pPr>
             <a:lvl7pPr>
-              <a:defRPr sz="1200"/>
+              <a:defRPr sz="1600"/>
             </a:lvl7pPr>
             <a:lvl8pPr>
-              <a:defRPr sz="1200"/>
+              <a:defRPr sz="1600"/>
             </a:lvl8pPr>
             <a:lvl9pPr>
-              <a:defRPr sz="1200"/>
+              <a:defRPr sz="1600"/>
             </a:lvl9pPr>
           </a:lstStyle>
           <a:p>
             <a:pPr lvl="0"/>
             <a:r>
-              <a:rPr lang="en-US"/>
+              <a:rPr lang="en-US" smtClean="0"/>
               <a:t>Click to edit Master text styles</a:t>
             </a:r>
           </a:p>
           <a:p>
             <a:pPr lvl="1"/>
             <a:r>
-              <a:rPr lang="en-US"/>
+              <a:rPr lang="en-US" smtClean="0"/>
               <a:t>Second level</a:t>
             </a:r>
           </a:p>
           <a:p>
             <a:pPr lvl="2"/>
             <a:r>
-              <a:rPr lang="en-US"/>
+              <a:rPr lang="en-US" smtClean="0"/>
               <a:t>Third level</a:t>
             </a:r>
           </a:p>
           <a:p>
             <a:pPr lvl="3"/>
             <a:r>
-              <a:rPr lang="en-US"/>
+              <a:rPr lang="en-US" smtClean="0"/>
               <a:t>Fourth level</a:t>
             </a:r>
           </a:p>
           <a:p>
             <a:pPr lvl="4"/>
             <a:r>
-              <a:rPr lang="en-US"/>
+              <a:rPr lang="en-US" smtClean="0"/>
               <a:t>Fifth level</a:t>
             </a:r>
+            <a:endParaRPr lang="en-US"/>
           </a:p>
         </p:txBody>
       </p:sp>
@@ -1775,9 +1774,9 @@
           <a:bodyPr/>
           <a:lstStyle/>
           <a:p>
-            <a:fld id="{241EB5C9-1307-BA42-ABA2-0BC069CD8E7F}" type="datetimeFigureOut">
-              <a:rPr lang="en-US" smtClean="0"/>
-              <a:t>1/2/22</a:t>
+            <a:fld id="{5BCAD085-E8A6-8845-BD4E-CB4CCA059FC4}" type="datetimeFigureOut">
+              <a:rPr lang="en-US" smtClean="0"/>
+              <a:t>1/27/13</a:t>
             </a:fld>
             <a:endParaRPr lang="en-US"/>
           </a:p>
@@ -1817,7 +1816,7 @@
           <a:bodyPr/>
           <a:lstStyle/>
           <a:p>
-            <a:fld id="{C5EF2332-01BF-834F-8236-50238282D533}" type="slidenum">
+            <a:fld id="{C1FF6DA9-008F-8B48-92A6-B652298478BF}" type="slidenum">
               <a:rPr lang="en-US" smtClean="0"/>
               <a:t>‹#›</a:t>
             </a:fld>
@@ -1828,7 +1827,7 @@
     </p:spTree>
     <p:extLst>
       <p:ext uri="{BB962C8B-B14F-4D97-AF65-F5344CB8AC3E}">
-        <p14:creationId xmlns:p14="http://schemas.microsoft.com/office/powerpoint/2010/main" val="2535793967"/>
+        <p14:creationId xmlns:p14="http://schemas.microsoft.com/office/powerpoint/2010/main" val="990158736"/>
       </p:ext>
     </p:extLst>
   </p:cSld>
@@ -1871,9 +1870,10 @@
           <a:lstStyle/>
           <a:p>
             <a:r>
-              <a:rPr lang="en-US"/>
+              <a:rPr lang="en-US" smtClean="0"/>
               <a:t>Click to edit Master title style</a:t>
             </a:r>
+            <a:endParaRPr lang="en-US"/>
           </a:p>
         </p:txBody>
       </p:sp>
@@ -1892,9 +1892,9 @@
           <a:bodyPr/>
           <a:lstStyle/>
           <a:p>
-            <a:fld id="{241EB5C9-1307-BA42-ABA2-0BC069CD8E7F}" type="datetimeFigureOut">
-              <a:rPr lang="en-US" smtClean="0"/>
-              <a:t>1/2/22</a:t>
+            <a:fld id="{5BCAD085-E8A6-8845-BD4E-CB4CCA059FC4}" type="datetimeFigureOut">
+              <a:rPr lang="en-US" smtClean="0"/>
+              <a:t>1/27/13</a:t>
             </a:fld>
             <a:endParaRPr lang="en-US"/>
           </a:p>
@@ -1934,7 +1934,7 @@
           <a:bodyPr/>
           <a:lstStyle/>
           <a:p>
-            <a:fld id="{C5EF2332-01BF-834F-8236-50238282D533}" type="slidenum">
+            <a:fld id="{C1FF6DA9-008F-8B48-92A6-B652298478BF}" type="slidenum">
               <a:rPr lang="en-US" smtClean="0"/>
               <a:t>‹#›</a:t>
             </a:fld>
@@ -1945,7 +1945,7 @@
     </p:spTree>
     <p:extLst>
       <p:ext uri="{BB962C8B-B14F-4D97-AF65-F5344CB8AC3E}">
-        <p14:creationId xmlns:p14="http://schemas.microsoft.com/office/powerpoint/2010/main" val="3472721253"/>
+        <p14:creationId xmlns:p14="http://schemas.microsoft.com/office/powerpoint/2010/main" val="727027711"/>
       </p:ext>
     </p:extLst>
   </p:cSld>
@@ -1987,9 +1987,9 @@
           <a:bodyPr/>
           <a:lstStyle/>
           <a:p>
-            <a:fld id="{241EB5C9-1307-BA42-ABA2-0BC069CD8E7F}" type="datetimeFigureOut">
-              <a:rPr lang="en-US" smtClean="0"/>
-              <a:t>1/2/22</a:t>
+            <a:fld id="{5BCAD085-E8A6-8845-BD4E-CB4CCA059FC4}" type="datetimeFigureOut">
+              <a:rPr lang="en-US" smtClean="0"/>
+              <a:t>1/27/13</a:t>
             </a:fld>
             <a:endParaRPr lang="en-US"/>
           </a:p>
@@ -2029,7 +2029,7 @@
           <a:bodyPr/>
           <a:lstStyle/>
           <a:p>
-            <a:fld id="{C5EF2332-01BF-834F-8236-50238282D533}" type="slidenum">
+            <a:fld id="{C1FF6DA9-008F-8B48-92A6-B652298478BF}" type="slidenum">
               <a:rPr lang="en-US" smtClean="0"/>
               <a:t>‹#›</a:t>
             </a:fld>
@@ -2040,7 +2040,7 @@
     </p:spTree>
     <p:extLst>
       <p:ext uri="{BB962C8B-B14F-4D97-AF65-F5344CB8AC3E}">
-        <p14:creationId xmlns:p14="http://schemas.microsoft.com/office/powerpoint/2010/main" val="2130901097"/>
+        <p14:creationId xmlns:p14="http://schemas.microsoft.com/office/powerpoint/2010/main" val="1212999818"/>
       </p:ext>
     </p:extLst>
   </p:cSld>
@@ -2079,22 +2079,23 @@
         </p:nvSpPr>
         <p:spPr>
           <a:xfrm>
-            <a:off x="457201" y="204787"/>
-            <a:ext cx="3008313" cy="871538"/>
+            <a:off x="457200" y="273050"/>
+            <a:ext cx="3008313" cy="1162050"/>
           </a:xfrm>
         </p:spPr>
         <p:txBody>
           <a:bodyPr anchor="b"/>
           <a:lstStyle>
             <a:lvl1pPr algn="l">
-              <a:defRPr sz="1500" b="1"/>
+              <a:defRPr sz="2000" b="1"/>
             </a:lvl1pPr>
           </a:lstStyle>
           <a:p>
             <a:r>
-              <a:rPr lang="en-US"/>
+              <a:rPr lang="en-US" smtClean="0"/>
               <a:t>Click to edit Master title style</a:t>
             </a:r>
+            <a:endParaRPr lang="en-US"/>
           </a:p>
         </p:txBody>
       </p:sp>
@@ -2110,75 +2111,76 @@
         </p:nvSpPr>
         <p:spPr>
           <a:xfrm>
-            <a:off x="3575050" y="204788"/>
-            <a:ext cx="5111750" cy="4389835"/>
+            <a:off x="3575050" y="273050"/>
+            <a:ext cx="5111750" cy="5853113"/>
           </a:xfrm>
         </p:spPr>
         <p:txBody>
           <a:bodyPr/>
           <a:lstStyle>
             <a:lvl1pPr>
-              <a:defRPr sz="2400"/>
+              <a:defRPr sz="3200"/>
             </a:lvl1pPr>
             <a:lvl2pPr>
-              <a:defRPr sz="2100"/>
+              <a:defRPr sz="2800"/>
             </a:lvl2pPr>
             <a:lvl3pPr>
-              <a:defRPr sz="1800"/>
+              <a:defRPr sz="2400"/>
             </a:lvl3pPr>
             <a:lvl4pPr>
-              <a:defRPr sz="1500"/>
+              <a:defRPr sz="2000"/>
             </a:lvl4pPr>
             <a:lvl5pPr>
-              <a:defRPr sz="1500"/>
+              <a:defRPr sz="2000"/>
             </a:lvl5pPr>
             <a:lvl6pPr>
-              <a:defRPr sz="1500"/>
+              <a:defRPr sz="2000"/>
             </a:lvl6pPr>
             <a:lvl7pPr>
-              <a:defRPr sz="1500"/>
+              <a:defRPr sz="2000"/>
             </a:lvl7pPr>
             <a:lvl8pPr>
-              <a:defRPr sz="1500"/>
+              <a:defRPr sz="2000"/>
             </a:lvl8pPr>
             <a:lvl9pPr>
-              <a:defRPr sz="1500"/>
+              <a:defRPr sz="2000"/>
             </a:lvl9pPr>
           </a:lstStyle>
           <a:p>
             <a:pPr lvl="0"/>
             <a:r>
-              <a:rPr lang="en-US"/>
+              <a:rPr lang="en-US" smtClean="0"/>
               <a:t>Click to edit Master text styles</a:t>
             </a:r>
           </a:p>
           <a:p>
             <a:pPr lvl="1"/>
             <a:r>
-              <a:rPr lang="en-US"/>
+              <a:rPr lang="en-US" smtClean="0"/>
               <a:t>Second level</a:t>
             </a:r>
           </a:p>
           <a:p>
             <a:pPr lvl="2"/>
             <a:r>
-              <a:rPr lang="en-US"/>
+              <a:rPr lang="en-US" smtClean="0"/>
               <a:t>Third level</a:t>
             </a:r>
           </a:p>
           <a:p>
             <a:pPr lvl="3"/>
             <a:r>
-              <a:rPr lang="en-US"/>
+              <a:rPr lang="en-US" smtClean="0"/>
               <a:t>Fourth level</a:t>
             </a:r>
           </a:p>
           <a:p>
             <a:pPr lvl="4"/>
             <a:r>
-              <a:rPr lang="en-US"/>
+              <a:rPr lang="en-US" smtClean="0"/>
               <a:t>Fifth level</a:t>
             </a:r>
+            <a:endParaRPr lang="en-US"/>
           </a:p>
         </p:txBody>
       </p:sp>
@@ -2194,8 +2196,8 @@
         </p:nvSpPr>
         <p:spPr>
           <a:xfrm>
-            <a:off x="457201" y="1076326"/>
-            <a:ext cx="3008313" cy="3518297"/>
+            <a:off x="457200" y="1435100"/>
+            <a:ext cx="3008313" cy="4691063"/>
           </a:xfrm>
         </p:spPr>
         <p:txBody>
@@ -2203,45 +2205,45 @@
           <a:lstStyle>
             <a:lvl1pPr marL="0" indent="0">
               <a:buNone/>
-              <a:defRPr sz="1050"/>
+              <a:defRPr sz="1400"/>
             </a:lvl1pPr>
-            <a:lvl2pPr marL="342900" indent="0">
+            <a:lvl2pPr marL="457200" indent="0">
+              <a:buNone/>
+              <a:defRPr sz="1200"/>
+            </a:lvl2pPr>
+            <a:lvl3pPr marL="914400" indent="0">
+              <a:buNone/>
+              <a:defRPr sz="1000"/>
+            </a:lvl3pPr>
+            <a:lvl4pPr marL="1371600" indent="0">
               <a:buNone/>
               <a:defRPr sz="900"/>
-            </a:lvl2pPr>
-            <a:lvl3pPr marL="685800" indent="0">
-              <a:buNone/>
-              <a:defRPr sz="750"/>
-            </a:lvl3pPr>
-            <a:lvl4pPr marL="1028700" indent="0">
-              <a:buNone/>
-              <a:defRPr sz="675"/>
             </a:lvl4pPr>
-            <a:lvl5pPr marL="1371600" indent="0">
-              <a:buNone/>
-              <a:defRPr sz="675"/>
+            <a:lvl5pPr marL="1828800" indent="0">
+              <a:buNone/>
+              <a:defRPr sz="900"/>
             </a:lvl5pPr>
-            <a:lvl6pPr marL="1714500" indent="0">
-              <a:buNone/>
-              <a:defRPr sz="675"/>
+            <a:lvl6pPr marL="2286000" indent="0">
+              <a:buNone/>
+              <a:defRPr sz="900"/>
             </a:lvl6pPr>
-            <a:lvl7pPr marL="2057400" indent="0">
-              <a:buNone/>
-              <a:defRPr sz="675"/>
+            <a:lvl7pPr marL="2743200" indent="0">
+              <a:buNone/>
+              <a:defRPr sz="900"/>
             </a:lvl7pPr>
-            <a:lvl8pPr marL="2400300" indent="0">
-              <a:buNone/>
-              <a:defRPr sz="675"/>
+            <a:lvl8pPr marL="3200400" indent="0">
+              <a:buNone/>
+              <a:defRPr sz="900"/>
             </a:lvl8pPr>
-            <a:lvl9pPr marL="2743200" indent="0">
-              <a:buNone/>
-              <a:defRPr sz="675"/>
+            <a:lvl9pPr marL="3657600" indent="0">
+              <a:buNone/>
+              <a:defRPr sz="900"/>
             </a:lvl9pPr>
           </a:lstStyle>
           <a:p>
             <a:pPr lvl="0"/>
             <a:r>
-              <a:rPr lang="en-US"/>
+              <a:rPr lang="en-US" smtClean="0"/>
               <a:t>Click to edit Master text styles</a:t>
             </a:r>
           </a:p>
@@ -2262,9 +2264,9 @@
           <a:bodyPr/>
           <a:lstStyle/>
           <a:p>
-            <a:fld id="{241EB5C9-1307-BA42-ABA2-0BC069CD8E7F}" type="datetimeFigureOut">
-              <a:rPr lang="en-US" smtClean="0"/>
-              <a:t>1/2/22</a:t>
+            <a:fld id="{5BCAD085-E8A6-8845-BD4E-CB4CCA059FC4}" type="datetimeFigureOut">
+              <a:rPr lang="en-US" smtClean="0"/>
+              <a:t>1/27/13</a:t>
             </a:fld>
             <a:endParaRPr lang="en-US"/>
           </a:p>
@@ -2304,7 +2306,7 @@
           <a:bodyPr/>
           <a:lstStyle/>
           <a:p>
-            <a:fld id="{C5EF2332-01BF-834F-8236-50238282D533}" type="slidenum">
+            <a:fld id="{C1FF6DA9-008F-8B48-92A6-B652298478BF}" type="slidenum">
               <a:rPr lang="en-US" smtClean="0"/>
               <a:t>‹#›</a:t>
             </a:fld>
@@ -2315,7 +2317,7 @@
     </p:spTree>
     <p:extLst>
       <p:ext uri="{BB962C8B-B14F-4D97-AF65-F5344CB8AC3E}">
-        <p14:creationId xmlns:p14="http://schemas.microsoft.com/office/powerpoint/2010/main" val="3540895647"/>
+        <p14:creationId xmlns:p14="http://schemas.microsoft.com/office/powerpoint/2010/main" val="1840726560"/>
       </p:ext>
     </p:extLst>
   </p:cSld>
@@ -2354,22 +2356,23 @@
         </p:nvSpPr>
         <p:spPr>
           <a:xfrm>
-            <a:off x="1792288" y="3600450"/>
-            <a:ext cx="5486400" cy="425054"/>
+            <a:off x="1792288" y="4800600"/>
+            <a:ext cx="5486400" cy="566738"/>
           </a:xfrm>
         </p:spPr>
         <p:txBody>
           <a:bodyPr anchor="b"/>
           <a:lstStyle>
             <a:lvl1pPr algn="l">
-              <a:defRPr sz="1500" b="1"/>
+              <a:defRPr sz="2000" b="1"/>
             </a:lvl1pPr>
           </a:lstStyle>
           <a:p>
             <a:r>
-              <a:rPr lang="en-US"/>
+              <a:rPr lang="en-US" smtClean="0"/>
               <a:t>Click to edit Master title style</a:t>
             </a:r>
+            <a:endParaRPr lang="en-US"/>
           </a:p>
         </p:txBody>
       </p:sp>
@@ -2385,8 +2388,8 @@
         </p:nvSpPr>
         <p:spPr>
           <a:xfrm>
-            <a:off x="1792288" y="459581"/>
-            <a:ext cx="5486400" cy="3086100"/>
+            <a:off x="1792288" y="612775"/>
+            <a:ext cx="5486400" cy="4114800"/>
           </a:xfrm>
         </p:spPr>
         <p:txBody>
@@ -2394,39 +2397,39 @@
           <a:lstStyle>
             <a:lvl1pPr marL="0" indent="0">
               <a:buNone/>
+              <a:defRPr sz="3200"/>
+            </a:lvl1pPr>
+            <a:lvl2pPr marL="457200" indent="0">
+              <a:buNone/>
+              <a:defRPr sz="2800"/>
+            </a:lvl2pPr>
+            <a:lvl3pPr marL="914400" indent="0">
+              <a:buNone/>
               <a:defRPr sz="2400"/>
-            </a:lvl1pPr>
-            <a:lvl2pPr marL="342900" indent="0">
-              <a:buNone/>
-              <a:defRPr sz="2100"/>
-            </a:lvl2pPr>
-            <a:lvl3pPr marL="685800" indent="0">
-              <a:buNone/>
-              <a:defRPr sz="1800"/>
             </a:lvl3pPr>
-            <a:lvl4pPr marL="1028700" indent="0">
-              <a:buNone/>
-              <a:defRPr sz="1500"/>
+            <a:lvl4pPr marL="1371600" indent="0">
+              <a:buNone/>
+              <a:defRPr sz="2000"/>
             </a:lvl4pPr>
-            <a:lvl5pPr marL="1371600" indent="0">
-              <a:buNone/>
-              <a:defRPr sz="1500"/>
+            <a:lvl5pPr marL="1828800" indent="0">
+              <a:buNone/>
+              <a:defRPr sz="2000"/>
             </a:lvl5pPr>
-            <a:lvl6pPr marL="1714500" indent="0">
-              <a:buNone/>
-              <a:defRPr sz="1500"/>
+            <a:lvl6pPr marL="2286000" indent="0">
+              <a:buNone/>
+              <a:defRPr sz="2000"/>
             </a:lvl6pPr>
-            <a:lvl7pPr marL="2057400" indent="0">
-              <a:buNone/>
-              <a:defRPr sz="1500"/>
+            <a:lvl7pPr marL="2743200" indent="0">
+              <a:buNone/>
+              <a:defRPr sz="2000"/>
             </a:lvl7pPr>
-            <a:lvl8pPr marL="2400300" indent="0">
-              <a:buNone/>
-              <a:defRPr sz="1500"/>
+            <a:lvl8pPr marL="3200400" indent="0">
+              <a:buNone/>
+              <a:defRPr sz="2000"/>
             </a:lvl8pPr>
-            <a:lvl9pPr marL="2743200" indent="0">
-              <a:buNone/>
-              <a:defRPr sz="1500"/>
+            <a:lvl9pPr marL="3657600" indent="0">
+              <a:buNone/>
+              <a:defRPr sz="2000"/>
             </a:lvl9pPr>
           </a:lstStyle>
           <a:p>
@@ -2446,8 +2449,8 @@
         </p:nvSpPr>
         <p:spPr>
           <a:xfrm>
-            <a:off x="1792288" y="4025503"/>
-            <a:ext cx="5486400" cy="603647"/>
+            <a:off x="1792288" y="5367338"/>
+            <a:ext cx="5486400" cy="804862"/>
           </a:xfrm>
         </p:spPr>
         <p:txBody>
@@ -2455,45 +2458,45 @@
           <a:lstStyle>
             <a:lvl1pPr marL="0" indent="0">
               <a:buNone/>
-              <a:defRPr sz="1050"/>
+              <a:defRPr sz="1400"/>
             </a:lvl1pPr>
-            <a:lvl2pPr marL="342900" indent="0">
+            <a:lvl2pPr marL="457200" indent="0">
+              <a:buNone/>
+              <a:defRPr sz="1200"/>
+            </a:lvl2pPr>
+            <a:lvl3pPr marL="914400" indent="0">
+              <a:buNone/>
+              <a:defRPr sz="1000"/>
+            </a:lvl3pPr>
+            <a:lvl4pPr marL="1371600" indent="0">
               <a:buNone/>
               <a:defRPr sz="900"/>
-            </a:lvl2pPr>
-            <a:lvl3pPr marL="685800" indent="0">
-              <a:buNone/>
-              <a:defRPr sz="750"/>
-            </a:lvl3pPr>
-            <a:lvl4pPr marL="1028700" indent="0">
-              <a:buNone/>
-              <a:defRPr sz="675"/>
             </a:lvl4pPr>
-            <a:lvl5pPr marL="1371600" indent="0">
-              <a:buNone/>
-              <a:defRPr sz="675"/>
+            <a:lvl5pPr marL="1828800" indent="0">
+              <a:buNone/>
+              <a:defRPr sz="900"/>
             </a:lvl5pPr>
-            <a:lvl6pPr marL="1714500" indent="0">
-              <a:buNone/>
-              <a:defRPr sz="675"/>
+            <a:lvl6pPr marL="2286000" indent="0">
+              <a:buNone/>
+              <a:defRPr sz="900"/>
             </a:lvl6pPr>
-            <a:lvl7pPr marL="2057400" indent="0">
-              <a:buNone/>
-              <a:defRPr sz="675"/>
+            <a:lvl7pPr marL="2743200" indent="0">
+              <a:buNone/>
+              <a:defRPr sz="900"/>
             </a:lvl7pPr>
-            <a:lvl8pPr marL="2400300" indent="0">
-              <a:buNone/>
-              <a:defRPr sz="675"/>
+            <a:lvl8pPr marL="3200400" indent="0">
+              <a:buNone/>
+              <a:defRPr sz="900"/>
             </a:lvl8pPr>
-            <a:lvl9pPr marL="2743200" indent="0">
-              <a:buNone/>
-              <a:defRPr sz="675"/>
+            <a:lvl9pPr marL="3657600" indent="0">
+              <a:buNone/>
+              <a:defRPr sz="900"/>
             </a:lvl9pPr>
           </a:lstStyle>
           <a:p>
             <a:pPr lvl="0"/>
             <a:r>
-              <a:rPr lang="en-US"/>
+              <a:rPr lang="en-US" smtClean="0"/>
               <a:t>Click to edit Master text styles</a:t>
             </a:r>
           </a:p>
@@ -2514,9 +2517,9 @@
           <a:bodyPr/>
           <a:lstStyle/>
           <a:p>
-            <a:fld id="{241EB5C9-1307-BA42-ABA2-0BC069CD8E7F}" type="datetimeFigureOut">
-              <a:rPr lang="en-US" smtClean="0"/>
-              <a:t>1/2/22</a:t>
+            <a:fld id="{5BCAD085-E8A6-8845-BD4E-CB4CCA059FC4}" type="datetimeFigureOut">
+              <a:rPr lang="en-US" smtClean="0"/>
+              <a:t>1/27/13</a:t>
             </a:fld>
             <a:endParaRPr lang="en-US"/>
           </a:p>
@@ -2556,7 +2559,7 @@
           <a:bodyPr/>
           <a:lstStyle/>
           <a:p>
-            <a:fld id="{C5EF2332-01BF-834F-8236-50238282D533}" type="slidenum">
+            <a:fld id="{C1FF6DA9-008F-8B48-92A6-B652298478BF}" type="slidenum">
               <a:rPr lang="en-US" smtClean="0"/>
               <a:t>‹#›</a:t>
             </a:fld>
@@ -2567,7 +2570,7 @@
     </p:spTree>
     <p:extLst>
       <p:ext uri="{BB962C8B-B14F-4D97-AF65-F5344CB8AC3E}">
-        <p14:creationId xmlns:p14="http://schemas.microsoft.com/office/powerpoint/2010/main" val="3566899855"/>
+        <p14:creationId xmlns:p14="http://schemas.microsoft.com/office/powerpoint/2010/main" val="3889236939"/>
       </p:ext>
     </p:extLst>
   </p:cSld>
@@ -2578,7 +2581,7 @@
 </file>
 
 <file path=ppt/slideMasters/slideMaster1.xml><?xml version="1.0" encoding="utf-8"?>
-<p:sldMaster xmlns:a="http://schemas.openxmlformats.org/drawingml/2006/main" xmlns:p="http://schemas.openxmlformats.org/presentationml/2006/main" xmlns:r="http://schemas.openxmlformats.org/officeDocument/2006/relationships">
+<p:sldMaster xmlns:a="http://schemas.openxmlformats.org/drawingml/2006/main" xmlns:r="http://schemas.openxmlformats.org/officeDocument/2006/relationships" xmlns:p="http://schemas.openxmlformats.org/presentationml/2006/main">
   <p:cSld>
     <p:bg>
       <p:bgRef idx="1001">
@@ -2611,23 +2614,24 @@
         </p:nvSpPr>
         <p:spPr>
           <a:xfrm>
-            <a:off x="457200" y="205979"/>
-            <a:ext cx="8229600" cy="857250"/>
+            <a:off x="457200" y="274638"/>
+            <a:ext cx="8229600" cy="1143000"/>
           </a:xfrm>
           <a:prstGeom prst="rect">
             <a:avLst/>
           </a:prstGeom>
         </p:spPr>
         <p:txBody>
-          <a:bodyPr anchor="ctr" bIns="45720" lIns="91440" rIns="91440" rtlCol="0" tIns="45720" vert="horz">
+          <a:bodyPr vert="horz" lIns="91440" tIns="45720" rIns="91440" bIns="45720" rtlCol="0" anchor="ctr">
             <a:normAutofit/>
           </a:bodyPr>
           <a:lstStyle/>
           <a:p>
             <a:r>
-              <a:rPr lang="en-US"/>
+              <a:rPr lang="en-US" smtClean="0"/>
               <a:t>Click to edit Master title style</a:t>
             </a:r>
+            <a:endParaRPr lang="en-US"/>
           </a:p>
         </p:txBody>
       </p:sp>
@@ -2638,57 +2642,58 @@
             <a:spLocks noGrp="1"/>
           </p:cNvSpPr>
           <p:nvPr>
-            <p:ph idx="1" type="body"/>
+            <p:ph type="body" idx="1"/>
           </p:nvPr>
         </p:nvSpPr>
         <p:spPr>
           <a:xfrm>
-            <a:off x="457200" y="1200151"/>
-            <a:ext cx="8229600" cy="3394472"/>
+            <a:off x="457200" y="1600200"/>
+            <a:ext cx="8229600" cy="4525963"/>
           </a:xfrm>
           <a:prstGeom prst="rect">
             <a:avLst/>
           </a:prstGeom>
         </p:spPr>
         <p:txBody>
-          <a:bodyPr bIns="45720" lIns="91440" rIns="91440" rtlCol="0" tIns="45720" vert="horz">
+          <a:bodyPr vert="horz" lIns="91440" tIns="45720" rIns="91440" bIns="45720" rtlCol="0">
             <a:normAutofit/>
           </a:bodyPr>
           <a:lstStyle/>
           <a:p>
             <a:pPr lvl="0"/>
             <a:r>
-              <a:rPr lang="en-US"/>
+              <a:rPr lang="en-US" smtClean="0"/>
               <a:t>Click to edit Master text styles</a:t>
             </a:r>
           </a:p>
           <a:p>
             <a:pPr lvl="1"/>
             <a:r>
-              <a:rPr lang="en-US"/>
+              <a:rPr lang="en-US" smtClean="0"/>
               <a:t>Second level</a:t>
             </a:r>
           </a:p>
           <a:p>
             <a:pPr lvl="2"/>
             <a:r>
-              <a:rPr lang="en-US"/>
+              <a:rPr lang="en-US" smtClean="0"/>
               <a:t>Third level</a:t>
             </a:r>
           </a:p>
           <a:p>
             <a:pPr lvl="3"/>
             <a:r>
-              <a:rPr lang="en-US"/>
+              <a:rPr lang="en-US" smtClean="0"/>
               <a:t>Fourth level</a:t>
             </a:r>
           </a:p>
           <a:p>
             <a:pPr lvl="4"/>
             <a:r>
-              <a:rPr lang="en-US"/>
+              <a:rPr lang="en-US" smtClean="0"/>
               <a:t>Fifth level</a:t>
             </a:r>
+            <a:endParaRPr lang="en-US"/>
           </a:p>
         </p:txBody>
       </p:sp>
@@ -2699,23 +2704,23 @@
             <a:spLocks noGrp="1"/>
           </p:cNvSpPr>
           <p:nvPr>
-            <p:ph idx="2" sz="half" type="dt"/>
+            <p:ph type="dt" sz="half" idx="2"/>
           </p:nvPr>
         </p:nvSpPr>
         <p:spPr>
           <a:xfrm>
-            <a:off x="457200" y="4767263"/>
-            <a:ext cx="2133600" cy="273844"/>
+            <a:off x="457200" y="6356350"/>
+            <a:ext cx="2133600" cy="365125"/>
           </a:xfrm>
           <a:prstGeom prst="rect">
             <a:avLst/>
           </a:prstGeom>
         </p:spPr>
         <p:txBody>
-          <a:bodyPr anchor="ctr" bIns="45720" lIns="91440" rIns="91440" rtlCol="0" tIns="45720" vert="horz"/>
+          <a:bodyPr vert="horz" lIns="91440" tIns="45720" rIns="91440" bIns="45720" rtlCol="0" anchor="ctr"/>
           <a:lstStyle>
             <a:lvl1pPr algn="l">
-              <a:defRPr sz="900">
+              <a:defRPr sz="1200">
                 <a:solidFill>
                   <a:schemeClr val="tx1">
                     <a:tint val="75000"/>
@@ -2725,9 +2730,9 @@
             </a:lvl1pPr>
           </a:lstStyle>
           <a:p>
-            <a:fld id="{241EB5C9-1307-BA42-ABA2-0BC069CD8E7F}" type="datetimeFigureOut">
-              <a:rPr lang="en-US" smtClean="0"/>
-              <a:t>1/2/22</a:t>
+            <a:fld id="{5BCAD085-E8A6-8845-BD4E-CB4CCA059FC4}" type="datetimeFigureOut">
+              <a:rPr lang="en-US" smtClean="0"/>
+              <a:t>1/27/13</a:t>
             </a:fld>
             <a:endParaRPr lang="en-US"/>
           </a:p>
@@ -2740,23 +2745,23 @@
             <a:spLocks noGrp="1"/>
           </p:cNvSpPr>
           <p:nvPr>
-            <p:ph idx="3" sz="quarter" type="ftr"/>
+            <p:ph type="ftr" sz="quarter" idx="3"/>
           </p:nvPr>
         </p:nvSpPr>
         <p:spPr>
           <a:xfrm>
-            <a:off x="3124200" y="4767263"/>
-            <a:ext cx="2895600" cy="273844"/>
+            <a:off x="3124200" y="6356350"/>
+            <a:ext cx="2895600" cy="365125"/>
           </a:xfrm>
           <a:prstGeom prst="rect">
             <a:avLst/>
           </a:prstGeom>
         </p:spPr>
         <p:txBody>
-          <a:bodyPr anchor="ctr" bIns="45720" lIns="91440" rIns="91440" rtlCol="0" tIns="45720" vert="horz"/>
+          <a:bodyPr vert="horz" lIns="91440" tIns="45720" rIns="91440" bIns="45720" rtlCol="0" anchor="ctr"/>
           <a:lstStyle>
             <a:lvl1pPr algn="ctr">
-              <a:defRPr sz="900">
+              <a:defRPr sz="1200">
                 <a:solidFill>
                   <a:schemeClr val="tx1">
                     <a:tint val="75000"/>
@@ -2777,23 +2782,23 @@
             <a:spLocks noGrp="1"/>
           </p:cNvSpPr>
           <p:nvPr>
-            <p:ph idx="4" sz="quarter" type="sldNum"/>
+            <p:ph type="sldNum" sz="quarter" idx="4"/>
           </p:nvPr>
         </p:nvSpPr>
         <p:spPr>
           <a:xfrm>
-            <a:off x="6553200" y="4767263"/>
-            <a:ext cx="2133600" cy="273844"/>
+            <a:off x="6553200" y="6356350"/>
+            <a:ext cx="2133600" cy="365125"/>
           </a:xfrm>
           <a:prstGeom prst="rect">
             <a:avLst/>
           </a:prstGeom>
         </p:spPr>
         <p:txBody>
-          <a:bodyPr anchor="ctr" bIns="45720" lIns="91440" rIns="91440" rtlCol="0" tIns="45720" vert="horz"/>
+          <a:bodyPr vert="horz" lIns="91440" tIns="45720" rIns="91440" bIns="45720" rtlCol="0" anchor="ctr"/>
           <a:lstStyle>
             <a:lvl1pPr algn="r">
-              <a:defRPr sz="900">
+              <a:defRPr sz="1200">
                 <a:solidFill>
                   <a:schemeClr val="tx1">
                     <a:tint val="75000"/>
@@ -2803,7 +2808,7 @@
             </a:lvl1pPr>
           </a:lstStyle>
           <a:p>
-            <a:fld id="{C5EF2332-01BF-834F-8236-50238282D533}" type="slidenum">
+            <a:fld id="{C1FF6DA9-008F-8B48-92A6-B652298478BF}" type="slidenum">
               <a:rPr lang="en-US" smtClean="0"/>
               <a:t>‹#›</a:t>
             </a:fld>
@@ -2814,11 +2819,11 @@
     </p:spTree>
     <p:extLst>
       <p:ext uri="{BB962C8B-B14F-4D97-AF65-F5344CB8AC3E}">
-        <p14:creationId xmlns:p14="http://schemas.microsoft.com/office/powerpoint/2010/main" val="3676200875"/>
+        <p14:creationId xmlns:p14="http://schemas.microsoft.com/office/powerpoint/2010/main" val="2209977519"/>
       </p:ext>
     </p:extLst>
   </p:cSld>
-  <p:clrMap accent1="accent1" accent2="accent2" accent3="accent3" accent4="accent4" accent5="accent5" accent6="accent6" bg1="lt1" bg2="lt2" folHlink="folHlink" hlink="hlink" tx1="dk1" tx2="dk2"/>
+  <p:clrMap bg1="lt1" tx1="dk1" bg2="lt2" tx2="dk2" accent1="accent1" accent2="accent2" accent3="accent3" accent4="accent4" accent5="accent5" accent6="accent6" hlink="hlink" folHlink="folHlink"/>
   <p:sldLayoutIdLst>
     <p:sldLayoutId id="2147483649" r:id="rId1"/>
     <p:sldLayoutId id="2147483650" r:id="rId2"/>
@@ -2834,12 +2839,12 @@
   </p:sldLayoutIdLst>
   <p:txStyles>
     <p:titleStyle>
-      <a:lvl1pPr algn="ctr" defTabSz="342900" eaLnBrk="1" hangingPunct="1" latinLnBrk="0" rtl="0">
+      <a:lvl1pPr algn="ctr" defTabSz="457200" rtl="0" eaLnBrk="1" latinLnBrk="0" hangingPunct="1">
         <a:spcBef>
           <a:spcPct val="0"/>
         </a:spcBef>
         <a:buNone/>
-        <a:defRPr kern="1200" sz="3300">
+        <a:defRPr sz="4400" kern="1200">
           <a:solidFill>
             <a:schemeClr val="tx1"/>
           </a:solidFill>
@@ -2850,13 +2855,13 @@
       </a:lvl1pPr>
     </p:titleStyle>
     <p:bodyStyle>
-      <a:lvl1pPr algn="l" defTabSz="342900" eaLnBrk="1" hangingPunct="1" indent="-342900" latinLnBrk="0" marL="342900" rtl="0">
+      <a:lvl1pPr marL="342900" indent="-342900" algn="l" defTabSz="457200" rtl="0" eaLnBrk="1" latinLnBrk="0" hangingPunct="1">
         <a:spcBef>
           <a:spcPct val="20000"/>
         </a:spcBef>
         <a:buFont typeface="Arial"/>
         <a:buChar char="•"/>
-        <a:defRPr kern="1200" sz="2400">
+        <a:defRPr sz="3200" kern="1200">
           <a:solidFill>
             <a:schemeClr val="tx1"/>
           </a:solidFill>
@@ -2865,13 +2870,13 @@
           <a:cs typeface="+mn-cs"/>
         </a:defRPr>
       </a:lvl1pPr>
-      <a:lvl2pPr algn="l" defTabSz="342900" eaLnBrk="1" hangingPunct="1" indent="-342900" latinLnBrk="0" marL="685800" rtl="0">
+      <a:lvl2pPr marL="742950" indent="-285750" algn="l" defTabSz="457200" rtl="0" eaLnBrk="1" latinLnBrk="0" hangingPunct="1">
         <a:spcBef>
           <a:spcPct val="20000"/>
         </a:spcBef>
         <a:buFont typeface="Arial"/>
         <a:buChar char="–"/>
-        <a:defRPr kern="1200" sz="2100">
+        <a:defRPr sz="2800" kern="1200">
           <a:solidFill>
             <a:schemeClr val="tx1"/>
           </a:solidFill>
@@ -2880,13 +2885,13 @@
           <a:cs typeface="+mn-cs"/>
         </a:defRPr>
       </a:lvl2pPr>
-      <a:lvl3pPr algn="l" defTabSz="342900" eaLnBrk="1" hangingPunct="1" indent="-342900" latinLnBrk="0" marL="1028700" rtl="0">
+      <a:lvl3pPr marL="1143000" indent="-228600" algn="l" defTabSz="457200" rtl="0" eaLnBrk="1" latinLnBrk="0" hangingPunct="1">
         <a:spcBef>
           <a:spcPct val="20000"/>
         </a:spcBef>
         <a:buFont typeface="Arial"/>
         <a:buChar char="•"/>
-        <a:defRPr kern="1200" sz="1800">
+        <a:defRPr sz="2400" kern="1200">
           <a:solidFill>
             <a:schemeClr val="tx1"/>
           </a:solidFill>
@@ -2895,13 +2900,13 @@
           <a:cs typeface="+mn-cs"/>
         </a:defRPr>
       </a:lvl3pPr>
-      <a:lvl4pPr algn="l" defTabSz="342900" eaLnBrk="1" hangingPunct="1" indent="-342900" latinLnBrk="0" marL="1371600" rtl="0">
+      <a:lvl4pPr marL="1600200" indent="-228600" algn="l" defTabSz="457200" rtl="0" eaLnBrk="1" latinLnBrk="0" hangingPunct="1">
         <a:spcBef>
           <a:spcPct val="20000"/>
         </a:spcBef>
         <a:buFont typeface="Arial"/>
         <a:buChar char="–"/>
-        <a:defRPr kern="1200" sz="1500">
+        <a:defRPr sz="2000" kern="1200">
           <a:solidFill>
             <a:schemeClr val="tx1"/>
           </a:solidFill>
@@ -2910,13 +2915,13 @@
           <a:cs typeface="+mn-cs"/>
         </a:defRPr>
       </a:lvl4pPr>
-      <a:lvl5pPr algn="l" defTabSz="342900" eaLnBrk="1" hangingPunct="1" indent="-342900" latinLnBrk="0" marL="1714500" rtl="0">
+      <a:lvl5pPr marL="2057400" indent="-228600" algn="l" defTabSz="457200" rtl="0" eaLnBrk="1" latinLnBrk="0" hangingPunct="1">
         <a:spcBef>
           <a:spcPct val="20000"/>
         </a:spcBef>
         <a:buFont typeface="Arial"/>
         <a:buChar char="»"/>
-        <a:defRPr kern="1200" sz="1500">
+        <a:defRPr sz="2000" kern="1200">
           <a:solidFill>
             <a:schemeClr val="tx1"/>
           </a:solidFill>
@@ -2925,13 +2930,13 @@
           <a:cs typeface="+mn-cs"/>
         </a:defRPr>
       </a:lvl5pPr>
-      <a:lvl6pPr algn="l" defTabSz="342900" eaLnBrk="1" hangingPunct="1" indent="-342900" latinLnBrk="0" marL="2057400" rtl="0">
+      <a:lvl6pPr marL="2514600" indent="-228600" algn="l" defTabSz="457200" rtl="0" eaLnBrk="1" latinLnBrk="0" hangingPunct="1">
         <a:spcBef>
           <a:spcPct val="20000"/>
         </a:spcBef>
         <a:buFont typeface="Arial"/>
         <a:buChar char="•"/>
-        <a:defRPr kern="1200" sz="1500">
+        <a:defRPr sz="2000" kern="1200">
           <a:solidFill>
             <a:schemeClr val="tx1"/>
           </a:solidFill>
@@ -2940,13 +2945,13 @@
           <a:cs typeface="+mn-cs"/>
         </a:defRPr>
       </a:lvl6pPr>
-      <a:lvl7pPr algn="l" defTabSz="342900" eaLnBrk="1" hangingPunct="1" indent="-342900" latinLnBrk="0" marL="2400300" rtl="0">
+      <a:lvl7pPr marL="2971800" indent="-228600" algn="l" defTabSz="457200" rtl="0" eaLnBrk="1" latinLnBrk="0" hangingPunct="1">
         <a:spcBef>
           <a:spcPct val="20000"/>
         </a:spcBef>
         <a:buFont typeface="Arial"/>
         <a:buChar char="•"/>
-        <a:defRPr kern="1200" sz="1500">
+        <a:defRPr sz="2000" kern="1200">
           <a:solidFill>
             <a:schemeClr val="tx1"/>
           </a:solidFill>
@@ -2955,13 +2960,13 @@
           <a:cs typeface="+mn-cs"/>
         </a:defRPr>
       </a:lvl7pPr>
-      <a:lvl8pPr algn="l" defTabSz="342900" eaLnBrk="1" hangingPunct="1" indent="-342900" latinLnBrk="0" marL="2743200" rtl="0">
+      <a:lvl8pPr marL="3429000" indent="-228600" algn="l" defTabSz="457200" rtl="0" eaLnBrk="1" latinLnBrk="0" hangingPunct="1">
         <a:spcBef>
           <a:spcPct val="20000"/>
         </a:spcBef>
         <a:buFont typeface="Arial"/>
         <a:buChar char="•"/>
-        <a:defRPr kern="1200" sz="1500">
+        <a:defRPr sz="2000" kern="1200">
           <a:solidFill>
             <a:schemeClr val="tx1"/>
           </a:solidFill>
@@ -2970,13 +2975,13 @@
           <a:cs typeface="+mn-cs"/>
         </a:defRPr>
       </a:lvl8pPr>
-      <a:lvl9pPr algn="l" defTabSz="342900" eaLnBrk="1" hangingPunct="1" indent="-342900" latinLnBrk="0" marL="3086100" rtl="0">
+      <a:lvl9pPr marL="3886200" indent="-228600" algn="l" defTabSz="457200" rtl="0" eaLnBrk="1" latinLnBrk="0" hangingPunct="1">
         <a:spcBef>
           <a:spcPct val="20000"/>
         </a:spcBef>
         <a:buFont typeface="Arial"/>
         <a:buChar char="•"/>
-        <a:defRPr kern="1200" sz="1500">
+        <a:defRPr sz="2000" kern="1200">
           <a:solidFill>
             <a:schemeClr val="tx1"/>
           </a:solidFill>
@@ -2990,8 +2995,8 @@
       <a:defPPr>
         <a:defRPr lang="en-US"/>
       </a:defPPr>
-      <a:lvl1pPr algn="l" defTabSz="342900" eaLnBrk="1" hangingPunct="1" latinLnBrk="0" marL="0" rtl="0">
-        <a:defRPr kern="1200" sz="1350">
+      <a:lvl1pPr marL="0" algn="l" defTabSz="457200" rtl="0" eaLnBrk="1" latinLnBrk="0" hangingPunct="1">
+        <a:defRPr sz="1800" kern="1200">
           <a:solidFill>
             <a:schemeClr val="tx1"/>
           </a:solidFill>
@@ -3000,8 +3005,8 @@
           <a:cs typeface="+mn-cs"/>
         </a:defRPr>
       </a:lvl1pPr>
-      <a:lvl2pPr algn="l" defTabSz="342900" eaLnBrk="1" hangingPunct="1" latinLnBrk="0" marL="342900" rtl="0">
-        <a:defRPr kern="1200" sz="1350">
+      <a:lvl2pPr marL="457200" algn="l" defTabSz="457200" rtl="0" eaLnBrk="1" latinLnBrk="0" hangingPunct="1">
+        <a:defRPr sz="1800" kern="1200">
           <a:solidFill>
             <a:schemeClr val="tx1"/>
           </a:solidFill>
@@ -3010,8 +3015,8 @@
           <a:cs typeface="+mn-cs"/>
         </a:defRPr>
       </a:lvl2pPr>
-      <a:lvl3pPr algn="l" defTabSz="342900" eaLnBrk="1" hangingPunct="1" latinLnBrk="0" marL="685800" rtl="0">
-        <a:defRPr kern="1200" sz="1350">
+      <a:lvl3pPr marL="914400" algn="l" defTabSz="457200" rtl="0" eaLnBrk="1" latinLnBrk="0" hangingPunct="1">
+        <a:defRPr sz="1800" kern="1200">
           <a:solidFill>
             <a:schemeClr val="tx1"/>
           </a:solidFill>
@@ -3020,8 +3025,8 @@
           <a:cs typeface="+mn-cs"/>
         </a:defRPr>
       </a:lvl3pPr>
-      <a:lvl4pPr algn="l" defTabSz="342900" eaLnBrk="1" hangingPunct="1" latinLnBrk="0" marL="1028700" rtl="0">
-        <a:defRPr kern="1200" sz="1350">
+      <a:lvl4pPr marL="1371600" algn="l" defTabSz="457200" rtl="0" eaLnBrk="1" latinLnBrk="0" hangingPunct="1">
+        <a:defRPr sz="1800" kern="1200">
           <a:solidFill>
             <a:schemeClr val="tx1"/>
           </a:solidFill>
@@ -3030,8 +3035,8 @@
           <a:cs typeface="+mn-cs"/>
         </a:defRPr>
       </a:lvl4pPr>
-      <a:lvl5pPr algn="l" defTabSz="342900" eaLnBrk="1" hangingPunct="1" latinLnBrk="0" marL="1371600" rtl="0">
-        <a:defRPr kern="1200" sz="1350">
+      <a:lvl5pPr marL="1828800" algn="l" defTabSz="457200" rtl="0" eaLnBrk="1" latinLnBrk="0" hangingPunct="1">
+        <a:defRPr sz="1800" kern="1200">
           <a:solidFill>
             <a:schemeClr val="tx1"/>
           </a:solidFill>
@@ -3040,8 +3045,8 @@
           <a:cs typeface="+mn-cs"/>
         </a:defRPr>
       </a:lvl5pPr>
-      <a:lvl6pPr algn="l" defTabSz="342900" eaLnBrk="1" hangingPunct="1" latinLnBrk="0" marL="1714500" rtl="0">
-        <a:defRPr kern="1200" sz="1350">
+      <a:lvl6pPr marL="2286000" algn="l" defTabSz="457200" rtl="0" eaLnBrk="1" latinLnBrk="0" hangingPunct="1">
+        <a:defRPr sz="1800" kern="1200">
           <a:solidFill>
             <a:schemeClr val="tx1"/>
           </a:solidFill>
@@ -3050,8 +3055,8 @@
           <a:cs typeface="+mn-cs"/>
         </a:defRPr>
       </a:lvl6pPr>
-      <a:lvl7pPr algn="l" defTabSz="342900" eaLnBrk="1" hangingPunct="1" latinLnBrk="0" marL="2057400" rtl="0">
-        <a:defRPr kern="1200" sz="1350">
+      <a:lvl7pPr marL="2743200" algn="l" defTabSz="457200" rtl="0" eaLnBrk="1" latinLnBrk="0" hangingPunct="1">
+        <a:defRPr sz="1800" kern="1200">
           <a:solidFill>
             <a:schemeClr val="tx1"/>
           </a:solidFill>
@@ -3060,8 +3065,8 @@
           <a:cs typeface="+mn-cs"/>
         </a:defRPr>
       </a:lvl7pPr>
-      <a:lvl8pPr algn="l" defTabSz="342900" eaLnBrk="1" hangingPunct="1" latinLnBrk="0" marL="2400300" rtl="0">
-        <a:defRPr kern="1200" sz="1350">
+      <a:lvl8pPr marL="3200400" algn="l" defTabSz="457200" rtl="0" eaLnBrk="1" latinLnBrk="0" hangingPunct="1">
+        <a:defRPr sz="1800" kern="1200">
           <a:solidFill>
             <a:schemeClr val="tx1"/>
           </a:solidFill>
@@ -3070,8 +3075,8 @@
           <a:cs typeface="+mn-cs"/>
         </a:defRPr>
       </a:lvl8pPr>
-      <a:lvl9pPr algn="l" defTabSz="342900" eaLnBrk="1" hangingPunct="1" latinLnBrk="0" marL="2743200" rtl="0">
-        <a:defRPr kern="1200" sz="1350">
+      <a:lvl9pPr marL="3657600" algn="l" defTabSz="457200" rtl="0" eaLnBrk="1" latinLnBrk="0" hangingPunct="1">
+        <a:defRPr sz="1800" kern="1200">
           <a:solidFill>
             <a:schemeClr val="tx1"/>
           </a:solidFill>
@@ -3086,7 +3091,7 @@
 </file>
 
 <file path=ppt/slides/slide1.xml><?xml version="1.0" encoding="utf-8"?>
-<p:sld xmlns:a="http://schemas.openxmlformats.org/drawingml/2006/main" xmlns:r="http://schemas.openxmlformats.org/officeDocument/2006/relationships" xmlns:p="http://schemas.openxmlformats.org/presentationml/2006/main">
+<p:sld xmlns:a="http://schemas.openxmlformats.org/drawingml/2006/main" xmlns:p="http://schemas.openxmlformats.org/presentationml/2006/main" xmlns:r="http://schemas.openxmlformats.org/officeDocument/2006/relationships">
   <p:cSld>
     <p:spTree>
       <p:nvGrpSpPr>
@@ -3094,125 +3099,12 @@
         <p:cNvGrpSpPr/>
         <p:nvPr/>
       </p:nvGrpSpPr>
-      <p:grpSpPr>
-        <a:xfrm>
-          <a:off x="0" y="0"/>
-          <a:ext cx="0" cy="0"/>
-          <a:chOff x="0" y="0"/>
-          <a:chExt cx="0" cy="0"/>
-        </a:xfrm>
-      </p:grpSpPr>
-      <p:sp>
-        <p:nvSpPr>
-          <p:cNvPr id="2" name="Title 1"/>
-          <p:cNvSpPr>
-            <a:spLocks noGrp="1"/>
-          </p:cNvSpPr>
-          <p:nvPr>
-            <p:ph type="title"/>
-          </p:nvPr>
-        </p:nvSpPr>
-        <p:spPr>
-          <a:xfrm>
-            <a:off x="457201" y="204787"/>
-            <a:ext cx="3008313" cy="871538"/>
-          </a:xfrm>
-        </p:spPr>
-        <p:txBody>
-          <a:bodyPr/>
-          <a:lstStyle/>
-          <a:p>
-            <a:pPr lvl="0" indent="0" marL="0">
-              <a:buNone/>
-            </a:pPr>
-            <a:r>
-              <a:rPr/>
-              <a:t>Hook</a:t>
-            </a:r>
-          </a:p>
-        </p:txBody>
-      </p:sp>
-      <p:sp>
-        <p:nvSpPr>
-          <p:cNvPr id="4" name="Text Placeholder 3"/>
-          <p:cNvSpPr>
-            <a:spLocks noGrp="1"/>
-          </p:cNvSpPr>
-          <p:nvPr>
-            <p:ph idx="2" sz="half" type="body"/>
-          </p:nvPr>
-        </p:nvSpPr>
-        <p:spPr/>
-        <p:txBody>
-          <a:bodyPr/>
-          <a:lstStyle/>
-          <a:p>
-            <a:pPr lvl="0" indent="0" marL="0">
-              <a:spcBef>
-                <a:spcPts val="3000"/>
-              </a:spcBef>
-              <a:buNone/>
-            </a:pPr>
-            <a:r>
-              <a:rPr b="1"/>
-              <a:t>AI for Founders: Where Your Edge Lives</a:t>
-            </a:r>
-          </a:p>
-          <a:p>
-            <a:pPr lvl="0" indent="0" marL="1270000">
-              <a:buNone/>
-            </a:pPr>
-            <a:r>
-              <a:rPr sz="2000"/>
-              <a:t>When a capability becomes universal, generic competence stops being an advantage. So where does your edge actually live?</a:t>
-            </a:r>
-          </a:p>
-          <a:p>
-            <a:pPr lvl="0" indent="0" marL="0">
-              <a:buNone/>
-            </a:pPr>
-            <a:r>
-              <a:rPr i="1"/>
-              <a:t>Show of hands: who’s used AI on their idea this week?</a:t>
-            </a:r>
-          </a:p>
-          <a:p>
-            <a:pPr lvl="0" indent="0" marL="0">
-              <a:buNone/>
-            </a:pPr>
-            <a:r>
-              <a:rPr b="1"/>
-              <a:t>Slides are signposts — the companion site is the handout.</a:t>
-            </a:r>
-            <a:r>
-              <a:rPr/>
-              <a:t> QR + link on this slide (and again on slides 5 and 12): prompts, tools, and this deck all live at michael-borck.github.io/ai-for-founders. Beside it, the </a:t>
-            </a:r>
-            <a:r>
-              <a:rPr b="1"/>
-              <a:t>poll QR</a:t>
-            </a:r>
-            <a:r>
-              <a:rPr/>
-              <a:t> (classpulse.borck.education/audience/RXARHX), framed “While you arrive — one question:” — skim the histogram at minute 4 and pace accordingly.</a:t>
-            </a:r>
-          </a:p>
-          <a:p>
-            <a:pPr lvl="0" indent="0" marL="0">
-              <a:buNone/>
-            </a:pPr>
-            <a:r>
-              <a:rPr b="1"/>
-              <a:t>While you arrive — one question:</a:t>
-            </a:r>
-          </a:p>
-        </p:txBody>
-      </p:sp>
+      <p:grpSpPr/>
       <p:pic>
         <p:nvPicPr>
-          <p:cNvPr descr="qr-poll.png" id="0" name="Picture 1"/>
+          <p:cNvPr id="2" name="Picture 1" descr="slide-01.png"/>
           <p:cNvPicPr>
-            <a:picLocks noGrp="1" noChangeAspect="1"/>
+            <a:picLocks noChangeAspect="1"/>
           </p:cNvPicPr>
           <p:nvPr/>
         </p:nvPicPr>
@@ -3222,148 +3114,202 @@
             <a:fillRect/>
           </a:stretch>
         </p:blipFill>
-        <p:spPr bwMode="auto">
+        <p:spPr>
           <a:xfrm>
-            <a:off x="4191000" y="203200"/>
-            <a:ext cx="3873500" cy="3873500"/>
+            <a:off x="0" y="0"/>
+            <a:ext cx="12192000" cy="6858000"/>
+          </a:xfrm>
+          <a:prstGeom prst="rect">
+            <a:avLst/>
+          </a:prstGeom>
+        </p:spPr>
+      </p:pic>
+      <p:sp>
+        <p:nvSpPr>
+          <p:cNvPr id="3" name="Rectangle 2">
+            <a:hlinkClick r:id="rId3"/>
+          </p:cNvPr>
+          <p:cNvSpPr/>
+          <p:nvPr/>
+        </p:nvSpPr>
+        <p:spPr>
+          <a:xfrm>
+            <a:off x="2921000" y="3748881"/>
+            <a:ext cx="698500" cy="698500"/>
           </a:xfrm>
           <a:prstGeom prst="rect">
             <a:avLst/>
           </a:prstGeom>
           <a:noFill/>
-          <a:ln w="9525">
+          <a:ln>
             <a:noFill/>
-            <a:headEnd/>
-            <a:tailEnd/>
           </a:ln>
+          <a:effectLst/>
         </p:spPr>
-      </p:pic>
-      <p:sp>
-        <p:nvSpPr>
-          <p:cNvPr id="1" name="TextBox 3"/>
-          <p:cNvSpPr txBox="1"/>
-          <p:nvPr>
-            <p:ph idx="1"/>
-          </p:nvPr>
+        <p:style>
+          <a:lnRef idx="1">
+            <a:schemeClr val="accent1"/>
+          </a:lnRef>
+          <a:fillRef idx="3">
+            <a:schemeClr val="accent1"/>
+          </a:fillRef>
+          <a:effectRef idx="2">
+            <a:schemeClr val="accent1"/>
+          </a:effectRef>
+          <a:fontRef idx="minor">
+            <a:schemeClr val="lt1"/>
+          </a:fontRef>
+        </p:style>
+        <p:txBody>
+          <a:bodyPr rtlCol="0" anchor="ctr"/>
+          <a:lstStyle/>
+          <a:p>
+            <a:pPr algn="ctr"/>
+          </a:p>
+        </p:txBody>
+      </p:sp>
+      <p:sp>
+        <p:nvSpPr>
+          <p:cNvPr id="4" name="Rectangle 3">
+            <a:hlinkClick r:id="rId3"/>
+          </p:cNvPr>
+          <p:cNvSpPr/>
+          <p:nvPr/>
         </p:nvSpPr>
         <p:spPr>
           <a:xfrm>
-            <a:off x="3568700" y="4076700"/>
-            <a:ext cx="5105400" cy="508000"/>
+            <a:off x="3731220" y="4171354"/>
+            <a:ext cx="2176363" cy="114300"/>
           </a:xfrm>
           <a:prstGeom prst="rect">
             <a:avLst/>
           </a:prstGeom>
           <a:noFill/>
+          <a:ln>
+            <a:noFill/>
+          </a:ln>
+          <a:effectLst/>
         </p:spPr>
-        <p:txBody>
-          <a:bodyPr/>
-          <a:lstStyle/>
-          <a:p>
-            <a:pPr lvl="0" indent="0" marL="0" algn="ctr">
-              <a:buNone/>
-            </a:pPr>
-            <a:r>
-              <a:rPr/>
-              <a:t>Poll</a:t>
-            </a:r>
-          </a:p>
-        </p:txBody>
-      </p:sp>
-      <p:sp>
-        <p:nvSpPr>
-          <p:cNvPr id="3" name="Content Placeholder 2"/>
-          <p:cNvSpPr>
-            <a:spLocks noGrp="1"/>
-          </p:cNvSpPr>
-          <p:nvPr>
-            <p:ph idx="1"/>
-          </p:nvPr>
-        </p:nvSpPr>
-        <p:spPr/>
-        <p:txBody>
-          <a:bodyPr/>
-          <a:lstStyle/>
-          <a:p>
-            <a:pPr lvl="0" indent="0" marL="0">
-              <a:buNone/>
-            </a:pPr>
-            <a:r>
-              <a:rPr b="1"/>
-              <a:t>The site is the handout:</a:t>
-            </a:r>
-          </a:p>
-        </p:txBody>
-      </p:sp>
-      <p:pic>
-        <p:nvPicPr>
-          <p:cNvPr descr="qr-companion.png" id="0" name="Picture 1"/>
-          <p:cNvPicPr>
-            <a:picLocks noGrp="1" noChangeAspect="1"/>
-          </p:cNvPicPr>
+        <p:style>
+          <a:lnRef idx="1">
+            <a:schemeClr val="accent1"/>
+          </a:lnRef>
+          <a:fillRef idx="3">
+            <a:schemeClr val="accent1"/>
+          </a:fillRef>
+          <a:effectRef idx="2">
+            <a:schemeClr val="accent1"/>
+          </a:effectRef>
+          <a:fontRef idx="minor">
+            <a:schemeClr val="lt1"/>
+          </a:fontRef>
+        </p:style>
+        <p:txBody>
+          <a:bodyPr rtlCol="0" anchor="ctr"/>
+          <a:lstStyle/>
+          <a:p>
+            <a:pPr algn="ctr"/>
+          </a:p>
+        </p:txBody>
+      </p:sp>
+      <p:sp>
+        <p:nvSpPr>
+          <p:cNvPr id="5" name="Rectangle 4">
+            <a:hlinkClick r:id="rId4"/>
+          </p:cNvPr>
+          <p:cNvSpPr/>
           <p:nvPr/>
-        </p:nvPicPr>
-        <p:blipFill>
-          <a:blip r:embed="rId3"/>
-          <a:stretch>
-            <a:fillRect/>
-          </a:stretch>
-        </p:blipFill>
-        <p:spPr bwMode="auto">
+        </p:nvSpPr>
+        <p:spPr>
           <a:xfrm>
-            <a:off x="4191000" y="203200"/>
-            <a:ext cx="3873500" cy="3873500"/>
+            <a:off x="2921000" y="4863802"/>
+            <a:ext cx="698500" cy="698500"/>
           </a:xfrm>
           <a:prstGeom prst="rect">
             <a:avLst/>
           </a:prstGeom>
           <a:noFill/>
-          <a:ln w="9525">
+          <a:ln>
             <a:noFill/>
-            <a:headEnd/>
-            <a:tailEnd/>
           </a:ln>
+          <a:effectLst/>
         </p:spPr>
-      </p:pic>
-      <p:sp>
-        <p:nvSpPr>
-          <p:cNvPr id="1" name="TextBox 3"/>
-          <p:cNvSpPr txBox="1"/>
-          <p:nvPr>
-            <p:ph idx="1"/>
-          </p:nvPr>
+        <p:style>
+          <a:lnRef idx="1">
+            <a:schemeClr val="accent1"/>
+          </a:lnRef>
+          <a:fillRef idx="3">
+            <a:schemeClr val="accent1"/>
+          </a:fillRef>
+          <a:effectRef idx="2">
+            <a:schemeClr val="accent1"/>
+          </a:effectRef>
+          <a:fontRef idx="minor">
+            <a:schemeClr val="lt1"/>
+          </a:fontRef>
+        </p:style>
+        <p:txBody>
+          <a:bodyPr rtlCol="0" anchor="ctr"/>
+          <a:lstStyle/>
+          <a:p>
+            <a:pPr algn="ctr"/>
+          </a:p>
+        </p:txBody>
+      </p:sp>
+      <p:sp>
+        <p:nvSpPr>
+          <p:cNvPr id="6" name="Rectangle 5">
+            <a:hlinkClick r:id="rId4"/>
+          </p:cNvPr>
+          <p:cNvSpPr/>
+          <p:nvPr/>
         </p:nvSpPr>
         <p:spPr>
           <a:xfrm>
-            <a:off x="3568700" y="4076700"/>
-            <a:ext cx="5105400" cy="508000"/>
+            <a:off x="5337571" y="5219402"/>
+            <a:ext cx="2020887" cy="114300"/>
           </a:xfrm>
           <a:prstGeom prst="rect">
             <a:avLst/>
           </a:prstGeom>
           <a:noFill/>
+          <a:ln>
+            <a:noFill/>
+          </a:ln>
+          <a:effectLst/>
         </p:spPr>
-        <p:txBody>
-          <a:bodyPr/>
-          <a:lstStyle/>
-          <a:p>
-            <a:pPr lvl="0" indent="0" marL="0" algn="ctr">
-              <a:buNone/>
-            </a:pPr>
-            <a:r>
-              <a:rPr/>
-              <a:t>Companion site</a:t>
-            </a:r>
+        <p:style>
+          <a:lnRef idx="1">
+            <a:schemeClr val="accent1"/>
+          </a:lnRef>
+          <a:fillRef idx="3">
+            <a:schemeClr val="accent1"/>
+          </a:fillRef>
+          <a:effectRef idx="2">
+            <a:schemeClr val="accent1"/>
+          </a:effectRef>
+          <a:fontRef idx="minor">
+            <a:schemeClr val="lt1"/>
+          </a:fontRef>
+        </p:style>
+        <p:txBody>
+          <a:bodyPr rtlCol="0" anchor="ctr"/>
+          <a:lstStyle/>
+          <a:p>
+            <a:pPr algn="ctr"/>
           </a:p>
         </p:txBody>
       </p:sp>
     </p:spTree>
   </p:cSld>
+  <p:clrMapOvr>
+    <a:masterClrMapping/>
+  </p:clrMapOvr>
 </p:sld>
 </file>
 
 <file path=ppt/slides/slide10.xml><?xml version="1.0" encoding="utf-8"?>
-<p:sld xmlns:a="http://schemas.openxmlformats.org/drawingml/2006/main" xmlns:r="http://schemas.openxmlformats.org/officeDocument/2006/relationships" xmlns:p="http://schemas.openxmlformats.org/presentationml/2006/main">
+<p:sld xmlns:a="http://schemas.openxmlformats.org/drawingml/2006/main" xmlns:p="http://schemas.openxmlformats.org/presentationml/2006/main" xmlns:r="http://schemas.openxmlformats.org/officeDocument/2006/relationships">
   <p:cSld>
     <p:spTree>
       <p:nvGrpSpPr>
@@ -3371,458 +3317,12 @@
         <p:cNvGrpSpPr/>
         <p:nvPr/>
       </p:nvGrpSpPr>
-      <p:grpSpPr>
-        <a:xfrm>
-          <a:off x="0" y="0"/>
-          <a:ext cx="0" cy="0"/>
-          <a:chOff x="0" y="0"/>
-          <a:chExt cx="0" cy="0"/>
-        </a:xfrm>
-      </p:grpSpPr>
-      <p:sp>
-        <p:nvSpPr>
-          <p:cNvPr id="2" name="Title 1"/>
-          <p:cNvSpPr>
-            <a:spLocks noGrp="1"/>
-          </p:cNvSpPr>
-          <p:nvPr>
-            <p:ph type="title"/>
-          </p:nvPr>
-        </p:nvSpPr>
-        <p:spPr/>
-        <p:txBody>
-          <a:bodyPr/>
-          <a:lstStyle/>
-          <a:p>
-            <a:pPr lvl="0" indent="0" marL="0">
-              <a:buNone/>
-            </a:pPr>
-            <a:r>
-              <a:rPr/>
-              <a:t>Push back: three ways</a:t>
-            </a:r>
-          </a:p>
-        </p:txBody>
-      </p:sp>
-      <p:sp>
-        <p:nvSpPr>
-          <p:cNvPr id="3" name="Content Placeholder 2"/>
-          <p:cNvSpPr>
-            <a:spLocks noGrp="1"/>
-          </p:cNvSpPr>
-          <p:nvPr>
-            <p:ph idx="1"/>
-          </p:nvPr>
-        </p:nvSpPr>
-        <p:spPr/>
-        <p:txBody>
-          <a:bodyPr/>
-          <a:lstStyle/>
-          <a:p>
-            <a:pPr lvl="0" indent="-342900" marL="342900">
-              <a:buAutoNum type="arabicPeriod"/>
-            </a:pPr>
-            <a:r>
-              <a:rPr b="1"/>
-              <a:t>Devil’s advocate</a:t>
-            </a:r>
-            <a:r>
-              <a:rPr/>
-              <a:t> — make it attack your idea; you decide what survives. </a:t>
-            </a:r>
-            <a:r>
-              <a:rPr i="1"/>
-              <a:t>(You just did this in move 2.)</a:t>
-            </a:r>
-          </a:p>
-          <a:p>
-            <a:pPr lvl="0" indent="-342900" marL="342900">
-              <a:buAutoNum type="arabicPeriod"/>
-            </a:pPr>
-            <a:r>
-              <a:rPr b="1"/>
-              <a:t>Board of directors</a:t>
-            </a:r>
-            <a:r>
-              <a:rPr/>
-              <a:t> — a room of voices (CFO, sceptical customer, growth marketer), not one answer. You weigh them.</a:t>
-            </a:r>
-          </a:p>
-          <a:p>
-            <a:pPr lvl="0" indent="-342900" marL="342900">
-              <a:buAutoNum type="arabicPeriod"/>
-            </a:pPr>
-            <a:r>
-              <a:rPr b="1"/>
-              <a:t>VET</a:t>
-            </a:r>
-            <a:r>
-              <a:rPr/>
-              <a:t> — Verify the source · Explain it back · Test the edges. For any claim you can’t check.</a:t>
-            </a:r>
-          </a:p>
-          <a:p>
-            <a:pPr lvl="0" indent="0" marL="0">
-              <a:buNone/>
-            </a:pPr>
-            <a:r>
-              <a:rPr i="1"/>
-              <a:t>Prompts for all three are on the companion site.</a:t>
-            </a:r>
-          </a:p>
-        </p:txBody>
-      </p:sp>
-    </p:spTree>
-  </p:cSld>
-</p:sld>
-</file>
-
-<file path=ppt/slides/slide11.xml><?xml version="1.0" encoding="utf-8"?>
-<p:sld xmlns:a="http://schemas.openxmlformats.org/drawingml/2006/main" xmlns:r="http://schemas.openxmlformats.org/officeDocument/2006/relationships" xmlns:p="http://schemas.openxmlformats.org/presentationml/2006/main">
-  <p:cSld>
-    <p:spTree>
-      <p:nvGrpSpPr>
-        <p:cNvPr id="1" name=""/>
-        <p:cNvGrpSpPr/>
-        <p:nvPr/>
-      </p:nvGrpSpPr>
-      <p:grpSpPr>
-        <a:xfrm>
-          <a:off x="0" y="0"/>
-          <a:ext cx="0" cy="0"/>
-          <a:chOff x="0" y="0"/>
-          <a:chExt cx="0" cy="0"/>
-        </a:xfrm>
-      </p:grpSpPr>
-      <p:sp>
-        <p:nvSpPr>
-          <p:cNvPr id="2" name="Title 1"/>
-          <p:cNvSpPr>
-            <a:spLocks noGrp="1"/>
-          </p:cNvSpPr>
-          <p:nvPr>
-            <p:ph type="title"/>
-          </p:nvPr>
-        </p:nvSpPr>
-        <p:spPr/>
-        <p:txBody>
-          <a:bodyPr/>
-          <a:lstStyle/>
-          <a:p>
-            <a:pPr lvl="0" indent="0" marL="0">
-              <a:buNone/>
-            </a:pPr>
-            <a:r>
-              <a:rPr/>
-              <a:t>The trust tool</a:t>
-            </a:r>
-          </a:p>
-        </p:txBody>
-      </p:sp>
-      <p:sp>
-        <p:nvSpPr>
-          <p:cNvPr id="3" name="Content Placeholder 2"/>
-          <p:cNvSpPr>
-            <a:spLocks noGrp="1"/>
-          </p:cNvSpPr>
-          <p:nvPr>
-            <p:ph idx="1"/>
-          </p:nvPr>
-        </p:nvSpPr>
-        <p:spPr/>
-        <p:txBody>
-          <a:bodyPr/>
-          <a:lstStyle/>
-          <a:p>
-            <a:pPr lvl="0" indent="0" marL="0">
-              <a:buNone/>
-            </a:pPr>
-            <a:r>
-              <a:rPr b="1"/>
-              <a:t>Average / Precise × Small / Large.</a:t>
-            </a:r>
-          </a:p>
-          <a:p>
-            <a:pPr lvl="0"/>
-            <a:r>
-              <a:rPr b="1"/>
-              <a:t>Lean in:</a:t>
-            </a:r>
-            <a:r>
-              <a:rPr/>
-              <a:t> competitor scans, brainstorming, first drafts.</a:t>
-            </a:r>
-          </a:p>
-          <a:p>
-            <a:pPr lvl="0"/>
-            <a:r>
-              <a:rPr b="1"/>
-              <a:t>Human owns it:</a:t>
-            </a:r>
-            <a:r>
-              <a:rPr/>
-              <a:t> the go/no-go, the customer, the positioning call, any number in a pitch.</a:t>
-            </a:r>
-          </a:p>
-          <a:p>
-            <a:pPr lvl="0" indent="0" marL="0">
-              <a:buNone/>
-            </a:pPr>
-            <a:r>
-              <a:rPr i="1"/>
-              <a:t>Where it hurts to be wrong, you stay in charge — and when the grid says verify, VET it.</a:t>
-            </a:r>
-          </a:p>
-        </p:txBody>
-      </p:sp>
-    </p:spTree>
-  </p:cSld>
-</p:sld>
-</file>
-
-<file path=ppt/slides/slide12.xml><?xml version="1.0" encoding="utf-8"?>
-<p:sld xmlns:a="http://schemas.openxmlformats.org/drawingml/2006/main" xmlns:r="http://schemas.openxmlformats.org/officeDocument/2006/relationships" xmlns:p="http://schemas.openxmlformats.org/presentationml/2006/main">
-  <p:cSld>
-    <p:spTree>
-      <p:nvGrpSpPr>
-        <p:cNvPr id="1" name=""/>
-        <p:cNvGrpSpPr/>
-        <p:nvPr/>
-      </p:nvGrpSpPr>
-      <p:grpSpPr>
-        <a:xfrm>
-          <a:off x="0" y="0"/>
-          <a:ext cx="0" cy="0"/>
-          <a:chOff x="0" y="0"/>
-          <a:chExt cx="0" cy="0"/>
-        </a:xfrm>
-      </p:grpSpPr>
-      <p:sp>
-        <p:nvSpPr>
-          <p:cNvPr id="2" name="Title 1"/>
-          <p:cNvSpPr>
-            <a:spLocks noGrp="1"/>
-          </p:cNvSpPr>
-          <p:nvPr>
-            <p:ph type="title"/>
-          </p:nvPr>
-        </p:nvSpPr>
-        <p:spPr/>
-        <p:txBody>
-          <a:bodyPr/>
-          <a:lstStyle/>
-          <a:p>
-            <a:pPr lvl="0" indent="0" marL="0">
-              <a:buNone/>
-            </a:pPr>
-            <a:r>
-              <a:rPr/>
-              <a:t>The method, in three sentences</a:t>
-            </a:r>
-          </a:p>
-        </p:txBody>
-      </p:sp>
-      <p:sp>
-        <p:nvSpPr>
-          <p:cNvPr id="3" name="Content Placeholder 2"/>
-          <p:cNvSpPr>
-            <a:spLocks noGrp="1"/>
-          </p:cNvSpPr>
-          <p:nvPr>
-            <p:ph idx="1"/>
-          </p:nvPr>
-        </p:nvSpPr>
-        <p:spPr/>
-        <p:txBody>
-          <a:bodyPr/>
-          <a:lstStyle/>
-          <a:p>
-            <a:pPr lvl="0" indent="-342900" marL="342900">
-              <a:buAutoNum type="arabicPeriod"/>
-            </a:pPr>
-            <a:r>
-              <a:rPr b="1"/>
-              <a:t>Add context</a:t>
-            </a:r>
-            <a:r>
-              <a:rPr/>
-              <a:t> — the specifics only you hold.</a:t>
-            </a:r>
-          </a:p>
-          <a:p>
-            <a:pPr lvl="0" indent="-342900" marL="342900">
-              <a:buAutoNum type="arabicPeriod"/>
-            </a:pPr>
-            <a:r>
-              <a:rPr b="1"/>
-              <a:t>Prompt past the flattery</a:t>
-            </a:r>
-            <a:r>
-              <a:rPr/>
-              <a:t> — ask “why does this fail?”, not “what do you think?”</a:t>
-            </a:r>
-          </a:p>
-          <a:p>
-            <a:pPr lvl="0" indent="-342900" marL="342900">
-              <a:buAutoNum type="arabicPeriod"/>
-            </a:pPr>
-            <a:r>
-              <a:rPr b="1"/>
-              <a:t>Stay sceptical where you know least.</a:t>
-            </a:r>
-          </a:p>
-          <a:p>
-            <a:pPr lvl="0" indent="0" marL="1270000">
-              <a:buNone/>
-            </a:pPr>
-            <a:r>
-              <a:rPr sz="2000"/>
-              <a:t>AI as a thinking partner, not a stand-in.</a:t>
-            </a:r>
-          </a:p>
-        </p:txBody>
-      </p:sp>
-    </p:spTree>
-  </p:cSld>
-</p:sld>
-</file>
-
-<file path=ppt/slides/slide13.xml><?xml version="1.0" encoding="utf-8"?>
-<p:sld xmlns:a="http://schemas.openxmlformats.org/drawingml/2006/main" xmlns:r="http://schemas.openxmlformats.org/officeDocument/2006/relationships" xmlns:p="http://schemas.openxmlformats.org/presentationml/2006/main">
-  <p:cSld>
-    <p:spTree>
-      <p:nvGrpSpPr>
-        <p:cNvPr id="1" name=""/>
-        <p:cNvGrpSpPr/>
-        <p:nvPr/>
-      </p:nvGrpSpPr>
-      <p:grpSpPr>
-        <a:xfrm>
-          <a:off x="0" y="0"/>
-          <a:ext cx="0" cy="0"/>
-          <a:chOff x="0" y="0"/>
-          <a:chExt cx="0" cy="0"/>
-        </a:xfrm>
-      </p:grpSpPr>
-      <p:sp>
-        <p:nvSpPr>
-          <p:cNvPr id="2" name="Title 1"/>
-          <p:cNvSpPr>
-            <a:spLocks noGrp="1"/>
-          </p:cNvSpPr>
-          <p:nvPr>
-            <p:ph type="title"/>
-          </p:nvPr>
-        </p:nvSpPr>
-        <p:spPr>
-          <a:xfrm>
-            <a:off x="457201" y="204787"/>
-            <a:ext cx="3008313" cy="871538"/>
-          </a:xfrm>
-        </p:spPr>
-        <p:txBody>
-          <a:bodyPr/>
-          <a:lstStyle/>
-          <a:p>
-            <a:pPr lvl="0" indent="0" marL="0">
-              <a:buNone/>
-            </a:pPr>
-            <a:r>
-              <a:rPr/>
-              <a:t>Takeaways</a:t>
-            </a:r>
-          </a:p>
-        </p:txBody>
-      </p:sp>
-      <p:sp>
-        <p:nvSpPr>
-          <p:cNvPr id="4" name="Text Placeholder 3"/>
-          <p:cNvSpPr>
-            <a:spLocks noGrp="1"/>
-          </p:cNvSpPr>
-          <p:nvPr>
-            <p:ph idx="2" sz="half" type="body"/>
-          </p:nvPr>
-        </p:nvSpPr>
-        <p:spPr/>
-        <p:txBody>
-          <a:bodyPr/>
-          <a:lstStyle/>
-          <a:p>
-            <a:pPr lvl="0"/>
-            <a:r>
-              <a:rPr b="1"/>
-              <a:t>The companion site</a:t>
-            </a:r>
-            <a:r>
-              <a:rPr/>
-              <a:t> — RTCF builder, prompt library, trust tool + VET.</a:t>
-            </a:r>
-          </a:p>
-          <a:p>
-            <a:pPr lvl="0"/>
-            <a:r>
-              <a:rPr b="1"/>
-              <a:t>The starter prompts</a:t>
-            </a:r>
-            <a:r>
-              <a:rPr/>
-              <a:t> — copy-paste, from today.</a:t>
-            </a:r>
-          </a:p>
-          <a:p>
-            <a:pPr lvl="0"/>
-            <a:r>
-              <a:rPr b="1"/>
-              <a:t>Tonight:</a:t>
-            </a:r>
-            <a:r>
-              <a:rPr/>
-              <a:t> run move 1 on your real idea.</a:t>
-            </a:r>
-          </a:p>
-          <a:p>
-            <a:pPr lvl="0"/>
-            <a:r>
-              <a:rPr/>
-              <a:t>The tools: today’s free chat, </a:t>
-            </a:r>
-            <a:r>
-              <a:rPr b="1"/>
-              <a:t>Gemini Notebook</a:t>
-            </a:r>
-            <a:r>
-              <a:rPr/>
-              <a:t> for your documents, </a:t>
-            </a:r>
-            <a:r>
-              <a:rPr b="1"/>
-              <a:t>Msty</a:t>
-            </a:r>
-            <a:r>
-              <a:rPr/>
-              <a:t> for private local AI — all linked on the site.</a:t>
-            </a:r>
-          </a:p>
-          <a:p>
-            <a:pPr lvl="0" indent="0" marL="0">
-              <a:spcBef>
-                <a:spcPts val="3000"/>
-              </a:spcBef>
-              <a:buNone/>
-            </a:pPr>
-            <a:r>
-              <a:rPr b="1"/>
-              <a:t>Direct it. Don’t delegate. Never surrender.</a:t>
-            </a:r>
-          </a:p>
-        </p:txBody>
-      </p:sp>
+      <p:grpSpPr/>
       <p:pic>
         <p:nvPicPr>
-          <p:cNvPr descr="qr-companion.png" id="0" name="Picture 1"/>
+          <p:cNvPr id="2" name="Picture 1" descr="slide-10.png"/>
           <p:cNvPicPr>
-            <a:picLocks noGrp="1" noChangeAspect="1"/>
+            <a:picLocks noChangeAspect="1"/>
           </p:cNvPicPr>
           <p:nvPr/>
         </p:nvPicPr>
@@ -3832,61 +3332,26 @@
             <a:fillRect/>
           </a:stretch>
         </p:blipFill>
-        <p:spPr bwMode="auto">
+        <p:spPr>
           <a:xfrm>
-            <a:off x="4191000" y="203200"/>
-            <a:ext cx="3873500" cy="3873500"/>
+            <a:off x="0" y="0"/>
+            <a:ext cx="12192000" cy="6858000"/>
           </a:xfrm>
           <a:prstGeom prst="rect">
             <a:avLst/>
           </a:prstGeom>
-          <a:noFill/>
-          <a:ln w="9525">
-            <a:noFill/>
-            <a:headEnd/>
-            <a:tailEnd/>
-          </a:ln>
         </p:spPr>
       </p:pic>
-      <p:sp>
-        <p:nvSpPr>
-          <p:cNvPr id="1" name="TextBox 3"/>
-          <p:cNvSpPr txBox="1"/>
-          <p:nvPr>
-            <p:ph idx="1"/>
-          </p:nvPr>
-        </p:nvSpPr>
-        <p:spPr>
-          <a:xfrm>
-            <a:off x="3568700" y="4076700"/>
-            <a:ext cx="5105400" cy="508000"/>
-          </a:xfrm>
-          <a:prstGeom prst="rect">
-            <a:avLst/>
-          </a:prstGeom>
-          <a:noFill/>
-        </p:spPr>
-        <p:txBody>
-          <a:bodyPr/>
-          <a:lstStyle/>
-          <a:p>
-            <a:pPr lvl="0" indent="0" marL="0" algn="ctr">
-              <a:buNone/>
-            </a:pPr>
-            <a:r>
-              <a:rPr/>
-              <a:t>Companion site — prompts, tools, this deck</a:t>
-            </a:r>
-          </a:p>
-        </p:txBody>
-      </p:sp>
     </p:spTree>
   </p:cSld>
+  <p:clrMapOvr>
+    <a:masterClrMapping/>
+  </p:clrMapOvr>
 </p:sld>
 </file>
 
-<file path=ppt/slides/slide2.xml><?xml version="1.0" encoding="utf-8"?>
-<p:sld xmlns:a="http://schemas.openxmlformats.org/drawingml/2006/main" xmlns:r="http://schemas.openxmlformats.org/officeDocument/2006/relationships" xmlns:p="http://schemas.openxmlformats.org/presentationml/2006/main">
+<file path=ppt/slides/slide11.xml><?xml version="1.0" encoding="utf-8"?>
+<p:sld xmlns:a="http://schemas.openxmlformats.org/drawingml/2006/main" xmlns:p="http://schemas.openxmlformats.org/presentationml/2006/main" xmlns:r="http://schemas.openxmlformats.org/officeDocument/2006/relationships">
   <p:cSld>
     <p:spTree>
       <p:nvGrpSpPr>
@@ -3894,567 +3359,12 @@
         <p:cNvGrpSpPr/>
         <p:nvPr/>
       </p:nvGrpSpPr>
-      <p:grpSpPr>
-        <a:xfrm>
-          <a:off x="0" y="0"/>
-          <a:ext cx="0" cy="0"/>
-          <a:chOff x="0" y="0"/>
-          <a:chExt cx="0" cy="0"/>
-        </a:xfrm>
-      </p:grpSpPr>
-      <p:sp>
-        <p:nvSpPr>
-          <p:cNvPr id="2" name="Title 1"/>
-          <p:cNvSpPr>
-            <a:spLocks noGrp="1"/>
-          </p:cNvSpPr>
-          <p:nvPr>
-            <p:ph type="title"/>
-          </p:nvPr>
-        </p:nvSpPr>
-        <p:spPr/>
-        <p:txBody>
-          <a:bodyPr/>
-          <a:lstStyle/>
-          <a:p>
-            <a:pPr lvl="0" indent="0" marL="0">
-              <a:buNone/>
-            </a:pPr>
-            <a:r>
-              <a:rPr/>
-              <a:t>The thesis</a:t>
-            </a:r>
-          </a:p>
-        </p:txBody>
-      </p:sp>
-      <p:sp>
-        <p:nvSpPr>
-          <p:cNvPr id="3" name="Content Placeholder 2"/>
-          <p:cNvSpPr>
-            <a:spLocks noGrp="1"/>
-          </p:cNvSpPr>
-          <p:nvPr>
-            <p:ph idx="1"/>
-          </p:nvPr>
-        </p:nvSpPr>
-        <p:spPr/>
-        <p:txBody>
-          <a:bodyPr/>
-          <a:lstStyle/>
-          <a:p>
-            <a:pPr lvl="0" indent="0" marL="0">
-              <a:buNone/>
-            </a:pPr>
-            <a:r>
-              <a:rPr/>
-              <a:t>A capability that drafts your copy, models your numbers, and rehearses your pitch can do the same for </a:t>
-            </a:r>
-            <a:r>
-              <a:rPr b="1"/>
-              <a:t>every other founder in the room</a:t>
-            </a:r>
-            <a:r>
-              <a:rPr/>
-              <a:t>.</a:t>
-            </a:r>
-          </a:p>
-          <a:p>
-            <a:pPr lvl="0" indent="0" marL="0">
-              <a:buNone/>
-            </a:pPr>
-            <a:r>
-              <a:rPr/>
-              <a:t>Generic competence is the </a:t>
-            </a:r>
-            <a:r>
-              <a:rPr b="1"/>
-              <a:t>baseline</a:t>
-            </a:r>
-            <a:r>
-              <a:rPr/>
-              <a:t> — not the advantage.</a:t>
-            </a:r>
-          </a:p>
-          <a:p>
-            <a:pPr lvl="0" indent="0" marL="0">
-              <a:buNone/>
-            </a:pPr>
-            <a:r>
-              <a:rPr/>
-              <a:t>The edge lives in your judgement: taste, context, and the variation no rival’s identical model can reproduce.</a:t>
-            </a:r>
-          </a:p>
-        </p:txBody>
-      </p:sp>
-    </p:spTree>
-  </p:cSld>
-</p:sld>
-</file>
-
-<file path=ppt/slides/slide3.xml><?xml version="1.0" encoding="utf-8"?>
-<p:sld xmlns:a="http://schemas.openxmlformats.org/drawingml/2006/main" xmlns:r="http://schemas.openxmlformats.org/officeDocument/2006/relationships" xmlns:p="http://schemas.openxmlformats.org/presentationml/2006/main">
-  <p:cSld>
-    <p:spTree>
-      <p:nvGrpSpPr>
-        <p:cNvPr id="1" name=""/>
-        <p:cNvGrpSpPr/>
-        <p:nvPr/>
-      </p:nvGrpSpPr>
-      <p:grpSpPr>
-        <a:xfrm>
-          <a:off x="0" y="0"/>
-          <a:ext cx="0" cy="0"/>
-          <a:chOff x="0" y="0"/>
-          <a:chExt cx="0" cy="0"/>
-        </a:xfrm>
-      </p:grpSpPr>
-      <p:sp>
-        <p:nvSpPr>
-          <p:cNvPr id="2" name="Title 1"/>
-          <p:cNvSpPr>
-            <a:spLocks noGrp="1"/>
-          </p:cNvSpPr>
-          <p:nvPr>
-            <p:ph type="title"/>
-          </p:nvPr>
-        </p:nvSpPr>
-        <p:spPr/>
-        <p:txBody>
-          <a:bodyPr/>
-          <a:lstStyle/>
-          <a:p>
-            <a:pPr lvl="0" indent="0" marL="0">
-              <a:buNone/>
-            </a:pPr>
-            <a:r>
-              <a:rPr/>
-              <a:t>Walk the talk</a:t>
-            </a:r>
-          </a:p>
-        </p:txBody>
-      </p:sp>
-      <p:sp>
-        <p:nvSpPr>
-          <p:cNvPr id="3" name="Content Placeholder 2"/>
-          <p:cNvSpPr>
-            <a:spLocks noGrp="1"/>
-          </p:cNvSpPr>
-          <p:nvPr>
-            <p:ph idx="1"/>
-          </p:nvPr>
-        </p:nvSpPr>
-        <p:spPr/>
-        <p:txBody>
-          <a:bodyPr/>
-          <a:lstStyle/>
-          <a:p>
-            <a:pPr lvl="0"/>
-            <a:r>
-              <a:rPr/>
-              <a:t>One academic, in conversation with AI: </a:t>
-            </a:r>
-            <a:r>
-              <a:rPr b="1"/>
-              <a:t>~30 tools</a:t>
-            </a:r>
-            <a:r>
-              <a:rPr/>
-              <a:t> designed, built, and shipped solo — bigpicture.borck.dev</a:t>
-            </a:r>
-          </a:p>
-          <a:p>
-            <a:pPr lvl="0"/>
-            <a:r>
-              <a:rPr/>
-              <a:t>AI taught at </a:t>
-            </a:r>
-            <a:r>
-              <a:rPr b="1"/>
-              <a:t>undergraduate, postgraduate, and executive</a:t>
-            </a:r>
-            <a:r>
-              <a:rPr/>
-              <a:t> levels (Curtin) — the books are free at books.borck.education</a:t>
-            </a:r>
-          </a:p>
-          <a:p>
-            <a:pPr lvl="0"/>
-            <a:r>
-              <a:rPr/>
-              <a:t>This deck, the companion site, and the poll you just answered were </a:t>
-            </a:r>
-            <a:r>
-              <a:rPr b="1"/>
-              <a:t>built in conversation with AI</a:t>
-            </a:r>
-          </a:p>
-        </p:txBody>
-      </p:sp>
-    </p:spTree>
-  </p:cSld>
-</p:sld>
-</file>
-
-<file path=ppt/slides/slide4.xml><?xml version="1.0" encoding="utf-8"?>
-<p:sld xmlns:a="http://schemas.openxmlformats.org/drawingml/2006/main" xmlns:r="http://schemas.openxmlformats.org/officeDocument/2006/relationships" xmlns:p="http://schemas.openxmlformats.org/presentationml/2006/main">
-  <p:cSld>
-    <p:spTree>
-      <p:nvGrpSpPr>
-        <p:cNvPr id="1" name=""/>
-        <p:cNvGrpSpPr/>
-        <p:nvPr/>
-      </p:nvGrpSpPr>
-      <p:grpSpPr>
-        <a:xfrm>
-          <a:off x="0" y="0"/>
-          <a:ext cx="0" cy="0"/>
-          <a:chOff x="0" y="0"/>
-          <a:chExt cx="0" cy="0"/>
-        </a:xfrm>
-      </p:grpSpPr>
-      <p:sp>
-        <p:nvSpPr>
-          <p:cNvPr id="2" name="Title 1"/>
-          <p:cNvSpPr>
-            <a:spLocks noGrp="1"/>
-          </p:cNvSpPr>
-          <p:nvPr>
-            <p:ph type="title"/>
-          </p:nvPr>
-        </p:nvSpPr>
-        <p:spPr/>
-        <p:txBody>
-          <a:bodyPr/>
-          <a:lstStyle/>
-          <a:p>
-            <a:pPr lvl="0" indent="0" marL="0">
-              <a:buNone/>
-            </a:pPr>
-            <a:r>
-              <a:rPr/>
-              <a:t>Trap 1: Sycophancy</a:t>
-            </a:r>
-          </a:p>
-        </p:txBody>
-      </p:sp>
-      <p:sp>
-        <p:nvSpPr>
-          <p:cNvPr id="3" name="Content Placeholder 2"/>
-          <p:cNvSpPr>
-            <a:spLocks noGrp="1"/>
-          </p:cNvSpPr>
-          <p:nvPr>
-            <p:ph idx="1"/>
-          </p:nvPr>
-        </p:nvSpPr>
-        <p:spPr/>
-        <p:txBody>
-          <a:bodyPr/>
-          <a:lstStyle/>
-          <a:p>
-            <a:pPr lvl="0" indent="0" marL="0">
-              <a:buNone/>
-            </a:pPr>
-            <a:r>
-              <a:rPr/>
-              <a:t>The model tells you what you want to hear.</a:t>
-            </a:r>
-          </a:p>
-          <a:p>
-            <a:pPr lvl="0" indent="0" marL="0">
-              <a:buNone/>
-            </a:pPr>
-            <a:r>
-              <a:rPr/>
-              <a:t>Ask </a:t>
-            </a:r>
-            <a:r>
-              <a:rPr i="1"/>
-              <a:t>“what do you think?”</a:t>
-            </a:r>
-            <a:r>
-              <a:rPr/>
-              <a:t> → praise first, gentle critique second.</a:t>
-            </a:r>
-          </a:p>
-          <a:p>
-            <a:pPr lvl="0" indent="0" marL="0">
-              <a:buNone/>
-            </a:pPr>
-            <a:r>
-              <a:rPr/>
-              <a:t>It’s managing your feelings, not assessing your work.</a:t>
-            </a:r>
-          </a:p>
-          <a:p>
-            <a:pPr lvl="0" indent="0" marL="0">
-              <a:buNone/>
-            </a:pPr>
-            <a:r>
-              <a:rPr b="1"/>
-              <a:t>Defence:</a:t>
-            </a:r>
-            <a:r>
-              <a:rPr/>
-              <a:t> prompt past it. </a:t>
-            </a:r>
-            <a:r>
-              <a:rPr i="1"/>
-              <a:t>(We do this in move 2.)</a:t>
-            </a:r>
-          </a:p>
-        </p:txBody>
-      </p:sp>
-    </p:spTree>
-  </p:cSld>
-</p:sld>
-</file>
-
-<file path=ppt/slides/slide5.xml><?xml version="1.0" encoding="utf-8"?>
-<p:sld xmlns:a="http://schemas.openxmlformats.org/drawingml/2006/main" xmlns:r="http://schemas.openxmlformats.org/officeDocument/2006/relationships" xmlns:p="http://schemas.openxmlformats.org/presentationml/2006/main">
-  <p:cSld>
-    <p:spTree>
-      <p:nvGrpSpPr>
-        <p:cNvPr id="1" name=""/>
-        <p:cNvGrpSpPr/>
-        <p:nvPr/>
-      </p:nvGrpSpPr>
-      <p:grpSpPr>
-        <a:xfrm>
-          <a:off x="0" y="0"/>
-          <a:ext cx="0" cy="0"/>
-          <a:chOff x="0" y="0"/>
-          <a:chExt cx="0" cy="0"/>
-        </a:xfrm>
-      </p:grpSpPr>
-      <p:sp>
-        <p:nvSpPr>
-          <p:cNvPr id="2" name="Title 1"/>
-          <p:cNvSpPr>
-            <a:spLocks noGrp="1"/>
-          </p:cNvSpPr>
-          <p:nvPr>
-            <p:ph type="title"/>
-          </p:nvPr>
-        </p:nvSpPr>
-        <p:spPr/>
-        <p:txBody>
-          <a:bodyPr/>
-          <a:lstStyle/>
-          <a:p>
-            <a:pPr lvl="0" indent="0" marL="0">
-              <a:buNone/>
-            </a:pPr>
-            <a:r>
-              <a:rPr/>
-              <a:t>Trap 2: Gell-Mann Amnesia</a:t>
-            </a:r>
-          </a:p>
-        </p:txBody>
-      </p:sp>
-      <p:sp>
-        <p:nvSpPr>
-          <p:cNvPr id="3" name="Content Placeholder 2"/>
-          <p:cNvSpPr>
-            <a:spLocks noGrp="1"/>
-          </p:cNvSpPr>
-          <p:nvPr>
-            <p:ph idx="1"/>
-          </p:nvPr>
-        </p:nvSpPr>
-        <p:spPr/>
-        <p:txBody>
-          <a:bodyPr/>
-          <a:lstStyle/>
-          <a:p>
-            <a:pPr lvl="0" indent="0" marL="0">
-              <a:buNone/>
-            </a:pPr>
-            <a:r>
-              <a:rPr/>
-              <a:t>You catch its errors in your own domain.</a:t>
-            </a:r>
-          </a:p>
-          <a:p>
-            <a:pPr lvl="0" indent="0" marL="0">
-              <a:buNone/>
-            </a:pPr>
-            <a:r>
-              <a:rPr/>
-              <a:t>You trust it on the market, the regs, the numbers — the bits you can’t check.</a:t>
-            </a:r>
-          </a:p>
-          <a:p>
-            <a:pPr lvl="0" indent="0" marL="0">
-              <a:buNone/>
-            </a:pPr>
-            <a:r>
-              <a:rPr/>
-              <a:t>Smooth prose feels authoritative. </a:t>
-            </a:r>
-            <a:r>
-              <a:rPr b="1"/>
-              <a:t>Smoothness ≠ accuracy.</a:t>
-            </a:r>
-          </a:p>
-        </p:txBody>
-      </p:sp>
-    </p:spTree>
-  </p:cSld>
-</p:sld>
-</file>
-
-<file path=ppt/slides/slide6.xml><?xml version="1.0" encoding="utf-8"?>
-<p:sld xmlns:a="http://schemas.openxmlformats.org/drawingml/2006/main" xmlns:r="http://schemas.openxmlformats.org/officeDocument/2006/relationships" xmlns:p="http://schemas.openxmlformats.org/presentationml/2006/main">
-  <p:cSld>
-    <p:spTree>
-      <p:nvGrpSpPr>
-        <p:cNvPr id="1" name=""/>
-        <p:cNvGrpSpPr/>
-        <p:nvPr/>
-      </p:nvGrpSpPr>
-      <p:grpSpPr>
-        <a:xfrm>
-          <a:off x="0" y="0"/>
-          <a:ext cx="0" cy="0"/>
-          <a:chOff x="0" y="0"/>
-          <a:chExt cx="0" cy="0"/>
-        </a:xfrm>
-      </p:grpSpPr>
-      <p:sp>
-        <p:nvSpPr>
-          <p:cNvPr id="2" name="Title 1"/>
-          <p:cNvSpPr>
-            <a:spLocks noGrp="1"/>
-          </p:cNvSpPr>
-          <p:nvPr>
-            <p:ph type="title"/>
-          </p:nvPr>
-        </p:nvSpPr>
-        <p:spPr>
-          <a:xfrm>
-            <a:off x="457201" y="204787"/>
-            <a:ext cx="3008313" cy="871538"/>
-          </a:xfrm>
-        </p:spPr>
-        <p:txBody>
-          <a:bodyPr/>
-          <a:lstStyle/>
-          <a:p>
-            <a:pPr lvl="0" indent="0" marL="0">
-              <a:buNone/>
-            </a:pPr>
-            <a:r>
-              <a:rPr/>
-              <a:t>LIVE: one idea, three moves</a:t>
-            </a:r>
-          </a:p>
-        </p:txBody>
-      </p:sp>
-      <p:sp>
-        <p:nvSpPr>
-          <p:cNvPr id="4" name="Text Placeholder 3"/>
-          <p:cNvSpPr>
-            <a:spLocks noGrp="1"/>
-          </p:cNvSpPr>
-          <p:nvPr>
-            <p:ph idx="2" sz="half" type="body"/>
-          </p:nvPr>
-        </p:nvSpPr>
-        <p:spPr/>
-        <p:txBody>
-          <a:bodyPr/>
-          <a:lstStyle/>
-          <a:p>
-            <a:pPr lvl="0" indent="0" marL="0">
-              <a:buNone/>
-            </a:pPr>
-            <a:r>
-              <a:rPr/>
-              <a:t>Working in </a:t>
-            </a:r>
-            <a:r>
-              <a:rPr b="1"/>
-              <a:t>free chat</a:t>
-            </a:r>
-            <a:r>
-              <a:rPr/>
-              <a:t> — no subscription, nothing to install.</a:t>
-            </a:r>
-          </a:p>
-          <a:p>
-            <a:pPr lvl="0" indent="-342900" marL="342900">
-              <a:buAutoNum type="arabicPeriod"/>
-            </a:pPr>
-            <a:r>
-              <a:rPr b="1"/>
-              <a:t>Validate</a:t>
-            </a:r>
-            <a:r>
-              <a:rPr/>
-              <a:t> — RTCF, two-pass</a:t>
-            </a:r>
-          </a:p>
-          <a:p>
-            <a:pPr lvl="0" indent="-342900" marL="342900">
-              <a:buAutoNum type="arabicPeriod"/>
-            </a:pPr>
-            <a:r>
-              <a:rPr b="1"/>
-              <a:t>Pressure-test</a:t>
-            </a:r>
-            <a:r>
-              <a:rPr/>
-              <a:t> — past the flattery</a:t>
-            </a:r>
-          </a:p>
-          <a:p>
-            <a:pPr lvl="0" indent="-342900" marL="342900">
-              <a:buAutoNum type="arabicPeriod"/>
-            </a:pPr>
-            <a:r>
-              <a:rPr b="1"/>
-              <a:t>Sharpen the pitch</a:t>
-            </a:r>
-            <a:r>
-              <a:rPr/>
-              <a:t> — two-pass on the pitch</a:t>
-            </a:r>
-          </a:p>
-          <a:p>
-            <a:pPr lvl="0" indent="0" marL="0">
-              <a:buNone/>
-            </a:pPr>
-            <a:r>
-              <a:rPr i="1"/>
-              <a:t>Run each on YOUR idea, in parallel with the volunteer’s — or just watch. Both work.</a:t>
-            </a:r>
-          </a:p>
-          <a:p>
-            <a:pPr lvl="0" indent="0" marL="0">
-              <a:buNone/>
-            </a:pPr>
-            <a:r>
-              <a:rPr i="1"/>
-              <a:t>Open one: gemini.google.com · chatgpt.com · claude.ai</a:t>
-            </a:r>
-          </a:p>
-          <a:p>
-            <a:pPr lvl="0" indent="0" marL="0">
-              <a:buNone/>
-            </a:pPr>
-            <a:r>
-              <a:rPr i="1"/>
-              <a:t>Sensitive idea? Work the tradie example today — run yours tonight in Msty (one install, nothing leaves your laptop).</a:t>
-            </a:r>
-          </a:p>
-        </p:txBody>
-      </p:sp>
+      <p:grpSpPr/>
       <p:pic>
         <p:nvPicPr>
-          <p:cNvPr descr="qr-companion.png" id="0" name="Picture 1"/>
+          <p:cNvPr id="2" name="Picture 1" descr="slide-11.png"/>
           <p:cNvPicPr>
-            <a:picLocks noGrp="1" noChangeAspect="1"/>
+            <a:picLocks noChangeAspect="1"/>
           </p:cNvPicPr>
           <p:nvPr/>
         </p:nvPicPr>
@@ -4464,61 +3374,26 @@
             <a:fillRect/>
           </a:stretch>
         </p:blipFill>
-        <p:spPr bwMode="auto">
+        <p:spPr>
           <a:xfrm>
-            <a:off x="4191000" y="203200"/>
-            <a:ext cx="3873500" cy="3873500"/>
+            <a:off x="0" y="0"/>
+            <a:ext cx="12192000" cy="6858000"/>
           </a:xfrm>
           <a:prstGeom prst="rect">
             <a:avLst/>
           </a:prstGeom>
-          <a:noFill/>
-          <a:ln w="9525">
-            <a:noFill/>
-            <a:headEnd/>
-            <a:tailEnd/>
-          </a:ln>
         </p:spPr>
       </p:pic>
-      <p:sp>
-        <p:nvSpPr>
-          <p:cNvPr id="1" name="TextBox 3"/>
-          <p:cNvSpPr txBox="1"/>
-          <p:nvPr>
-            <p:ph idx="1"/>
-          </p:nvPr>
-        </p:nvSpPr>
-        <p:spPr>
-          <a:xfrm>
-            <a:off x="3568700" y="4076700"/>
-            <a:ext cx="5105400" cy="508000"/>
-          </a:xfrm>
-          <a:prstGeom prst="rect">
-            <a:avLst/>
-          </a:prstGeom>
-          <a:noFill/>
-        </p:spPr>
-        <p:txBody>
-          <a:bodyPr/>
-          <a:lstStyle/>
-          <a:p>
-            <a:pPr lvl="0" indent="0" marL="0" algn="ctr">
-              <a:buNone/>
-            </a:pPr>
-            <a:r>
-              <a:rPr/>
-              <a:t>Follow along — today’s prompts, top of the site</a:t>
-            </a:r>
-          </a:p>
-        </p:txBody>
-      </p:sp>
     </p:spTree>
   </p:cSld>
+  <p:clrMapOvr>
+    <a:masterClrMapping/>
+  </p:clrMapOvr>
 </p:sld>
 </file>
 
-<file path=ppt/slides/slide7.xml><?xml version="1.0" encoding="utf-8"?>
-<p:sld xmlns:a="http://schemas.openxmlformats.org/drawingml/2006/main" xmlns:r="http://schemas.openxmlformats.org/officeDocument/2006/relationships" xmlns:p="http://schemas.openxmlformats.org/presentationml/2006/main">
+<file path=ppt/slides/slide12.xml><?xml version="1.0" encoding="utf-8"?>
+<p:sld xmlns:a="http://schemas.openxmlformats.org/drawingml/2006/main" xmlns:p="http://schemas.openxmlformats.org/presentationml/2006/main" xmlns:r="http://schemas.openxmlformats.org/officeDocument/2006/relationships">
   <p:cSld>
     <p:spTree>
       <p:nvGrpSpPr>
@@ -4526,109 +3401,41 @@
         <p:cNvGrpSpPr/>
         <p:nvPr/>
       </p:nvGrpSpPr>
-      <p:grpSpPr>
-        <a:xfrm>
-          <a:off x="0" y="0"/>
-          <a:ext cx="0" cy="0"/>
-          <a:chOff x="0" y="0"/>
-          <a:chExt cx="0" cy="0"/>
-        </a:xfrm>
-      </p:grpSpPr>
-      <p:sp>
-        <p:nvSpPr>
-          <p:cNvPr id="2" name="Title 1"/>
-          <p:cNvSpPr>
-            <a:spLocks noGrp="1"/>
-          </p:cNvSpPr>
-          <p:nvPr>
-            <p:ph type="title"/>
-          </p:nvPr>
-        </p:nvSpPr>
-        <p:spPr/>
-        <p:txBody>
-          <a:bodyPr/>
-          <a:lstStyle/>
-          <a:p>
-            <a:pPr lvl="0" indent="0" marL="0">
-              <a:buNone/>
-            </a:pPr>
-            <a:r>
-              <a:rPr/>
-              <a:t>Move 1: Validate (two-pass)</a:t>
-            </a:r>
-          </a:p>
-        </p:txBody>
-      </p:sp>
-      <p:sp>
-        <p:nvSpPr>
-          <p:cNvPr id="3" name="Content Placeholder 2"/>
-          <p:cNvSpPr>
-            <a:spLocks noGrp="1"/>
-          </p:cNvSpPr>
-          <p:nvPr>
-            <p:ph idx="1"/>
-          </p:nvPr>
-        </p:nvSpPr>
-        <p:spPr/>
-        <p:txBody>
-          <a:bodyPr/>
-          <a:lstStyle/>
-          <a:p>
-            <a:pPr lvl="0" indent="0" marL="0">
-              <a:buNone/>
-            </a:pPr>
-            <a:r>
-              <a:rPr b="1"/>
-              <a:t>Pass 1 (naive):</a:t>
-            </a:r>
-            <a:r>
-              <a:rPr/>
-              <a:t> an enthusiastic, over-long love-fest. </a:t>
-            </a:r>
-            <a:r>
-              <a:rPr i="1"/>
-              <a:t>Sycophancy, live.</a:t>
-            </a:r>
-          </a:p>
-          <a:p>
-            <a:pPr lvl="0" indent="0" marL="0">
-              <a:buNone/>
-            </a:pPr>
-            <a:r>
-              <a:rPr b="1"/>
-              <a:t>Pass 2 (with edge):</a:t>
-            </a:r>
-            <a:r>
-              <a:rPr/>
-              <a:t> Role · Task · </a:t>
-            </a:r>
-            <a:r>
-              <a:rPr b="1"/>
-              <a:t>Context</a:t>
-            </a:r>
-            <a:r>
-              <a:rPr/>
-              <a:t> · Format.</a:t>
-            </a:r>
-          </a:p>
-          <a:p>
-            <a:pPr lvl="0" indent="0" marL="1270000">
-              <a:buNone/>
-            </a:pPr>
-            <a:r>
-              <a:rPr sz="2000"/>
-              <a:t>Context is where your edge enters. No model supplies it.</a:t>
-            </a:r>
-          </a:p>
-        </p:txBody>
-      </p:sp>
+      <p:grpSpPr/>
+      <p:pic>
+        <p:nvPicPr>
+          <p:cNvPr id="2" name="Picture 1" descr="slide-12.png"/>
+          <p:cNvPicPr>
+            <a:picLocks noChangeAspect="1"/>
+          </p:cNvPicPr>
+          <p:nvPr/>
+        </p:nvPicPr>
+        <p:blipFill>
+          <a:blip r:embed="rId2"/>
+          <a:stretch>
+            <a:fillRect/>
+          </a:stretch>
+        </p:blipFill>
+        <p:spPr>
+          <a:xfrm>
+            <a:off x="0" y="0"/>
+            <a:ext cx="12192000" cy="6858000"/>
+          </a:xfrm>
+          <a:prstGeom prst="rect">
+            <a:avLst/>
+          </a:prstGeom>
+        </p:spPr>
+      </p:pic>
     </p:spTree>
   </p:cSld>
+  <p:clrMapOvr>
+    <a:masterClrMapping/>
+  </p:clrMapOvr>
 </p:sld>
 </file>
 
-<file path=ppt/slides/slide8.xml><?xml version="1.0" encoding="utf-8"?>
-<p:sld xmlns:a="http://schemas.openxmlformats.org/drawingml/2006/main" xmlns:r="http://schemas.openxmlformats.org/officeDocument/2006/relationships" xmlns:p="http://schemas.openxmlformats.org/presentationml/2006/main">
+<file path=ppt/slides/slide13.xml><?xml version="1.0" encoding="utf-8"?>
+<p:sld xmlns:a="http://schemas.openxmlformats.org/drawingml/2006/main" xmlns:p="http://schemas.openxmlformats.org/presentationml/2006/main" xmlns:r="http://schemas.openxmlformats.org/officeDocument/2006/relationships">
   <p:cSld>
     <p:spTree>
       <p:nvGrpSpPr>
@@ -4636,97 +3443,129 @@
         <p:cNvGrpSpPr/>
         <p:nvPr/>
       </p:nvGrpSpPr>
-      <p:grpSpPr>
-        <a:xfrm>
-          <a:off x="0" y="0"/>
-          <a:ext cx="0" cy="0"/>
-          <a:chOff x="0" y="0"/>
-          <a:chExt cx="0" cy="0"/>
-        </a:xfrm>
-      </p:grpSpPr>
-      <p:sp>
-        <p:nvSpPr>
-          <p:cNvPr id="2" name="Title 1"/>
-          <p:cNvSpPr>
-            <a:spLocks noGrp="1"/>
-          </p:cNvSpPr>
-          <p:nvPr>
-            <p:ph type="title"/>
-          </p:nvPr>
-        </p:nvSpPr>
-        <p:spPr/>
-        <p:txBody>
-          <a:bodyPr/>
-          <a:lstStyle/>
-          <a:p>
-            <a:pPr lvl="0" indent="0" marL="0">
-              <a:buNone/>
-            </a:pPr>
-            <a:r>
-              <a:rPr/>
-              <a:t>Move 2: Pressure-test</a:t>
-            </a:r>
-          </a:p>
-        </p:txBody>
-      </p:sp>
-      <p:sp>
-        <p:nvSpPr>
-          <p:cNvPr id="3" name="Content Placeholder 2"/>
-          <p:cNvSpPr>
-            <a:spLocks noGrp="1"/>
-          </p:cNvSpPr>
-          <p:nvPr>
-            <p:ph idx="1"/>
-          </p:nvPr>
-        </p:nvSpPr>
-        <p:spPr/>
-        <p:txBody>
-          <a:bodyPr/>
-          <a:lstStyle/>
-          <a:p>
-            <a:pPr lvl="0" indent="0" marL="1270000">
-              <a:buNone/>
-            </a:pPr>
-            <a:r>
-              <a:rPr sz="2000"/>
-              <a:t>Do not flatter me. Three reasons this fails. Name the load-bearing assumption.</a:t>
-            </a:r>
-          </a:p>
-          <a:p>
-            <a:pPr lvl="0" indent="0" marL="0">
-              <a:buNone/>
-            </a:pPr>
-            <a:r>
-              <a:rPr/>
-              <a:t>Then: </a:t>
-            </a:r>
-            <a:r>
-              <a:rPr b="1"/>
-              <a:t>Scale / Pivot / Kill</a:t>
-            </a:r>
-            <a:r>
-              <a:rPr/>
-              <a:t> — and the cheapest experiment that moves it up a notch.</a:t>
-            </a:r>
-          </a:p>
-          <a:p>
-            <a:pPr lvl="0" indent="0" marL="0">
-              <a:buNone/>
-            </a:pPr>
-            <a:r>
-              <a:rPr i="1"/>
-              <a:t>Killing is a good outcome.</a:t>
-            </a:r>
+      <p:grpSpPr/>
+      <p:pic>
+        <p:nvPicPr>
+          <p:cNvPr id="2" name="Picture 1" descr="slide-13.png"/>
+          <p:cNvPicPr>
+            <a:picLocks noChangeAspect="1"/>
+          </p:cNvPicPr>
+          <p:nvPr/>
+        </p:nvPicPr>
+        <p:blipFill>
+          <a:blip r:embed="rId2"/>
+          <a:stretch>
+            <a:fillRect/>
+          </a:stretch>
+        </p:blipFill>
+        <p:spPr>
+          <a:xfrm>
+            <a:off x="0" y="0"/>
+            <a:ext cx="12192000" cy="6858000"/>
+          </a:xfrm>
+          <a:prstGeom prst="rect">
+            <a:avLst/>
+          </a:prstGeom>
+        </p:spPr>
+      </p:pic>
+      <p:sp>
+        <p:nvSpPr>
+          <p:cNvPr id="3" name="Rectangle 2">
+            <a:hlinkClick r:id="rId3"/>
+          </p:cNvPr>
+          <p:cNvSpPr/>
+          <p:nvPr/>
+        </p:nvSpPr>
+        <p:spPr>
+          <a:xfrm>
+            <a:off x="2921000" y="4240113"/>
+            <a:ext cx="698500" cy="698500"/>
+          </a:xfrm>
+          <a:prstGeom prst="rect">
+            <a:avLst/>
+          </a:prstGeom>
+          <a:noFill/>
+          <a:ln>
+            <a:noFill/>
+          </a:ln>
+          <a:effectLst/>
+        </p:spPr>
+        <p:style>
+          <a:lnRef idx="1">
+            <a:schemeClr val="accent1"/>
+          </a:lnRef>
+          <a:fillRef idx="3">
+            <a:schemeClr val="accent1"/>
+          </a:fillRef>
+          <a:effectRef idx="2">
+            <a:schemeClr val="accent1"/>
+          </a:effectRef>
+          <a:fontRef idx="minor">
+            <a:schemeClr val="lt1"/>
+          </a:fontRef>
+        </p:style>
+        <p:txBody>
+          <a:bodyPr rtlCol="0" anchor="ctr"/>
+          <a:lstStyle/>
+          <a:p>
+            <a:pPr algn="ctr"/>
+          </a:p>
+        </p:txBody>
+      </p:sp>
+      <p:sp>
+        <p:nvSpPr>
+          <p:cNvPr id="4" name="Rectangle 3">
+            <a:hlinkClick r:id="rId3"/>
+          </p:cNvPr>
+          <p:cNvSpPr/>
+          <p:nvPr/>
+        </p:nvSpPr>
+        <p:spPr>
+          <a:xfrm>
+            <a:off x="3731220" y="4595713"/>
+            <a:ext cx="2020887" cy="114300"/>
+          </a:xfrm>
+          <a:prstGeom prst="rect">
+            <a:avLst/>
+          </a:prstGeom>
+          <a:noFill/>
+          <a:ln>
+            <a:noFill/>
+          </a:ln>
+          <a:effectLst/>
+        </p:spPr>
+        <p:style>
+          <a:lnRef idx="1">
+            <a:schemeClr val="accent1"/>
+          </a:lnRef>
+          <a:fillRef idx="3">
+            <a:schemeClr val="accent1"/>
+          </a:fillRef>
+          <a:effectRef idx="2">
+            <a:schemeClr val="accent1"/>
+          </a:effectRef>
+          <a:fontRef idx="minor">
+            <a:schemeClr val="lt1"/>
+          </a:fontRef>
+        </p:style>
+        <p:txBody>
+          <a:bodyPr rtlCol="0" anchor="ctr"/>
+          <a:lstStyle/>
+          <a:p>
+            <a:pPr algn="ctr"/>
           </a:p>
         </p:txBody>
       </p:sp>
     </p:spTree>
   </p:cSld>
+  <p:clrMapOvr>
+    <a:masterClrMapping/>
+  </p:clrMapOvr>
 </p:sld>
 </file>
 
-<file path=ppt/slides/slide9.xml><?xml version="1.0" encoding="utf-8"?>
-<p:sld xmlns:a="http://schemas.openxmlformats.org/drawingml/2006/main" xmlns:r="http://schemas.openxmlformats.org/officeDocument/2006/relationships" xmlns:p="http://schemas.openxmlformats.org/presentationml/2006/main">
+<file path=ppt/slides/slide2.xml><?xml version="1.0" encoding="utf-8"?>
+<p:sld xmlns:a="http://schemas.openxmlformats.org/drawingml/2006/main" xmlns:p="http://schemas.openxmlformats.org/presentationml/2006/main" xmlns:r="http://schemas.openxmlformats.org/officeDocument/2006/relationships">
   <p:cSld>
     <p:spTree>
       <p:nvGrpSpPr>
@@ -4734,91 +3573,418 @@
         <p:cNvGrpSpPr/>
         <p:nvPr/>
       </p:nvGrpSpPr>
-      <p:grpSpPr>
-        <a:xfrm>
-          <a:off x="0" y="0"/>
-          <a:ext cx="0" cy="0"/>
-          <a:chOff x="0" y="0"/>
-          <a:chExt cx="0" cy="0"/>
-        </a:xfrm>
-      </p:grpSpPr>
-      <p:sp>
-        <p:nvSpPr>
-          <p:cNvPr id="2" name="Title 1"/>
-          <p:cNvSpPr>
-            <a:spLocks noGrp="1"/>
-          </p:cNvSpPr>
-          <p:nvPr>
-            <p:ph type="title"/>
-          </p:nvPr>
-        </p:nvSpPr>
-        <p:spPr/>
-        <p:txBody>
-          <a:bodyPr/>
-          <a:lstStyle/>
-          <a:p>
-            <a:pPr lvl="0" indent="0" marL="0">
-              <a:buNone/>
-            </a:pPr>
-            <a:r>
-              <a:rPr/>
-              <a:t>Move 3: Sharpen the pitch</a:t>
-            </a:r>
-          </a:p>
-        </p:txBody>
-      </p:sp>
-      <p:sp>
-        <p:nvSpPr>
-          <p:cNvPr id="3" name="Content Placeholder 2"/>
-          <p:cNvSpPr>
-            <a:spLocks noGrp="1"/>
-          </p:cNvSpPr>
-          <p:nvPr>
-            <p:ph idx="1"/>
-          </p:nvPr>
-        </p:nvSpPr>
-        <p:spPr/>
-        <p:txBody>
-          <a:bodyPr/>
-          <a:lstStyle/>
-          <a:p>
-            <a:pPr lvl="0" indent="0" marL="0">
-              <a:buNone/>
-            </a:pPr>
-            <a:r>
-              <a:rPr b="1"/>
-              <a:t>Pass 1:</a:t>
-            </a:r>
-            <a:r>
-              <a:rPr/>
-              <a:t> generic 60-word pitch. Forgettable.</a:t>
-            </a:r>
-          </a:p>
-          <a:p>
-            <a:pPr lvl="0" indent="0" marL="0">
-              <a:buNone/>
-            </a:pPr>
-            <a:r>
-              <a:rPr b="1"/>
-              <a:t>Pass 2:</a:t>
-            </a:r>
-            <a:r>
-              <a:rPr/>
-              <a:t> in </a:t>
-            </a:r>
-            <a:r>
-              <a:rPr i="1"/>
-              <a:t>your</a:t>
-            </a:r>
-            <a:r>
-              <a:rPr/>
-              <a:t> voice, leading with the one thing only you would say.</a:t>
-            </a:r>
-          </a:p>
-        </p:txBody>
-      </p:sp>
+      <p:grpSpPr/>
+      <p:pic>
+        <p:nvPicPr>
+          <p:cNvPr id="2" name="Picture 1" descr="slide-02.png"/>
+          <p:cNvPicPr>
+            <a:picLocks noChangeAspect="1"/>
+          </p:cNvPicPr>
+          <p:nvPr/>
+        </p:nvPicPr>
+        <p:blipFill>
+          <a:blip r:embed="rId2"/>
+          <a:stretch>
+            <a:fillRect/>
+          </a:stretch>
+        </p:blipFill>
+        <p:spPr>
+          <a:xfrm>
+            <a:off x="0" y="0"/>
+            <a:ext cx="12192000" cy="6858000"/>
+          </a:xfrm>
+          <a:prstGeom prst="rect">
+            <a:avLst/>
+          </a:prstGeom>
+        </p:spPr>
+      </p:pic>
     </p:spTree>
   </p:cSld>
+  <p:clrMapOvr>
+    <a:masterClrMapping/>
+  </p:clrMapOvr>
+</p:sld>
+</file>
+
+<file path=ppt/slides/slide3.xml><?xml version="1.0" encoding="utf-8"?>
+<p:sld xmlns:a="http://schemas.openxmlformats.org/drawingml/2006/main" xmlns:p="http://schemas.openxmlformats.org/presentationml/2006/main" xmlns:r="http://schemas.openxmlformats.org/officeDocument/2006/relationships">
+  <p:cSld>
+    <p:spTree>
+      <p:nvGrpSpPr>
+        <p:cNvPr id="1" name=""/>
+        <p:cNvGrpSpPr/>
+        <p:nvPr/>
+      </p:nvGrpSpPr>
+      <p:grpSpPr/>
+      <p:pic>
+        <p:nvPicPr>
+          <p:cNvPr id="2" name="Picture 1" descr="slide-03.png"/>
+          <p:cNvPicPr>
+            <a:picLocks noChangeAspect="1"/>
+          </p:cNvPicPr>
+          <p:nvPr/>
+        </p:nvPicPr>
+        <p:blipFill>
+          <a:blip r:embed="rId2"/>
+          <a:stretch>
+            <a:fillRect/>
+          </a:stretch>
+        </p:blipFill>
+        <p:spPr>
+          <a:xfrm>
+            <a:off x="0" y="0"/>
+            <a:ext cx="12192000" cy="6858000"/>
+          </a:xfrm>
+          <a:prstGeom prst="rect">
+            <a:avLst/>
+          </a:prstGeom>
+        </p:spPr>
+      </p:pic>
+    </p:spTree>
+  </p:cSld>
+  <p:clrMapOvr>
+    <a:masterClrMapping/>
+  </p:clrMapOvr>
+</p:sld>
+</file>
+
+<file path=ppt/slides/slide4.xml><?xml version="1.0" encoding="utf-8"?>
+<p:sld xmlns:a="http://schemas.openxmlformats.org/drawingml/2006/main" xmlns:p="http://schemas.openxmlformats.org/presentationml/2006/main" xmlns:r="http://schemas.openxmlformats.org/officeDocument/2006/relationships">
+  <p:cSld>
+    <p:spTree>
+      <p:nvGrpSpPr>
+        <p:cNvPr id="1" name=""/>
+        <p:cNvGrpSpPr/>
+        <p:nvPr/>
+      </p:nvGrpSpPr>
+      <p:grpSpPr/>
+      <p:pic>
+        <p:nvPicPr>
+          <p:cNvPr id="2" name="Picture 1" descr="slide-04.png"/>
+          <p:cNvPicPr>
+            <a:picLocks noChangeAspect="1"/>
+          </p:cNvPicPr>
+          <p:nvPr/>
+        </p:nvPicPr>
+        <p:blipFill>
+          <a:blip r:embed="rId2"/>
+          <a:stretch>
+            <a:fillRect/>
+          </a:stretch>
+        </p:blipFill>
+        <p:spPr>
+          <a:xfrm>
+            <a:off x="0" y="0"/>
+            <a:ext cx="12192000" cy="6858000"/>
+          </a:xfrm>
+          <a:prstGeom prst="rect">
+            <a:avLst/>
+          </a:prstGeom>
+        </p:spPr>
+      </p:pic>
+    </p:spTree>
+  </p:cSld>
+  <p:clrMapOvr>
+    <a:masterClrMapping/>
+  </p:clrMapOvr>
+</p:sld>
+</file>
+
+<file path=ppt/slides/slide5.xml><?xml version="1.0" encoding="utf-8"?>
+<p:sld xmlns:a="http://schemas.openxmlformats.org/drawingml/2006/main" xmlns:p="http://schemas.openxmlformats.org/presentationml/2006/main" xmlns:r="http://schemas.openxmlformats.org/officeDocument/2006/relationships">
+  <p:cSld>
+    <p:spTree>
+      <p:nvGrpSpPr>
+        <p:cNvPr id="1" name=""/>
+        <p:cNvGrpSpPr/>
+        <p:nvPr/>
+      </p:nvGrpSpPr>
+      <p:grpSpPr/>
+      <p:pic>
+        <p:nvPicPr>
+          <p:cNvPr id="2" name="Picture 1" descr="slide-05.png"/>
+          <p:cNvPicPr>
+            <a:picLocks noChangeAspect="1"/>
+          </p:cNvPicPr>
+          <p:nvPr/>
+        </p:nvPicPr>
+        <p:blipFill>
+          <a:blip r:embed="rId2"/>
+          <a:stretch>
+            <a:fillRect/>
+          </a:stretch>
+        </p:blipFill>
+        <p:spPr>
+          <a:xfrm>
+            <a:off x="0" y="0"/>
+            <a:ext cx="12192000" cy="6858000"/>
+          </a:xfrm>
+          <a:prstGeom prst="rect">
+            <a:avLst/>
+          </a:prstGeom>
+        </p:spPr>
+      </p:pic>
+    </p:spTree>
+  </p:cSld>
+  <p:clrMapOvr>
+    <a:masterClrMapping/>
+  </p:clrMapOvr>
+</p:sld>
+</file>
+
+<file path=ppt/slides/slide6.xml><?xml version="1.0" encoding="utf-8"?>
+<p:sld xmlns:a="http://schemas.openxmlformats.org/drawingml/2006/main" xmlns:p="http://schemas.openxmlformats.org/presentationml/2006/main" xmlns:r="http://schemas.openxmlformats.org/officeDocument/2006/relationships">
+  <p:cSld>
+    <p:spTree>
+      <p:nvGrpSpPr>
+        <p:cNvPr id="1" name=""/>
+        <p:cNvGrpSpPr/>
+        <p:nvPr/>
+      </p:nvGrpSpPr>
+      <p:grpSpPr/>
+      <p:pic>
+        <p:nvPicPr>
+          <p:cNvPr id="2" name="Picture 1" descr="slide-06.png"/>
+          <p:cNvPicPr>
+            <a:picLocks noChangeAspect="1"/>
+          </p:cNvPicPr>
+          <p:nvPr/>
+        </p:nvPicPr>
+        <p:blipFill>
+          <a:blip r:embed="rId2"/>
+          <a:stretch>
+            <a:fillRect/>
+          </a:stretch>
+        </p:blipFill>
+        <p:spPr>
+          <a:xfrm>
+            <a:off x="0" y="0"/>
+            <a:ext cx="12192000" cy="6858000"/>
+          </a:xfrm>
+          <a:prstGeom prst="rect">
+            <a:avLst/>
+          </a:prstGeom>
+        </p:spPr>
+      </p:pic>
+      <p:sp>
+        <p:nvSpPr>
+          <p:cNvPr id="3" name="Rectangle 2">
+            <a:hlinkClick r:id="rId3"/>
+          </p:cNvPr>
+          <p:cNvSpPr/>
+          <p:nvPr/>
+        </p:nvSpPr>
+        <p:spPr>
+          <a:xfrm>
+            <a:off x="2921000" y="4477543"/>
+            <a:ext cx="698500" cy="698500"/>
+          </a:xfrm>
+          <a:prstGeom prst="rect">
+            <a:avLst/>
+          </a:prstGeom>
+          <a:noFill/>
+          <a:ln>
+            <a:noFill/>
+          </a:ln>
+          <a:effectLst/>
+        </p:spPr>
+        <p:style>
+          <a:lnRef idx="1">
+            <a:schemeClr val="accent1"/>
+          </a:lnRef>
+          <a:fillRef idx="3">
+            <a:schemeClr val="accent1"/>
+          </a:fillRef>
+          <a:effectRef idx="2">
+            <a:schemeClr val="accent1"/>
+          </a:effectRef>
+          <a:fontRef idx="minor">
+            <a:schemeClr val="lt1"/>
+          </a:fontRef>
+        </p:style>
+        <p:txBody>
+          <a:bodyPr rtlCol="0" anchor="ctr"/>
+          <a:lstStyle/>
+          <a:p>
+            <a:pPr algn="ctr"/>
+          </a:p>
+        </p:txBody>
+      </p:sp>
+      <p:sp>
+        <p:nvSpPr>
+          <p:cNvPr id="4" name="Rectangle 3">
+            <a:hlinkClick r:id="rId3"/>
+          </p:cNvPr>
+          <p:cNvSpPr/>
+          <p:nvPr/>
+        </p:nvSpPr>
+        <p:spPr>
+          <a:xfrm>
+            <a:off x="3731220" y="4833143"/>
+            <a:ext cx="2020887" cy="114300"/>
+          </a:xfrm>
+          <a:prstGeom prst="rect">
+            <a:avLst/>
+          </a:prstGeom>
+          <a:noFill/>
+          <a:ln>
+            <a:noFill/>
+          </a:ln>
+          <a:effectLst/>
+        </p:spPr>
+        <p:style>
+          <a:lnRef idx="1">
+            <a:schemeClr val="accent1"/>
+          </a:lnRef>
+          <a:fillRef idx="3">
+            <a:schemeClr val="accent1"/>
+          </a:fillRef>
+          <a:effectRef idx="2">
+            <a:schemeClr val="accent1"/>
+          </a:effectRef>
+          <a:fontRef idx="minor">
+            <a:schemeClr val="lt1"/>
+          </a:fontRef>
+        </p:style>
+        <p:txBody>
+          <a:bodyPr rtlCol="0" anchor="ctr"/>
+          <a:lstStyle/>
+          <a:p>
+            <a:pPr algn="ctr"/>
+          </a:p>
+        </p:txBody>
+      </p:sp>
+    </p:spTree>
+  </p:cSld>
+  <p:clrMapOvr>
+    <a:masterClrMapping/>
+  </p:clrMapOvr>
+</p:sld>
+</file>
+
+<file path=ppt/slides/slide7.xml><?xml version="1.0" encoding="utf-8"?>
+<p:sld xmlns:a="http://schemas.openxmlformats.org/drawingml/2006/main" xmlns:p="http://schemas.openxmlformats.org/presentationml/2006/main" xmlns:r="http://schemas.openxmlformats.org/officeDocument/2006/relationships">
+  <p:cSld>
+    <p:spTree>
+      <p:nvGrpSpPr>
+        <p:cNvPr id="1" name=""/>
+        <p:cNvGrpSpPr/>
+        <p:nvPr/>
+      </p:nvGrpSpPr>
+      <p:grpSpPr/>
+      <p:pic>
+        <p:nvPicPr>
+          <p:cNvPr id="2" name="Picture 1" descr="slide-07.png"/>
+          <p:cNvPicPr>
+            <a:picLocks noChangeAspect="1"/>
+          </p:cNvPicPr>
+          <p:nvPr/>
+        </p:nvPicPr>
+        <p:blipFill>
+          <a:blip r:embed="rId2"/>
+          <a:stretch>
+            <a:fillRect/>
+          </a:stretch>
+        </p:blipFill>
+        <p:spPr>
+          <a:xfrm>
+            <a:off x="0" y="0"/>
+            <a:ext cx="12192000" cy="6858000"/>
+          </a:xfrm>
+          <a:prstGeom prst="rect">
+            <a:avLst/>
+          </a:prstGeom>
+        </p:spPr>
+      </p:pic>
+    </p:spTree>
+  </p:cSld>
+  <p:clrMapOvr>
+    <a:masterClrMapping/>
+  </p:clrMapOvr>
+</p:sld>
+</file>
+
+<file path=ppt/slides/slide8.xml><?xml version="1.0" encoding="utf-8"?>
+<p:sld xmlns:a="http://schemas.openxmlformats.org/drawingml/2006/main" xmlns:p="http://schemas.openxmlformats.org/presentationml/2006/main" xmlns:r="http://schemas.openxmlformats.org/officeDocument/2006/relationships">
+  <p:cSld>
+    <p:spTree>
+      <p:nvGrpSpPr>
+        <p:cNvPr id="1" name=""/>
+        <p:cNvGrpSpPr/>
+        <p:nvPr/>
+      </p:nvGrpSpPr>
+      <p:grpSpPr/>
+      <p:pic>
+        <p:nvPicPr>
+          <p:cNvPr id="2" name="Picture 1" descr="slide-08.png"/>
+          <p:cNvPicPr>
+            <a:picLocks noChangeAspect="1"/>
+          </p:cNvPicPr>
+          <p:nvPr/>
+        </p:nvPicPr>
+        <p:blipFill>
+          <a:blip r:embed="rId2"/>
+          <a:stretch>
+            <a:fillRect/>
+          </a:stretch>
+        </p:blipFill>
+        <p:spPr>
+          <a:xfrm>
+            <a:off x="0" y="0"/>
+            <a:ext cx="12192000" cy="6858000"/>
+          </a:xfrm>
+          <a:prstGeom prst="rect">
+            <a:avLst/>
+          </a:prstGeom>
+        </p:spPr>
+      </p:pic>
+    </p:spTree>
+  </p:cSld>
+  <p:clrMapOvr>
+    <a:masterClrMapping/>
+  </p:clrMapOvr>
+</p:sld>
+</file>
+
+<file path=ppt/slides/slide9.xml><?xml version="1.0" encoding="utf-8"?>
+<p:sld xmlns:a="http://schemas.openxmlformats.org/drawingml/2006/main" xmlns:p="http://schemas.openxmlformats.org/presentationml/2006/main" xmlns:r="http://schemas.openxmlformats.org/officeDocument/2006/relationships">
+  <p:cSld>
+    <p:spTree>
+      <p:nvGrpSpPr>
+        <p:cNvPr id="1" name=""/>
+        <p:cNvGrpSpPr/>
+        <p:nvPr/>
+      </p:nvGrpSpPr>
+      <p:grpSpPr/>
+      <p:pic>
+        <p:nvPicPr>
+          <p:cNvPr id="2" name="Picture 1" descr="slide-09.png"/>
+          <p:cNvPicPr>
+            <a:picLocks noChangeAspect="1"/>
+          </p:cNvPicPr>
+          <p:nvPr/>
+        </p:nvPicPr>
+        <p:blipFill>
+          <a:blip r:embed="rId2"/>
+          <a:stretch>
+            <a:fillRect/>
+          </a:stretch>
+        </p:blipFill>
+        <p:spPr>
+          <a:xfrm>
+            <a:off x="0" y="0"/>
+            <a:ext cx="12192000" cy="6858000"/>
+          </a:xfrm>
+          <a:prstGeom prst="rect">
+            <a:avLst/>
+          </a:prstGeom>
+        </p:spPr>
+      </p:pic>
+    </p:spTree>
+  </p:cSld>
+  <p:clrMapOvr>
+    <a:masterClrMapping/>
+  </p:clrMapOvr>
 </p:sld>
 </file>
 
@@ -5140,265 +4306,4 @@
   </a:objectDefaults>
   <a:extraClrSchemeLst/>
 </a:theme>
-</file>
-
-<file path=ppt/theme/theme2.xml><?xml version="1.0" encoding="utf-8"?>
-<a:theme xmlns:a="http://schemas.openxmlformats.org/drawingml/2006/main" name="Office Theme">
-  <a:themeElements>
-    <a:clrScheme name="Office">
-      <a:dk1>
-        <a:sysClr val="windowText" lastClr="000000"/>
-      </a:dk1>
-      <a:lt1>
-        <a:sysClr val="window" lastClr="FFFFFF"/>
-      </a:lt1>
-      <a:dk2>
-        <a:srgbClr val="44546A"/>
-      </a:dk2>
-      <a:lt2>
-        <a:srgbClr val="E7E6E6"/>
-      </a:lt2>
-      <a:accent1>
-        <a:srgbClr val="5B9BD5"/>
-      </a:accent1>
-      <a:accent2>
-        <a:srgbClr val="ED7D31"/>
-      </a:accent2>
-      <a:accent3>
-        <a:srgbClr val="A5A5A5"/>
-      </a:accent3>
-      <a:accent4>
-        <a:srgbClr val="FFC000"/>
-      </a:accent4>
-      <a:accent5>
-        <a:srgbClr val="4472C4"/>
-      </a:accent5>
-      <a:accent6>
-        <a:srgbClr val="70AD47"/>
-      </a:accent6>
-      <a:hlink>
-        <a:srgbClr val="0563C1"/>
-      </a:hlink>
-      <a:folHlink>
-        <a:srgbClr val="954F72"/>
-      </a:folHlink>
-    </a:clrScheme>
-    <a:fontScheme name="Office">
-      <a:majorFont>
-        <a:latin typeface="Calibri Light" panose="020F0302020204030204"/>
-        <a:ea typeface=""/>
-        <a:cs typeface=""/>
-        <a:font script="Jpan" typeface="ＭＳ Ｐゴシック"/>
-        <a:font script="Hang" typeface="맑은 고딕"/>
-        <a:font script="Hans" typeface="宋体"/>
-        <a:font script="Hant" typeface="新細明體"/>
-        <a:font script="Arab" typeface="Times New Roman"/>
-        <a:font script="Hebr" typeface="Times New Roman"/>
-        <a:font script="Thai" typeface="Angsana New"/>
-        <a:font script="Ethi" typeface="Nyala"/>
-        <a:font script="Beng" typeface="Vrinda"/>
-        <a:font script="Gujr" typeface="Shruti"/>
-        <a:font script="Khmr" typeface="MoolBoran"/>
-        <a:font script="Knda" typeface="Tunga"/>
-        <a:font script="Guru" typeface="Raavi"/>
-        <a:font script="Cans" typeface="Euphemia"/>
-        <a:font script="Cher" typeface="Plantagenet Cherokee"/>
-        <a:font script="Yiii" typeface="Microsoft Yi Baiti"/>
-        <a:font script="Tibt" typeface="Microsoft Himalaya"/>
-        <a:font script="Thaa" typeface="MV Boli"/>
-        <a:font script="Deva" typeface="Mangal"/>
-        <a:font script="Telu" typeface="Gautami"/>
-        <a:font script="Taml" typeface="Latha"/>
-        <a:font script="Syrc" typeface="Estrangelo Edessa"/>
-        <a:font script="Orya" typeface="Kalinga"/>
-        <a:font script="Mlym" typeface="Kartika"/>
-        <a:font script="Laoo" typeface="DokChampa"/>
-        <a:font script="Sinh" typeface="Iskoola Pota"/>
-        <a:font script="Mong" typeface="Mongolian Baiti"/>
-        <a:font script="Viet" typeface="Times New Roman"/>
-        <a:font script="Uigh" typeface="Microsoft Uighur"/>
-        <a:font script="Geor" typeface="Sylfaen"/>
-      </a:majorFont>
-      <a:minorFont>
-        <a:latin typeface="Calibri" panose="020F0502020204030204"/>
-        <a:ea typeface=""/>
-        <a:cs typeface=""/>
-        <a:font script="Jpan" typeface="ＭＳ Ｐゴシック"/>
-        <a:font script="Hang" typeface="맑은 고딕"/>
-        <a:font script="Hans" typeface="宋体"/>
-        <a:font script="Hant" typeface="新細明體"/>
-        <a:font script="Arab" typeface="Arial"/>
-        <a:font script="Hebr" typeface="Arial"/>
-        <a:font script="Thai" typeface="Cordia New"/>
-        <a:font script="Ethi" typeface="Nyala"/>
-        <a:font script="Beng" typeface="Vrinda"/>
-        <a:font script="Gujr" typeface="Shruti"/>
-        <a:font script="Khmr" typeface="DaunPenh"/>
-        <a:font script="Knda" typeface="Tunga"/>
-        <a:font script="Guru" typeface="Raavi"/>
-        <a:font script="Cans" typeface="Euphemia"/>
-        <a:font script="Cher" typeface="Plantagenet Cherokee"/>
-        <a:font script="Yiii" typeface="Microsoft Yi Baiti"/>
-        <a:font script="Tibt" typeface="Microsoft Himalaya"/>
-        <a:font script="Thaa" typeface="MV Boli"/>
-        <a:font script="Deva" typeface="Mangal"/>
-        <a:font script="Telu" typeface="Gautami"/>
-        <a:font script="Taml" typeface="Latha"/>
-        <a:font script="Syrc" typeface="Estrangelo Edessa"/>
-        <a:font script="Orya" typeface="Kalinga"/>
-        <a:font script="Mlym" typeface="Kartika"/>
-        <a:font script="Laoo" typeface="DokChampa"/>
-        <a:font script="Sinh" typeface="Iskoola Pota"/>
-        <a:font script="Mong" typeface="Mongolian Baiti"/>
-        <a:font script="Viet" typeface="Arial"/>
-        <a:font script="Uigh" typeface="Microsoft Uighur"/>
-        <a:font script="Geor" typeface="Sylfaen"/>
-      </a:minorFont>
-    </a:fontScheme>
-    <a:fmtScheme name="Office">
-      <a:fillStyleLst>
-        <a:solidFill>
-          <a:schemeClr val="phClr"/>
-        </a:solidFill>
-        <a:gradFill rotWithShape="1">
-          <a:gsLst>
-            <a:gs pos="0">
-              <a:schemeClr val="phClr">
-                <a:lumMod val="110000"/>
-                <a:satMod val="105000"/>
-                <a:tint val="67000"/>
-              </a:schemeClr>
-            </a:gs>
-            <a:gs pos="50000">
-              <a:schemeClr val="phClr">
-                <a:lumMod val="105000"/>
-                <a:satMod val="103000"/>
-                <a:tint val="73000"/>
-              </a:schemeClr>
-            </a:gs>
-            <a:gs pos="100000">
-              <a:schemeClr val="phClr">
-                <a:lumMod val="105000"/>
-                <a:satMod val="109000"/>
-                <a:tint val="81000"/>
-              </a:schemeClr>
-            </a:gs>
-          </a:gsLst>
-          <a:lin ang="5400000" scaled="0"/>
-        </a:gradFill>
-        <a:gradFill rotWithShape="1">
-          <a:gsLst>
-            <a:gs pos="0">
-              <a:schemeClr val="phClr">
-                <a:satMod val="103000"/>
-                <a:lumMod val="102000"/>
-                <a:tint val="94000"/>
-              </a:schemeClr>
-            </a:gs>
-            <a:gs pos="50000">
-              <a:schemeClr val="phClr">
-                <a:satMod val="110000"/>
-                <a:lumMod val="100000"/>
-                <a:shade val="100000"/>
-              </a:schemeClr>
-            </a:gs>
-            <a:gs pos="100000">
-              <a:schemeClr val="phClr">
-                <a:lumMod val="99000"/>
-                <a:satMod val="120000"/>
-                <a:shade val="78000"/>
-              </a:schemeClr>
-            </a:gs>
-          </a:gsLst>
-          <a:lin ang="5400000" scaled="0"/>
-        </a:gradFill>
-      </a:fillStyleLst>
-      <a:lnStyleLst>
-        <a:ln w="6350" cap="flat" cmpd="sng" algn="ctr">
-          <a:solidFill>
-            <a:schemeClr val="phClr"/>
-          </a:solidFill>
-          <a:prstDash val="solid"/>
-          <a:miter lim="800000"/>
-        </a:ln>
-        <a:ln w="12700" cap="flat" cmpd="sng" algn="ctr">
-          <a:solidFill>
-            <a:schemeClr val="phClr"/>
-          </a:solidFill>
-          <a:prstDash val="solid"/>
-          <a:miter lim="800000"/>
-        </a:ln>
-        <a:ln w="19050" cap="flat" cmpd="sng" algn="ctr">
-          <a:solidFill>
-            <a:schemeClr val="phClr"/>
-          </a:solidFill>
-          <a:prstDash val="solid"/>
-          <a:miter lim="800000"/>
-        </a:ln>
-      </a:lnStyleLst>
-      <a:effectStyleLst>
-        <a:effectStyle>
-          <a:effectLst/>
-        </a:effectStyle>
-        <a:effectStyle>
-          <a:effectLst/>
-        </a:effectStyle>
-        <a:effectStyle>
-          <a:effectLst>
-            <a:outerShdw blurRad="57150" dist="19050" dir="5400000" algn="ctr" rotWithShape="0">
-              <a:srgbClr val="000000">
-                <a:alpha val="63000"/>
-              </a:srgbClr>
-            </a:outerShdw>
-          </a:effectLst>
-        </a:effectStyle>
-      </a:effectStyleLst>
-      <a:bgFillStyleLst>
-        <a:solidFill>
-          <a:schemeClr val="phClr"/>
-        </a:solidFill>
-        <a:solidFill>
-          <a:schemeClr val="phClr">
-            <a:tint val="95000"/>
-            <a:satMod val="170000"/>
-          </a:schemeClr>
-        </a:solidFill>
-        <a:gradFill rotWithShape="1">
-          <a:gsLst>
-            <a:gs pos="0">
-              <a:schemeClr val="phClr">
-                <a:tint val="93000"/>
-                <a:satMod val="150000"/>
-                <a:shade val="98000"/>
-                <a:lumMod val="102000"/>
-              </a:schemeClr>
-            </a:gs>
-            <a:gs pos="50000">
-              <a:schemeClr val="phClr">
-                <a:tint val="98000"/>
-                <a:satMod val="130000"/>
-                <a:shade val="90000"/>
-                <a:lumMod val="103000"/>
-              </a:schemeClr>
-            </a:gs>
-            <a:gs pos="100000">
-              <a:schemeClr val="phClr">
-                <a:shade val="63000"/>
-                <a:satMod val="120000"/>
-              </a:schemeClr>
-            </a:gs>
-          </a:gsLst>
-          <a:lin ang="5400000" scaled="0"/>
-        </a:gradFill>
-      </a:bgFillStyleLst>
-    </a:fmtScheme>
-  </a:themeElements>
-  <a:objectDefaults/>
-  <a:extraClrSchemeLst/>
-  <a:extLst>
-    <a:ext uri="{05A4C25C-085E-4340-85A3-A5531E510DB2}">
-      <thm15:themeFamily xmlns:thm15="http://schemas.microsoft.com/office/thememl/2012/main" name="Office Theme" id="{62F939B6-93AF-4DB8-9C6B-D6C7DFDC589F}" vid="{4A3C46E8-61CC-4603-A589-7422A47A8E4A}"/>
-    </a:ext>
-  </a:extLst>
-</a:theme>
 </file>
--- a/slides/deck.pptx
+++ b/slides/deck.pptx
@@ -3134,8 +3134,8 @@
         </p:nvSpPr>
         <p:spPr>
           <a:xfrm>
-            <a:off x="2921000" y="3748881"/>
-            <a:ext cx="698500" cy="698500"/>
+            <a:off x="1333500" y="3908970"/>
+            <a:ext cx="1047750" cy="1047750"/>
           </a:xfrm>
           <a:prstGeom prst="rect">
             <a:avLst/>
@@ -3178,8 +3178,8 @@
         </p:nvSpPr>
         <p:spPr>
           <a:xfrm>
-            <a:off x="3731220" y="4171354"/>
-            <a:ext cx="2176363" cy="114300"/>
+            <a:off x="2548830" y="4542680"/>
+            <a:ext cx="3264544" cy="171450"/>
           </a:xfrm>
           <a:prstGeom prst="rect">
             <a:avLst/>
@@ -3222,8 +3222,8 @@
         </p:nvSpPr>
         <p:spPr>
           <a:xfrm>
-            <a:off x="2921000" y="4863802"/>
-            <a:ext cx="698500" cy="698500"/>
+            <a:off x="1333500" y="5581352"/>
+            <a:ext cx="1047750" cy="1047750"/>
           </a:xfrm>
           <a:prstGeom prst="rect">
             <a:avLst/>
@@ -3266,8 +3266,8 @@
         </p:nvSpPr>
         <p:spPr>
           <a:xfrm>
-            <a:off x="5337571" y="5219402"/>
-            <a:ext cx="2020887" cy="114300"/>
+            <a:off x="4958357" y="6114752"/>
+            <a:ext cx="3031331" cy="171450"/>
           </a:xfrm>
           <a:prstGeom prst="rect">
             <a:avLst/>
@@ -3478,8 +3478,8 @@
         </p:nvSpPr>
         <p:spPr>
           <a:xfrm>
-            <a:off x="2921000" y="4240113"/>
-            <a:ext cx="698500" cy="698500"/>
+            <a:off x="1333500" y="4645669"/>
+            <a:ext cx="1047750" cy="1047750"/>
           </a:xfrm>
           <a:prstGeom prst="rect">
             <a:avLst/>
@@ -3522,8 +3522,8 @@
         </p:nvSpPr>
         <p:spPr>
           <a:xfrm>
-            <a:off x="3731220" y="4595713"/>
-            <a:ext cx="2020887" cy="114300"/>
+            <a:off x="2548830" y="5179069"/>
+            <a:ext cx="3031331" cy="171450"/>
           </a:xfrm>
           <a:prstGeom prst="rect">
             <a:avLst/>
@@ -3776,8 +3776,8 @@
         </p:nvSpPr>
         <p:spPr>
           <a:xfrm>
-            <a:off x="2921000" y="4477543"/>
-            <a:ext cx="698500" cy="698500"/>
+            <a:off x="1333500" y="5001815"/>
+            <a:ext cx="1047750" cy="1047750"/>
           </a:xfrm>
           <a:prstGeom prst="rect">
             <a:avLst/>
@@ -3820,8 +3820,8 @@
         </p:nvSpPr>
         <p:spPr>
           <a:xfrm>
-            <a:off x="3731220" y="4833143"/>
-            <a:ext cx="2020887" cy="114300"/>
+            <a:off x="2548830" y="5535215"/>
+            <a:ext cx="3031331" cy="171450"/>
           </a:xfrm>
           <a:prstGeom prst="rect">
             <a:avLst/>
